--- a/ゲーム科2年/00_前期/ゲーム開発Ⅲ/ゲーム物理学/座学/26_衝突.pptx
+++ b/ゲーム科2年/00_前期/ゲーム開発Ⅲ/ゲーム物理学/座学/26_衝突.pptx
@@ -12,6 +12,12 @@
     <p:sldId id="265" r:id="rId6"/>
     <p:sldId id="266" r:id="rId7"/>
     <p:sldId id="267" r:id="rId8"/>
+    <p:sldId id="268" r:id="rId9"/>
+    <p:sldId id="269" r:id="rId10"/>
+    <p:sldId id="270" r:id="rId11"/>
+    <p:sldId id="271" r:id="rId12"/>
+    <p:sldId id="272" r:id="rId13"/>
+    <p:sldId id="273" r:id="rId14"/>
   </p:sldIdLst>
   <p:sldSz cx="12192000" cy="6858000"/>
   <p:notesSz cx="6858000" cy="9144000"/>
@@ -3775,6 +3781,3279 @@
 </p:sld>
 </file>
 
+<file path=ppt/slides/slide10.xml><?xml version="1.0" encoding="utf-8"?>
+<p:sld xmlns:a="http://schemas.openxmlformats.org/drawingml/2006/main" xmlns:r="http://schemas.openxmlformats.org/officeDocument/2006/relationships" xmlns:p="http://schemas.openxmlformats.org/presentationml/2006/main">
+  <p:cSld>
+    <p:spTree>
+      <p:nvGrpSpPr>
+        <p:cNvPr id="1" name=""/>
+        <p:cNvGrpSpPr/>
+        <p:nvPr/>
+      </p:nvGrpSpPr>
+      <p:grpSpPr>
+        <a:xfrm>
+          <a:off x="0" y="0"/>
+          <a:ext cx="0" cy="0"/>
+          <a:chOff x="0" y="0"/>
+          <a:chExt cx="0" cy="0"/>
+        </a:xfrm>
+      </p:grpSpPr>
+      <p:sp>
+        <p:nvSpPr>
+          <p:cNvPr id="4" name="テキスト ボックス 3">
+            <a:extLst>
+              <a:ext uri="{FF2B5EF4-FFF2-40B4-BE49-F238E27FC236}">
+                <a16:creationId xmlns:a16="http://schemas.microsoft.com/office/drawing/2014/main" id="{5A13BF46-B8C5-48AA-8308-C9ECFF431A18}"/>
+              </a:ext>
+            </a:extLst>
+          </p:cNvPr>
+          <p:cNvSpPr txBox="1"/>
+          <p:nvPr/>
+        </p:nvSpPr>
+        <p:spPr>
+          <a:xfrm>
+            <a:off x="567542" y="491954"/>
+            <a:ext cx="1943161" cy="584775"/>
+          </a:xfrm>
+          <a:prstGeom prst="rect">
+            <a:avLst/>
+          </a:prstGeom>
+          <a:noFill/>
+        </p:spPr>
+        <p:txBody>
+          <a:bodyPr wrap="none" rtlCol="0">
+            <a:spAutoFit/>
+          </a:bodyPr>
+          <a:lstStyle/>
+          <a:p>
+            <a:r>
+              <a:rPr lang="ja-JP" altLang="en-US" sz="3200" b="1" u="sng" dirty="0"/>
+              <a:t>衝突 例題</a:t>
+            </a:r>
+            <a:endParaRPr kumimoji="1" lang="en-US" altLang="ja-JP" sz="3200" b="1" u="sng" dirty="0"/>
+          </a:p>
+        </p:txBody>
+      </p:sp>
+      <mc:AlternateContent xmlns:mc="http://schemas.openxmlformats.org/markup-compatibility/2006">
+        <mc:Choice xmlns:a14="http://schemas.microsoft.com/office/drawing/2010/main" Requires="a14">
+          <p:sp>
+            <p:nvSpPr>
+              <p:cNvPr id="6" name="テキスト ボックス 5">
+                <a:extLst>
+                  <a:ext uri="{FF2B5EF4-FFF2-40B4-BE49-F238E27FC236}">
+                    <a16:creationId xmlns:a16="http://schemas.microsoft.com/office/drawing/2014/main" id="{55830AD6-028B-4C4E-80BF-B70DFC1C3A46}"/>
+                  </a:ext>
+                </a:extLst>
+              </p:cNvPr>
+              <p:cNvSpPr txBox="1"/>
+              <p:nvPr/>
+            </p:nvSpPr>
+            <p:spPr>
+              <a:xfrm>
+                <a:off x="567542" y="1216429"/>
+                <a:ext cx="9417963" cy="4642809"/>
+              </a:xfrm>
+              <a:prstGeom prst="rect">
+                <a:avLst/>
+              </a:prstGeom>
+              <a:noFill/>
+            </p:spPr>
+            <p:txBody>
+              <a:bodyPr wrap="none" rtlCol="0">
+                <a:spAutoFit/>
+              </a:bodyPr>
+              <a:lstStyle/>
+              <a:p>
+                <a:r>
+                  <a:rPr lang="ja-JP" altLang="en-US" sz="2400" dirty="0"/>
+                  <a:t>以下の２つの鉛玉が衝突した後の、それぞれの速度を求めなさい。</a:t>
+                </a:r>
+                <a:endParaRPr lang="en-US" altLang="ja-JP" sz="2400" dirty="0"/>
+              </a:p>
+              <a:p>
+                <a:r>
+                  <a:rPr lang="ja-JP" altLang="en-US" sz="2400" dirty="0"/>
+                  <a:t>ただし、鉛同士のはねかえり係数は</a:t>
+                </a:r>
+                <a:r>
+                  <a:rPr lang="en-US" altLang="ja-JP" sz="2400" dirty="0"/>
+                  <a:t>0.2</a:t>
+                </a:r>
+                <a:r>
+                  <a:rPr lang="ja-JP" altLang="en-US" sz="2400" dirty="0"/>
+                  <a:t>とする</a:t>
+                </a:r>
+                <a:endParaRPr lang="en-US" altLang="ja-JP" sz="2400" dirty="0"/>
+              </a:p>
+              <a:p>
+                <a:r>
+                  <a:rPr lang="ja-JP" altLang="en-US" sz="2400" dirty="0"/>
+                  <a:t>■鉛玉</a:t>
+                </a:r>
+                <a:r>
+                  <a:rPr lang="en-US" altLang="ja-JP" sz="2400" dirty="0"/>
+                  <a:t>A</a:t>
+                </a:r>
+              </a:p>
+              <a:p>
+                <a:r>
+                  <a:rPr lang="ja-JP" altLang="en-US" sz="2400" dirty="0"/>
+                  <a:t>・質量：</a:t>
+                </a:r>
+                <a14:m>
+                  <m:oMath xmlns:m="http://schemas.openxmlformats.org/officeDocument/2006/math">
+                    <m:r>
+                      <a:rPr lang="en-US" altLang="ja-JP" sz="2400" i="1" dirty="0" smtClean="0">
+                        <a:latin typeface="Cambria Math" panose="02040503050406030204" pitchFamily="18" charset="0"/>
+                      </a:rPr>
+                      <m:t>500</m:t>
+                    </m:r>
+                    <m:r>
+                      <a:rPr lang="en-US" altLang="ja-JP" sz="2400" i="1" dirty="0" smtClean="0">
+                        <a:latin typeface="Cambria Math" panose="02040503050406030204" pitchFamily="18" charset="0"/>
+                      </a:rPr>
+                      <m:t>𝑔</m:t>
+                    </m:r>
+                  </m:oMath>
+                </a14:m>
+                <a:r>
+                  <a:rPr lang="en-US" altLang="ja-JP" sz="2400" dirty="0"/>
+                  <a:t>	</a:t>
+                </a:r>
+                <a:r>
+                  <a:rPr lang="ja-JP" altLang="en-US" sz="2400" dirty="0"/>
+                  <a:t>・速度</a:t>
+                </a:r>
+                <a14:m>
+                  <m:oMath xmlns:m="http://schemas.openxmlformats.org/officeDocument/2006/math">
+                    <m:r>
+                      <a:rPr lang="en-US" altLang="ja-JP" sz="2400" i="1" dirty="0" smtClean="0">
+                        <a:latin typeface="Cambria Math" panose="02040503050406030204" pitchFamily="18" charset="0"/>
+                      </a:rPr>
+                      <m:t>30</m:t>
+                    </m:r>
+                    <m:r>
+                      <a:rPr lang="en-US" altLang="ja-JP" sz="2400" i="1" dirty="0" smtClean="0">
+                        <a:latin typeface="Cambria Math" panose="02040503050406030204" pitchFamily="18" charset="0"/>
+                      </a:rPr>
+                      <m:t>𝑚</m:t>
+                    </m:r>
+                    <m:r>
+                      <a:rPr lang="en-US" altLang="ja-JP" sz="2400" i="1" dirty="0" smtClean="0">
+                        <a:latin typeface="Cambria Math" panose="02040503050406030204" pitchFamily="18" charset="0"/>
+                      </a:rPr>
+                      <m:t>/</m:t>
+                    </m:r>
+                    <m:r>
+                      <a:rPr lang="ja-JP" altLang="en-US" sz="2400" i="1" dirty="0" smtClean="0">
+                        <a:latin typeface="Cambria Math" panose="02040503050406030204" pitchFamily="18" charset="0"/>
+                      </a:rPr>
+                      <m:t>秒</m:t>
+                    </m:r>
+                  </m:oMath>
+                </a14:m>
+                <a:endParaRPr lang="en-US" altLang="ja-JP" sz="2400" dirty="0"/>
+              </a:p>
+              <a:p>
+                <a:r>
+                  <a:rPr lang="ja-JP" altLang="en-US" sz="2400" dirty="0"/>
+                  <a:t>■鉛玉</a:t>
+                </a:r>
+                <a:r>
+                  <a:rPr lang="en-US" altLang="ja-JP" sz="2400" dirty="0"/>
+                  <a:t>B</a:t>
+                </a:r>
+              </a:p>
+              <a:p>
+                <a:r>
+                  <a:rPr lang="ja-JP" altLang="en-US" sz="2400" dirty="0"/>
+                  <a:t>・質量：</a:t>
+                </a:r>
+                <a14:m>
+                  <m:oMath xmlns:m="http://schemas.openxmlformats.org/officeDocument/2006/math">
+                    <m:r>
+                      <a:rPr lang="en-US" altLang="ja-JP" sz="2400" i="1" dirty="0" smtClean="0">
+                        <a:latin typeface="Cambria Math" panose="02040503050406030204" pitchFamily="18" charset="0"/>
+                      </a:rPr>
+                      <m:t>800</m:t>
+                    </m:r>
+                    <m:r>
+                      <a:rPr lang="en-US" altLang="ja-JP" sz="2400" i="1" dirty="0" smtClean="0">
+                        <a:latin typeface="Cambria Math" panose="02040503050406030204" pitchFamily="18" charset="0"/>
+                      </a:rPr>
+                      <m:t>𝑔</m:t>
+                    </m:r>
+                  </m:oMath>
+                </a14:m>
+                <a:r>
+                  <a:rPr lang="en-US" altLang="ja-JP" sz="2400" dirty="0"/>
+                  <a:t>	</a:t>
+                </a:r>
+                <a:r>
+                  <a:rPr lang="ja-JP" altLang="en-US" sz="2400" dirty="0"/>
+                  <a:t>・速度</a:t>
+                </a:r>
+                <a14:m>
+                  <m:oMath xmlns:m="http://schemas.openxmlformats.org/officeDocument/2006/math">
+                    <m:r>
+                      <a:rPr lang="en-US" altLang="ja-JP" sz="2400" i="1" dirty="0" smtClean="0">
+                        <a:latin typeface="Cambria Math" panose="02040503050406030204" pitchFamily="18" charset="0"/>
+                      </a:rPr>
+                      <m:t>−40</m:t>
+                    </m:r>
+                    <m:r>
+                      <a:rPr lang="en-US" altLang="ja-JP" sz="2400" i="1" dirty="0" smtClean="0">
+                        <a:latin typeface="Cambria Math" panose="02040503050406030204" pitchFamily="18" charset="0"/>
+                      </a:rPr>
+                      <m:t>𝑚</m:t>
+                    </m:r>
+                    <m:r>
+                      <a:rPr lang="en-US" altLang="ja-JP" sz="2400" i="1" dirty="0" smtClean="0">
+                        <a:latin typeface="Cambria Math" panose="02040503050406030204" pitchFamily="18" charset="0"/>
+                      </a:rPr>
+                      <m:t>/</m:t>
+                    </m:r>
+                    <m:r>
+                      <a:rPr lang="ja-JP" altLang="en-US" sz="2400" i="1" dirty="0" smtClean="0">
+                        <a:latin typeface="Cambria Math" panose="02040503050406030204" pitchFamily="18" charset="0"/>
+                      </a:rPr>
+                      <m:t>秒</m:t>
+                    </m:r>
+                  </m:oMath>
+                </a14:m>
+                <a:endParaRPr lang="en-US" altLang="ja-JP" sz="2400" dirty="0"/>
+              </a:p>
+              <a:p>
+                <a:endParaRPr lang="en-US" altLang="ja-JP" sz="2400" dirty="0"/>
+              </a:p>
+              <a:p>
+                <a:r>
+                  <a:rPr lang="ja-JP" altLang="en-US" sz="2400" b="1" dirty="0">
+                    <a:solidFill>
+                      <a:srgbClr val="FF0000"/>
+                    </a:solidFill>
+                  </a:rPr>
+                  <a:t>■解答</a:t>
+                </a:r>
+                <a:endParaRPr lang="en-US" altLang="ja-JP" sz="2400" b="1" dirty="0">
+                  <a:solidFill>
+                    <a:srgbClr val="FF0000"/>
+                  </a:solidFill>
+                </a:endParaRPr>
+              </a:p>
+              <a:p>
+                <a14:m>
+                  <m:oMath xmlns:m="http://schemas.openxmlformats.org/officeDocument/2006/math">
+                    <m:sSub>
+                      <m:sSubPr>
+                        <m:ctrlPr>
+                          <a:rPr lang="en-US" altLang="ja-JP" sz="2400" i="1" smtClean="0">
+                            <a:solidFill>
+                              <a:schemeClr val="tx1"/>
+                            </a:solidFill>
+                            <a:latin typeface="Cambria Math" panose="02040503050406030204" pitchFamily="18" charset="0"/>
+                          </a:rPr>
+                        </m:ctrlPr>
+                      </m:sSubPr>
+                      <m:e>
+                        <m:r>
+                          <a:rPr lang="en-US" altLang="ja-JP" sz="2400" b="0" i="1">
+                            <a:solidFill>
+                              <a:schemeClr val="tx1"/>
+                            </a:solidFill>
+                            <a:latin typeface="Cambria Math" panose="02040503050406030204" pitchFamily="18" charset="0"/>
+                          </a:rPr>
+                          <m:t>𝑚</m:t>
+                        </m:r>
+                      </m:e>
+                      <m:sub>
+                        <m:r>
+                          <a:rPr lang="en-US" altLang="ja-JP" sz="2400" b="0" i="1">
+                            <a:solidFill>
+                              <a:schemeClr val="tx1"/>
+                            </a:solidFill>
+                            <a:latin typeface="Cambria Math" panose="02040503050406030204" pitchFamily="18" charset="0"/>
+                          </a:rPr>
+                          <m:t>1</m:t>
+                        </m:r>
+                      </m:sub>
+                    </m:sSub>
+                    <m:sSub>
+                      <m:sSubPr>
+                        <m:ctrlPr>
+                          <a:rPr lang="en-US" altLang="ja-JP" sz="2400" i="1">
+                            <a:solidFill>
+                              <a:schemeClr val="tx1"/>
+                            </a:solidFill>
+                            <a:latin typeface="Cambria Math" panose="02040503050406030204" pitchFamily="18" charset="0"/>
+                          </a:rPr>
+                        </m:ctrlPr>
+                      </m:sSubPr>
+                      <m:e>
+                        <m:r>
+                          <a:rPr lang="en-US" altLang="ja-JP" sz="2400" b="0" i="1">
+                            <a:solidFill>
+                              <a:schemeClr val="tx1"/>
+                            </a:solidFill>
+                            <a:latin typeface="Cambria Math" panose="02040503050406030204" pitchFamily="18" charset="0"/>
+                          </a:rPr>
+                          <m:t>𝑣</m:t>
+                        </m:r>
+                      </m:e>
+                      <m:sub>
+                        <m:r>
+                          <a:rPr lang="en-US" altLang="ja-JP" sz="2400" b="0" i="1">
+                            <a:solidFill>
+                              <a:schemeClr val="tx1"/>
+                            </a:solidFill>
+                            <a:latin typeface="Cambria Math" panose="02040503050406030204" pitchFamily="18" charset="0"/>
+                          </a:rPr>
+                          <m:t>1</m:t>
+                        </m:r>
+                        <m:r>
+                          <a:rPr lang="en-US" altLang="ja-JP" sz="2400" b="0" i="1">
+                            <a:solidFill>
+                              <a:schemeClr val="tx1"/>
+                            </a:solidFill>
+                            <a:latin typeface="Cambria Math" panose="02040503050406030204" pitchFamily="18" charset="0"/>
+                          </a:rPr>
+                          <m:t>𝑖</m:t>
+                        </m:r>
+                      </m:sub>
+                    </m:sSub>
+                    <m:r>
+                      <a:rPr lang="en-US" altLang="ja-JP" sz="2400" b="0" i="1">
+                        <a:solidFill>
+                          <a:schemeClr val="tx1"/>
+                        </a:solidFill>
+                        <a:latin typeface="Cambria Math" panose="02040503050406030204" pitchFamily="18" charset="0"/>
+                      </a:rPr>
+                      <m:t>+</m:t>
+                    </m:r>
+                    <m:sSub>
+                      <m:sSubPr>
+                        <m:ctrlPr>
+                          <a:rPr lang="en-US" altLang="ja-JP" sz="2400" i="1">
+                            <a:solidFill>
+                              <a:schemeClr val="tx1"/>
+                            </a:solidFill>
+                            <a:latin typeface="Cambria Math" panose="02040503050406030204" pitchFamily="18" charset="0"/>
+                          </a:rPr>
+                        </m:ctrlPr>
+                      </m:sSubPr>
+                      <m:e>
+                        <m:r>
+                          <a:rPr lang="en-US" altLang="ja-JP" sz="2400" b="0" i="1">
+                            <a:solidFill>
+                              <a:schemeClr val="tx1"/>
+                            </a:solidFill>
+                            <a:latin typeface="Cambria Math" panose="02040503050406030204" pitchFamily="18" charset="0"/>
+                          </a:rPr>
+                          <m:t>𝑚</m:t>
+                        </m:r>
+                      </m:e>
+                      <m:sub>
+                        <m:r>
+                          <a:rPr lang="en-US" altLang="ja-JP" sz="2400" b="0" i="1">
+                            <a:solidFill>
+                              <a:schemeClr val="tx1"/>
+                            </a:solidFill>
+                            <a:latin typeface="Cambria Math" panose="02040503050406030204" pitchFamily="18" charset="0"/>
+                          </a:rPr>
+                          <m:t>2</m:t>
+                        </m:r>
+                      </m:sub>
+                    </m:sSub>
+                    <m:sSub>
+                      <m:sSubPr>
+                        <m:ctrlPr>
+                          <a:rPr lang="en-US" altLang="ja-JP" sz="2400" i="1">
+                            <a:solidFill>
+                              <a:schemeClr val="tx1"/>
+                            </a:solidFill>
+                            <a:latin typeface="Cambria Math" panose="02040503050406030204" pitchFamily="18" charset="0"/>
+                          </a:rPr>
+                        </m:ctrlPr>
+                      </m:sSubPr>
+                      <m:e>
+                        <m:r>
+                          <a:rPr lang="en-US" altLang="ja-JP" sz="2400" b="0" i="1">
+                            <a:solidFill>
+                              <a:schemeClr val="tx1"/>
+                            </a:solidFill>
+                            <a:latin typeface="Cambria Math" panose="02040503050406030204" pitchFamily="18" charset="0"/>
+                          </a:rPr>
+                          <m:t>𝑣</m:t>
+                        </m:r>
+                      </m:e>
+                      <m:sub>
+                        <m:r>
+                          <a:rPr lang="en-US" altLang="ja-JP" sz="2400" b="0" i="1">
+                            <a:solidFill>
+                              <a:schemeClr val="tx1"/>
+                            </a:solidFill>
+                            <a:latin typeface="Cambria Math" panose="02040503050406030204" pitchFamily="18" charset="0"/>
+                          </a:rPr>
+                          <m:t>2</m:t>
+                        </m:r>
+                        <m:r>
+                          <a:rPr lang="en-US" altLang="ja-JP" sz="2400" b="0" i="1">
+                            <a:solidFill>
+                              <a:schemeClr val="tx1"/>
+                            </a:solidFill>
+                            <a:latin typeface="Cambria Math" panose="02040503050406030204" pitchFamily="18" charset="0"/>
+                          </a:rPr>
+                          <m:t>𝑖</m:t>
+                        </m:r>
+                      </m:sub>
+                    </m:sSub>
+                    <m:r>
+                      <a:rPr lang="en-US" altLang="ja-JP" sz="2400" b="0" i="1" smtClean="0">
+                        <a:solidFill>
+                          <a:schemeClr val="tx1"/>
+                        </a:solidFill>
+                        <a:latin typeface="Cambria Math" panose="02040503050406030204" pitchFamily="18" charset="0"/>
+                      </a:rPr>
+                      <m:t>=</m:t>
+                    </m:r>
+                    <m:sSub>
+                      <m:sSubPr>
+                        <m:ctrlPr>
+                          <a:rPr lang="en-US" altLang="ja-JP" sz="2400" i="1">
+                            <a:solidFill>
+                              <a:schemeClr val="tx1"/>
+                            </a:solidFill>
+                            <a:latin typeface="Cambria Math" panose="02040503050406030204" pitchFamily="18" charset="0"/>
+                          </a:rPr>
+                        </m:ctrlPr>
+                      </m:sSubPr>
+                      <m:e>
+                        <m:r>
+                          <a:rPr lang="en-US" altLang="ja-JP" sz="2400" b="0" i="1">
+                            <a:solidFill>
+                              <a:schemeClr val="tx1"/>
+                            </a:solidFill>
+                            <a:latin typeface="Cambria Math" panose="02040503050406030204" pitchFamily="18" charset="0"/>
+                          </a:rPr>
+                          <m:t>𝑚</m:t>
+                        </m:r>
+                      </m:e>
+                      <m:sub>
+                        <m:r>
+                          <a:rPr lang="en-US" altLang="ja-JP" sz="2400" b="0" i="1">
+                            <a:solidFill>
+                              <a:schemeClr val="tx1"/>
+                            </a:solidFill>
+                            <a:latin typeface="Cambria Math" panose="02040503050406030204" pitchFamily="18" charset="0"/>
+                          </a:rPr>
+                          <m:t>1</m:t>
+                        </m:r>
+                      </m:sub>
+                    </m:sSub>
+                    <m:sSub>
+                      <m:sSubPr>
+                        <m:ctrlPr>
+                          <a:rPr lang="en-US" altLang="ja-JP" sz="2400" i="1">
+                            <a:solidFill>
+                              <a:schemeClr val="tx1"/>
+                            </a:solidFill>
+                            <a:latin typeface="Cambria Math" panose="02040503050406030204" pitchFamily="18" charset="0"/>
+                          </a:rPr>
+                        </m:ctrlPr>
+                      </m:sSubPr>
+                      <m:e>
+                        <m:r>
+                          <a:rPr lang="en-US" altLang="ja-JP" sz="2400" b="0" i="1">
+                            <a:solidFill>
+                              <a:schemeClr val="tx1"/>
+                            </a:solidFill>
+                            <a:latin typeface="Cambria Math" panose="02040503050406030204" pitchFamily="18" charset="0"/>
+                          </a:rPr>
+                          <m:t>𝑣</m:t>
+                        </m:r>
+                      </m:e>
+                      <m:sub>
+                        <m:r>
+                          <a:rPr lang="en-US" altLang="ja-JP" sz="2400" b="0" i="1">
+                            <a:solidFill>
+                              <a:schemeClr val="tx1"/>
+                            </a:solidFill>
+                            <a:latin typeface="Cambria Math" panose="02040503050406030204" pitchFamily="18" charset="0"/>
+                          </a:rPr>
+                          <m:t>1</m:t>
+                        </m:r>
+                        <m:r>
+                          <a:rPr lang="en-US" altLang="ja-JP" sz="2400" b="0" i="1">
+                            <a:solidFill>
+                              <a:schemeClr val="tx1"/>
+                            </a:solidFill>
+                            <a:latin typeface="Cambria Math" panose="02040503050406030204" pitchFamily="18" charset="0"/>
+                          </a:rPr>
+                          <m:t>𝑓</m:t>
+                        </m:r>
+                      </m:sub>
+                    </m:sSub>
+                    <m:r>
+                      <a:rPr lang="en-US" altLang="ja-JP" sz="2400" b="0" i="1">
+                        <a:solidFill>
+                          <a:schemeClr val="tx1"/>
+                        </a:solidFill>
+                        <a:latin typeface="Cambria Math" panose="02040503050406030204" pitchFamily="18" charset="0"/>
+                      </a:rPr>
+                      <m:t>+</m:t>
+                    </m:r>
+                    <m:sSub>
+                      <m:sSubPr>
+                        <m:ctrlPr>
+                          <a:rPr lang="en-US" altLang="ja-JP" sz="2400" i="1">
+                            <a:solidFill>
+                              <a:schemeClr val="tx1"/>
+                            </a:solidFill>
+                            <a:latin typeface="Cambria Math" panose="02040503050406030204" pitchFamily="18" charset="0"/>
+                          </a:rPr>
+                        </m:ctrlPr>
+                      </m:sSubPr>
+                      <m:e>
+                        <m:r>
+                          <a:rPr lang="en-US" altLang="ja-JP" sz="2400" b="0" i="1">
+                            <a:solidFill>
+                              <a:schemeClr val="tx1"/>
+                            </a:solidFill>
+                            <a:latin typeface="Cambria Math" panose="02040503050406030204" pitchFamily="18" charset="0"/>
+                          </a:rPr>
+                          <m:t>𝑚</m:t>
+                        </m:r>
+                      </m:e>
+                      <m:sub>
+                        <m:r>
+                          <a:rPr lang="en-US" altLang="ja-JP" sz="2400" b="0" i="1">
+                            <a:solidFill>
+                              <a:schemeClr val="tx1"/>
+                            </a:solidFill>
+                            <a:latin typeface="Cambria Math" panose="02040503050406030204" pitchFamily="18" charset="0"/>
+                          </a:rPr>
+                          <m:t>2</m:t>
+                        </m:r>
+                      </m:sub>
+                    </m:sSub>
+                    <m:sSub>
+                      <m:sSubPr>
+                        <m:ctrlPr>
+                          <a:rPr lang="en-US" altLang="ja-JP" sz="2400" i="1">
+                            <a:solidFill>
+                              <a:schemeClr val="tx1"/>
+                            </a:solidFill>
+                            <a:latin typeface="Cambria Math" panose="02040503050406030204" pitchFamily="18" charset="0"/>
+                          </a:rPr>
+                        </m:ctrlPr>
+                      </m:sSubPr>
+                      <m:e>
+                        <m:r>
+                          <a:rPr lang="en-US" altLang="ja-JP" sz="2400" b="0" i="1">
+                            <a:solidFill>
+                              <a:schemeClr val="tx1"/>
+                            </a:solidFill>
+                            <a:latin typeface="Cambria Math" panose="02040503050406030204" pitchFamily="18" charset="0"/>
+                          </a:rPr>
+                          <m:t>𝑣</m:t>
+                        </m:r>
+                      </m:e>
+                      <m:sub>
+                        <m:r>
+                          <a:rPr lang="en-US" altLang="ja-JP" sz="2400" b="0" i="1">
+                            <a:solidFill>
+                              <a:schemeClr val="tx1"/>
+                            </a:solidFill>
+                            <a:latin typeface="Cambria Math" panose="02040503050406030204" pitchFamily="18" charset="0"/>
+                          </a:rPr>
+                          <m:t>2</m:t>
+                        </m:r>
+                        <m:r>
+                          <a:rPr lang="en-US" altLang="ja-JP" sz="2400" b="0" i="1">
+                            <a:solidFill>
+                              <a:schemeClr val="tx1"/>
+                            </a:solidFill>
+                            <a:latin typeface="Cambria Math" panose="02040503050406030204" pitchFamily="18" charset="0"/>
+                          </a:rPr>
+                          <m:t>𝑓</m:t>
+                        </m:r>
+                      </m:sub>
+                    </m:sSub>
+                  </m:oMath>
+                </a14:m>
+                <a:r>
+                  <a:rPr lang="en-US" altLang="ja-JP" sz="2400" i="1" dirty="0">
+                    <a:solidFill>
+                      <a:schemeClr val="tx1"/>
+                    </a:solidFill>
+                    <a:latin typeface="Cambria Math" panose="02040503050406030204" pitchFamily="18" charset="0"/>
+                  </a:rPr>
+                  <a:t> </a:t>
+                </a:r>
+                <a:r>
+                  <a:rPr lang="ja-JP" altLang="en-US" sz="2400" dirty="0">
+                    <a:solidFill>
+                      <a:schemeClr val="tx1"/>
+                    </a:solidFill>
+                    <a:latin typeface="Cambria Math" panose="02040503050406030204" pitchFamily="18" charset="0"/>
+                  </a:rPr>
+                  <a:t>より、</a:t>
+                </a:r>
+                <a:endParaRPr lang="en-US" altLang="ja-JP" sz="2400" i="1" dirty="0">
+                  <a:solidFill>
+                    <a:schemeClr val="tx1"/>
+                  </a:solidFill>
+                  <a:latin typeface="Cambria Math" panose="02040503050406030204" pitchFamily="18" charset="0"/>
+                </a:endParaRPr>
+              </a:p>
+              <a:p>
+                <a14:m>
+                  <m:oMath xmlns:m="http://schemas.openxmlformats.org/officeDocument/2006/math">
+                    <m:r>
+                      <a:rPr lang="en-US" altLang="ja-JP" sz="2400" i="1" smtClean="0">
+                        <a:solidFill>
+                          <a:schemeClr val="tx1"/>
+                        </a:solidFill>
+                        <a:latin typeface="Cambria Math" panose="02040503050406030204" pitchFamily="18" charset="0"/>
+                      </a:rPr>
+                      <m:t>(</m:t>
+                    </m:r>
+                    <m:r>
+                      <a:rPr lang="en-US" altLang="ja-JP" sz="2400" b="0" i="1" smtClean="0">
+                        <a:solidFill>
+                          <a:schemeClr val="tx1"/>
+                        </a:solidFill>
+                        <a:latin typeface="Cambria Math" panose="02040503050406030204" pitchFamily="18" charset="0"/>
+                      </a:rPr>
+                      <m:t>0.5)</m:t>
+                    </m:r>
+                    <m:r>
+                      <a:rPr lang="en-US" altLang="ja-JP" sz="2400" i="1" smtClean="0">
+                        <a:solidFill>
+                          <a:schemeClr val="tx1"/>
+                        </a:solidFill>
+                        <a:latin typeface="Cambria Math" panose="02040503050406030204" pitchFamily="18" charset="0"/>
+                      </a:rPr>
+                      <m:t>(</m:t>
+                    </m:r>
+                    <m:r>
+                      <a:rPr lang="en-US" altLang="ja-JP" sz="2400" b="0" i="1" smtClean="0">
+                        <a:solidFill>
+                          <a:schemeClr val="tx1"/>
+                        </a:solidFill>
+                        <a:latin typeface="Cambria Math" panose="02040503050406030204" pitchFamily="18" charset="0"/>
+                      </a:rPr>
+                      <m:t>30)</m:t>
+                    </m:r>
+                    <m:r>
+                      <a:rPr lang="en-US" altLang="ja-JP" sz="2400" b="0" i="1">
+                        <a:solidFill>
+                          <a:schemeClr val="tx1"/>
+                        </a:solidFill>
+                        <a:latin typeface="Cambria Math" panose="02040503050406030204" pitchFamily="18" charset="0"/>
+                      </a:rPr>
+                      <m:t>+</m:t>
+                    </m:r>
+                    <m:r>
+                      <a:rPr lang="en-US" altLang="ja-JP" sz="2400" i="1" smtClean="0">
+                        <a:solidFill>
+                          <a:schemeClr val="tx1"/>
+                        </a:solidFill>
+                        <a:latin typeface="Cambria Math" panose="02040503050406030204" pitchFamily="18" charset="0"/>
+                      </a:rPr>
+                      <m:t>(</m:t>
+                    </m:r>
+                    <m:r>
+                      <a:rPr lang="en-US" altLang="ja-JP" sz="2400" b="0" i="1" smtClean="0">
+                        <a:solidFill>
+                          <a:schemeClr val="tx1"/>
+                        </a:solidFill>
+                        <a:latin typeface="Cambria Math" panose="02040503050406030204" pitchFamily="18" charset="0"/>
+                      </a:rPr>
+                      <m:t>0.8)</m:t>
+                    </m:r>
+                    <m:r>
+                      <a:rPr lang="en-US" altLang="ja-JP" sz="2400" i="1" smtClean="0">
+                        <a:solidFill>
+                          <a:schemeClr val="tx1"/>
+                        </a:solidFill>
+                        <a:latin typeface="Cambria Math" panose="02040503050406030204" pitchFamily="18" charset="0"/>
+                      </a:rPr>
+                      <m:t>(</m:t>
+                    </m:r>
+                    <m:r>
+                      <a:rPr lang="en-US" altLang="ja-JP" sz="2400" b="0" i="1" smtClean="0">
+                        <a:solidFill>
+                          <a:schemeClr val="tx1"/>
+                        </a:solidFill>
+                        <a:latin typeface="Cambria Math" panose="02040503050406030204" pitchFamily="18" charset="0"/>
+                      </a:rPr>
+                      <m:t>−40)</m:t>
+                    </m:r>
+                    <m:r>
+                      <a:rPr lang="en-US" altLang="ja-JP" sz="2400" b="0" i="1" smtClean="0">
+                        <a:solidFill>
+                          <a:schemeClr val="tx1"/>
+                        </a:solidFill>
+                        <a:latin typeface="Cambria Math" panose="02040503050406030204" pitchFamily="18" charset="0"/>
+                      </a:rPr>
+                      <m:t>=</m:t>
+                    </m:r>
+                    <m:r>
+                      <a:rPr lang="en-US" altLang="ja-JP" sz="2400" i="1" smtClean="0">
+                        <a:solidFill>
+                          <a:schemeClr val="tx1"/>
+                        </a:solidFill>
+                        <a:latin typeface="Cambria Math" panose="02040503050406030204" pitchFamily="18" charset="0"/>
+                      </a:rPr>
+                      <m:t>(</m:t>
+                    </m:r>
+                    <m:r>
+                      <a:rPr lang="en-US" altLang="ja-JP" sz="2400" b="0" i="1" smtClean="0">
+                        <a:solidFill>
+                          <a:schemeClr val="tx1"/>
+                        </a:solidFill>
+                        <a:latin typeface="Cambria Math" panose="02040503050406030204" pitchFamily="18" charset="0"/>
+                      </a:rPr>
+                      <m:t>0.5)</m:t>
+                    </m:r>
+                    <m:sSub>
+                      <m:sSubPr>
+                        <m:ctrlPr>
+                          <a:rPr lang="en-US" altLang="ja-JP" sz="2400" i="1">
+                            <a:solidFill>
+                              <a:schemeClr val="tx1"/>
+                            </a:solidFill>
+                            <a:latin typeface="Cambria Math" panose="02040503050406030204" pitchFamily="18" charset="0"/>
+                          </a:rPr>
+                        </m:ctrlPr>
+                      </m:sSubPr>
+                      <m:e>
+                        <m:r>
+                          <a:rPr lang="en-US" altLang="ja-JP" sz="2400" b="0" i="1">
+                            <a:solidFill>
+                              <a:schemeClr val="tx1"/>
+                            </a:solidFill>
+                            <a:latin typeface="Cambria Math" panose="02040503050406030204" pitchFamily="18" charset="0"/>
+                          </a:rPr>
+                          <m:t>𝑣</m:t>
+                        </m:r>
+                      </m:e>
+                      <m:sub>
+                        <m:r>
+                          <a:rPr lang="en-US" altLang="ja-JP" sz="2400" b="0" i="1">
+                            <a:solidFill>
+                              <a:schemeClr val="tx1"/>
+                            </a:solidFill>
+                            <a:latin typeface="Cambria Math" panose="02040503050406030204" pitchFamily="18" charset="0"/>
+                          </a:rPr>
+                          <m:t>1</m:t>
+                        </m:r>
+                        <m:r>
+                          <a:rPr lang="en-US" altLang="ja-JP" sz="2400" b="0" i="1">
+                            <a:solidFill>
+                              <a:schemeClr val="tx1"/>
+                            </a:solidFill>
+                            <a:latin typeface="Cambria Math" panose="02040503050406030204" pitchFamily="18" charset="0"/>
+                          </a:rPr>
+                          <m:t>𝑓</m:t>
+                        </m:r>
+                      </m:sub>
+                    </m:sSub>
+                    <m:r>
+                      <a:rPr lang="en-US" altLang="ja-JP" sz="2400" b="0" i="1">
+                        <a:solidFill>
+                          <a:schemeClr val="tx1"/>
+                        </a:solidFill>
+                        <a:latin typeface="Cambria Math" panose="02040503050406030204" pitchFamily="18" charset="0"/>
+                      </a:rPr>
+                      <m:t>+</m:t>
+                    </m:r>
+                    <m:r>
+                      <a:rPr lang="en-US" altLang="ja-JP" sz="2400" b="0" i="1" smtClean="0">
+                        <a:solidFill>
+                          <a:schemeClr val="tx1"/>
+                        </a:solidFill>
+                        <a:latin typeface="Cambria Math" panose="02040503050406030204" pitchFamily="18" charset="0"/>
+                      </a:rPr>
+                      <m:t>(0.8)</m:t>
+                    </m:r>
+                    <m:sSub>
+                      <m:sSubPr>
+                        <m:ctrlPr>
+                          <a:rPr lang="en-US" altLang="ja-JP" sz="2400" i="1">
+                            <a:solidFill>
+                              <a:schemeClr val="tx1"/>
+                            </a:solidFill>
+                            <a:latin typeface="Cambria Math" panose="02040503050406030204" pitchFamily="18" charset="0"/>
+                          </a:rPr>
+                        </m:ctrlPr>
+                      </m:sSubPr>
+                      <m:e>
+                        <m:r>
+                          <a:rPr lang="en-US" altLang="ja-JP" sz="2400" b="0" i="1">
+                            <a:solidFill>
+                              <a:schemeClr val="tx1"/>
+                            </a:solidFill>
+                            <a:latin typeface="Cambria Math" panose="02040503050406030204" pitchFamily="18" charset="0"/>
+                          </a:rPr>
+                          <m:t>𝑣</m:t>
+                        </m:r>
+                      </m:e>
+                      <m:sub>
+                        <m:r>
+                          <a:rPr lang="en-US" altLang="ja-JP" sz="2400" b="0" i="1">
+                            <a:solidFill>
+                              <a:schemeClr val="tx1"/>
+                            </a:solidFill>
+                            <a:latin typeface="Cambria Math" panose="02040503050406030204" pitchFamily="18" charset="0"/>
+                          </a:rPr>
+                          <m:t>2</m:t>
+                        </m:r>
+                        <m:r>
+                          <a:rPr lang="en-US" altLang="ja-JP" sz="2400" b="0" i="1">
+                            <a:solidFill>
+                              <a:schemeClr val="tx1"/>
+                            </a:solidFill>
+                            <a:latin typeface="Cambria Math" panose="02040503050406030204" pitchFamily="18" charset="0"/>
+                          </a:rPr>
+                          <m:t>𝑓</m:t>
+                        </m:r>
+                      </m:sub>
+                    </m:sSub>
+                  </m:oMath>
+                </a14:m>
+                <a:r>
+                  <a:rPr lang="en-US" altLang="ja-JP" sz="2400" dirty="0"/>
+                  <a:t> </a:t>
+                </a:r>
+              </a:p>
+              <a:p>
+                <a14:m>
+                  <m:oMath xmlns:m="http://schemas.openxmlformats.org/officeDocument/2006/math">
+                    <m:r>
+                      <a:rPr lang="en-US" altLang="ja-JP" sz="2400" b="0" i="1">
+                        <a:latin typeface="Cambria Math" panose="02040503050406030204" pitchFamily="18" charset="0"/>
+                      </a:rPr>
+                      <m:t>15</m:t>
+                    </m:r>
+                    <m:r>
+                      <a:rPr lang="en-US" altLang="ja-JP" sz="2400" b="0" i="1">
+                        <a:solidFill>
+                          <a:schemeClr val="tx1"/>
+                        </a:solidFill>
+                        <a:latin typeface="Cambria Math" panose="02040503050406030204" pitchFamily="18" charset="0"/>
+                      </a:rPr>
+                      <m:t>+</m:t>
+                    </m:r>
+                    <m:r>
+                      <a:rPr lang="en-US" altLang="ja-JP" sz="2400" i="1" smtClean="0">
+                        <a:solidFill>
+                          <a:schemeClr val="tx1"/>
+                        </a:solidFill>
+                        <a:latin typeface="Cambria Math" panose="02040503050406030204" pitchFamily="18" charset="0"/>
+                      </a:rPr>
+                      <m:t>(</m:t>
+                    </m:r>
+                    <m:r>
+                      <a:rPr lang="en-US" altLang="ja-JP" sz="2400" b="0" i="1" smtClean="0">
+                        <a:solidFill>
+                          <a:schemeClr val="tx1"/>
+                        </a:solidFill>
+                        <a:latin typeface="Cambria Math" panose="02040503050406030204" pitchFamily="18" charset="0"/>
+                      </a:rPr>
+                      <m:t>−32</m:t>
+                    </m:r>
+                    <m:r>
+                      <a:rPr lang="en-US" altLang="ja-JP" sz="2400" b="0" i="1" smtClean="0">
+                        <a:solidFill>
+                          <a:schemeClr val="tx1"/>
+                        </a:solidFill>
+                        <a:latin typeface="Cambria Math" panose="02040503050406030204" pitchFamily="18" charset="0"/>
+                      </a:rPr>
+                      <m:t>)=0.5</m:t>
+                    </m:r>
+                    <m:sSub>
+                      <m:sSubPr>
+                        <m:ctrlPr>
+                          <a:rPr lang="en-US" altLang="ja-JP" sz="2400" i="1">
+                            <a:solidFill>
+                              <a:schemeClr val="tx1"/>
+                            </a:solidFill>
+                            <a:latin typeface="Cambria Math" panose="02040503050406030204" pitchFamily="18" charset="0"/>
+                          </a:rPr>
+                        </m:ctrlPr>
+                      </m:sSubPr>
+                      <m:e>
+                        <m:r>
+                          <a:rPr lang="en-US" altLang="ja-JP" sz="2400" b="0" i="1">
+                            <a:solidFill>
+                              <a:schemeClr val="tx1"/>
+                            </a:solidFill>
+                            <a:latin typeface="Cambria Math" panose="02040503050406030204" pitchFamily="18" charset="0"/>
+                          </a:rPr>
+                          <m:t>𝑣</m:t>
+                        </m:r>
+                      </m:e>
+                      <m:sub>
+                        <m:r>
+                          <a:rPr lang="en-US" altLang="ja-JP" sz="2400" b="0" i="1">
+                            <a:solidFill>
+                              <a:schemeClr val="tx1"/>
+                            </a:solidFill>
+                            <a:latin typeface="Cambria Math" panose="02040503050406030204" pitchFamily="18" charset="0"/>
+                          </a:rPr>
+                          <m:t>1</m:t>
+                        </m:r>
+                        <m:r>
+                          <a:rPr lang="en-US" altLang="ja-JP" sz="2400" b="0" i="1">
+                            <a:solidFill>
+                              <a:schemeClr val="tx1"/>
+                            </a:solidFill>
+                            <a:latin typeface="Cambria Math" panose="02040503050406030204" pitchFamily="18" charset="0"/>
+                          </a:rPr>
+                          <m:t>𝑓</m:t>
+                        </m:r>
+                      </m:sub>
+                    </m:sSub>
+                    <m:r>
+                      <a:rPr lang="en-US" altLang="ja-JP" sz="2400" b="0" i="1">
+                        <a:solidFill>
+                          <a:schemeClr val="tx1"/>
+                        </a:solidFill>
+                        <a:latin typeface="Cambria Math" panose="02040503050406030204" pitchFamily="18" charset="0"/>
+                      </a:rPr>
+                      <m:t>+</m:t>
+                    </m:r>
+                    <m:r>
+                      <a:rPr lang="en-US" altLang="ja-JP" sz="2400" b="0" i="1" smtClean="0">
+                        <a:solidFill>
+                          <a:schemeClr val="tx1"/>
+                        </a:solidFill>
+                        <a:latin typeface="Cambria Math" panose="02040503050406030204" pitchFamily="18" charset="0"/>
+                      </a:rPr>
+                      <m:t>0.8</m:t>
+                    </m:r>
+                    <m:sSub>
+                      <m:sSubPr>
+                        <m:ctrlPr>
+                          <a:rPr lang="en-US" altLang="ja-JP" sz="2400" i="1">
+                            <a:solidFill>
+                              <a:schemeClr val="tx1"/>
+                            </a:solidFill>
+                            <a:latin typeface="Cambria Math" panose="02040503050406030204" pitchFamily="18" charset="0"/>
+                          </a:rPr>
+                        </m:ctrlPr>
+                      </m:sSubPr>
+                      <m:e>
+                        <m:r>
+                          <a:rPr lang="en-US" altLang="ja-JP" sz="2400" b="0" i="1">
+                            <a:solidFill>
+                              <a:schemeClr val="tx1"/>
+                            </a:solidFill>
+                            <a:latin typeface="Cambria Math" panose="02040503050406030204" pitchFamily="18" charset="0"/>
+                          </a:rPr>
+                          <m:t>𝑣</m:t>
+                        </m:r>
+                      </m:e>
+                      <m:sub>
+                        <m:r>
+                          <a:rPr lang="en-US" altLang="ja-JP" sz="2400" b="0" i="1">
+                            <a:solidFill>
+                              <a:schemeClr val="tx1"/>
+                            </a:solidFill>
+                            <a:latin typeface="Cambria Math" panose="02040503050406030204" pitchFamily="18" charset="0"/>
+                          </a:rPr>
+                          <m:t>2</m:t>
+                        </m:r>
+                        <m:r>
+                          <a:rPr lang="en-US" altLang="ja-JP" sz="2400" b="0" i="1">
+                            <a:solidFill>
+                              <a:schemeClr val="tx1"/>
+                            </a:solidFill>
+                            <a:latin typeface="Cambria Math" panose="02040503050406030204" pitchFamily="18" charset="0"/>
+                          </a:rPr>
+                          <m:t>𝑓</m:t>
+                        </m:r>
+                      </m:sub>
+                    </m:sSub>
+                  </m:oMath>
+                </a14:m>
+                <a:r>
+                  <a:rPr lang="en-US" altLang="ja-JP" sz="2400" dirty="0"/>
+                  <a:t> </a:t>
+                </a:r>
+              </a:p>
+              <a:p>
+                <a14:m>
+                  <m:oMath xmlns:m="http://schemas.openxmlformats.org/officeDocument/2006/math">
+                    <m:r>
+                      <a:rPr lang="en-US" altLang="ja-JP" sz="2400" i="1">
+                        <a:latin typeface="Cambria Math" panose="02040503050406030204" pitchFamily="18" charset="0"/>
+                      </a:rPr>
+                      <m:t>0.5</m:t>
+                    </m:r>
+                    <m:sSub>
+                      <m:sSubPr>
+                        <m:ctrlPr>
+                          <a:rPr lang="en-US" altLang="ja-JP" sz="2400" i="1">
+                            <a:latin typeface="Cambria Math" panose="02040503050406030204" pitchFamily="18" charset="0"/>
+                          </a:rPr>
+                        </m:ctrlPr>
+                      </m:sSubPr>
+                      <m:e>
+                        <m:r>
+                          <a:rPr lang="en-US" altLang="ja-JP" sz="2400" i="1">
+                            <a:latin typeface="Cambria Math" panose="02040503050406030204" pitchFamily="18" charset="0"/>
+                          </a:rPr>
+                          <m:t>𝑣</m:t>
+                        </m:r>
+                      </m:e>
+                      <m:sub>
+                        <m:r>
+                          <a:rPr lang="en-US" altLang="ja-JP" sz="2400" i="1">
+                            <a:latin typeface="Cambria Math" panose="02040503050406030204" pitchFamily="18" charset="0"/>
+                          </a:rPr>
+                          <m:t>1</m:t>
+                        </m:r>
+                        <m:r>
+                          <a:rPr lang="en-US" altLang="ja-JP" sz="2400" i="1">
+                            <a:latin typeface="Cambria Math" panose="02040503050406030204" pitchFamily="18" charset="0"/>
+                          </a:rPr>
+                          <m:t>𝑓</m:t>
+                        </m:r>
+                      </m:sub>
+                    </m:sSub>
+                    <m:r>
+                      <a:rPr lang="en-US" altLang="ja-JP" sz="2400" i="1">
+                        <a:latin typeface="Cambria Math" panose="02040503050406030204" pitchFamily="18" charset="0"/>
+                      </a:rPr>
+                      <m:t>+</m:t>
+                    </m:r>
+                    <m:r>
+                      <a:rPr lang="en-US" altLang="ja-JP" sz="2400" i="1">
+                        <a:latin typeface="Cambria Math" panose="02040503050406030204" pitchFamily="18" charset="0"/>
+                      </a:rPr>
+                      <m:t>0.8</m:t>
+                    </m:r>
+                    <m:sSub>
+                      <m:sSubPr>
+                        <m:ctrlPr>
+                          <a:rPr lang="en-US" altLang="ja-JP" sz="2400" i="1">
+                            <a:latin typeface="Cambria Math" panose="02040503050406030204" pitchFamily="18" charset="0"/>
+                          </a:rPr>
+                        </m:ctrlPr>
+                      </m:sSubPr>
+                      <m:e>
+                        <m:r>
+                          <a:rPr lang="en-US" altLang="ja-JP" sz="2400" i="1">
+                            <a:latin typeface="Cambria Math" panose="02040503050406030204" pitchFamily="18" charset="0"/>
+                          </a:rPr>
+                          <m:t>𝑣</m:t>
+                        </m:r>
+                      </m:e>
+                      <m:sub>
+                        <m:r>
+                          <a:rPr lang="en-US" altLang="ja-JP" sz="2400" i="1">
+                            <a:latin typeface="Cambria Math" panose="02040503050406030204" pitchFamily="18" charset="0"/>
+                          </a:rPr>
+                          <m:t>2</m:t>
+                        </m:r>
+                        <m:r>
+                          <a:rPr lang="en-US" altLang="ja-JP" sz="2400" i="1">
+                            <a:latin typeface="Cambria Math" panose="02040503050406030204" pitchFamily="18" charset="0"/>
+                          </a:rPr>
+                          <m:t>𝑓</m:t>
+                        </m:r>
+                      </m:sub>
+                    </m:sSub>
+                    <m:r>
+                      <a:rPr lang="en-US" altLang="ja-JP" sz="2400" b="0" i="1" smtClean="0">
+                        <a:solidFill>
+                          <a:schemeClr val="tx1"/>
+                        </a:solidFill>
+                        <a:latin typeface="Cambria Math" panose="02040503050406030204" pitchFamily="18" charset="0"/>
+                      </a:rPr>
+                      <m:t>=</m:t>
+                    </m:r>
+                    <m:r>
+                      <a:rPr lang="en-US" altLang="ja-JP" sz="2400" i="1">
+                        <a:latin typeface="Cambria Math" panose="02040503050406030204" pitchFamily="18" charset="0"/>
+                      </a:rPr>
+                      <m:t>−17</m:t>
+                    </m:r>
+                  </m:oMath>
+                </a14:m>
+                <a:r>
+                  <a:rPr lang="en-US" altLang="ja-JP" sz="2400" dirty="0"/>
+                  <a:t>	</a:t>
+                </a:r>
+                <a:r>
+                  <a:rPr lang="ja-JP" altLang="en-US" sz="2400" dirty="0"/>
+                  <a:t>・・・①</a:t>
+                </a:r>
+                <a:endParaRPr lang="en-US" altLang="ja-JP" sz="2400" dirty="0"/>
+              </a:p>
+            </p:txBody>
+          </p:sp>
+        </mc:Choice>
+        <mc:Fallback>
+          <p:sp>
+            <p:nvSpPr>
+              <p:cNvPr id="6" name="テキスト ボックス 5">
+                <a:extLst>
+                  <a:ext uri="{FF2B5EF4-FFF2-40B4-BE49-F238E27FC236}">
+                    <a16:creationId xmlns:a16="http://schemas.microsoft.com/office/drawing/2014/main" id="{55830AD6-028B-4C4E-80BF-B70DFC1C3A46}"/>
+                  </a:ext>
+                </a:extLst>
+              </p:cNvPr>
+              <p:cNvSpPr txBox="1">
+                <a:spLocks noRot="1" noChangeAspect="1" noMove="1" noResize="1" noEditPoints="1" noAdjustHandles="1" noChangeArrowheads="1" noChangeShapeType="1" noTextEdit="1"/>
+              </p:cNvSpPr>
+              <p:nvPr/>
+            </p:nvSpPr>
+            <p:spPr>
+              <a:xfrm>
+                <a:off x="567542" y="1216429"/>
+                <a:ext cx="9417963" cy="4642809"/>
+              </a:xfrm>
+              <a:prstGeom prst="rect">
+                <a:avLst/>
+              </a:prstGeom>
+              <a:blipFill>
+                <a:blip r:embed="rId2"/>
+                <a:stretch>
+                  <a:fillRect l="-971" t="-1051" r="-65" b="-1708"/>
+                </a:stretch>
+              </a:blipFill>
+            </p:spPr>
+            <p:txBody>
+              <a:bodyPr/>
+              <a:lstStyle/>
+              <a:p>
+                <a:r>
+                  <a:rPr lang="ja-JP" altLang="en-US">
+                    <a:noFill/>
+                  </a:rPr>
+                  <a:t> </a:t>
+                </a:r>
+              </a:p>
+            </p:txBody>
+          </p:sp>
+        </mc:Fallback>
+      </mc:AlternateContent>
+    </p:spTree>
+    <p:extLst>
+      <p:ext uri="{BB962C8B-B14F-4D97-AF65-F5344CB8AC3E}">
+        <p14:creationId xmlns:p14="http://schemas.microsoft.com/office/powerpoint/2010/main" val="1928821954"/>
+      </p:ext>
+    </p:extLst>
+  </p:cSld>
+  <p:clrMapOvr>
+    <a:masterClrMapping/>
+  </p:clrMapOvr>
+</p:sld>
+</file>
+
+<file path=ppt/slides/slide11.xml><?xml version="1.0" encoding="utf-8"?>
+<p:sld xmlns:a="http://schemas.openxmlformats.org/drawingml/2006/main" xmlns:r="http://schemas.openxmlformats.org/officeDocument/2006/relationships" xmlns:p="http://schemas.openxmlformats.org/presentationml/2006/main">
+  <p:cSld>
+    <p:spTree>
+      <p:nvGrpSpPr>
+        <p:cNvPr id="1" name=""/>
+        <p:cNvGrpSpPr/>
+        <p:nvPr/>
+      </p:nvGrpSpPr>
+      <p:grpSpPr>
+        <a:xfrm>
+          <a:off x="0" y="0"/>
+          <a:ext cx="0" cy="0"/>
+          <a:chOff x="0" y="0"/>
+          <a:chExt cx="0" cy="0"/>
+        </a:xfrm>
+      </p:grpSpPr>
+      <p:sp>
+        <p:nvSpPr>
+          <p:cNvPr id="4" name="テキスト ボックス 3">
+            <a:extLst>
+              <a:ext uri="{FF2B5EF4-FFF2-40B4-BE49-F238E27FC236}">
+                <a16:creationId xmlns:a16="http://schemas.microsoft.com/office/drawing/2014/main" id="{5A13BF46-B8C5-48AA-8308-C9ECFF431A18}"/>
+              </a:ext>
+            </a:extLst>
+          </p:cNvPr>
+          <p:cNvSpPr txBox="1"/>
+          <p:nvPr/>
+        </p:nvSpPr>
+        <p:spPr>
+          <a:xfrm>
+            <a:off x="567542" y="491954"/>
+            <a:ext cx="1943161" cy="584775"/>
+          </a:xfrm>
+          <a:prstGeom prst="rect">
+            <a:avLst/>
+          </a:prstGeom>
+          <a:noFill/>
+        </p:spPr>
+        <p:txBody>
+          <a:bodyPr wrap="none" rtlCol="0">
+            <a:spAutoFit/>
+          </a:bodyPr>
+          <a:lstStyle/>
+          <a:p>
+            <a:r>
+              <a:rPr lang="ja-JP" altLang="en-US" sz="3200" b="1" u="sng" dirty="0"/>
+              <a:t>衝突 例題</a:t>
+            </a:r>
+            <a:endParaRPr kumimoji="1" lang="en-US" altLang="ja-JP" sz="3200" b="1" u="sng" dirty="0"/>
+          </a:p>
+        </p:txBody>
+      </p:sp>
+      <mc:AlternateContent xmlns:mc="http://schemas.openxmlformats.org/markup-compatibility/2006">
+        <mc:Choice xmlns:a14="http://schemas.microsoft.com/office/drawing/2010/main" Requires="a14">
+          <p:sp>
+            <p:nvSpPr>
+              <p:cNvPr id="6" name="テキスト ボックス 5">
+                <a:extLst>
+                  <a:ext uri="{FF2B5EF4-FFF2-40B4-BE49-F238E27FC236}">
+                    <a16:creationId xmlns:a16="http://schemas.microsoft.com/office/drawing/2014/main" id="{55830AD6-028B-4C4E-80BF-B70DFC1C3A46}"/>
+                  </a:ext>
+                </a:extLst>
+              </p:cNvPr>
+              <p:cNvSpPr txBox="1"/>
+              <p:nvPr/>
+            </p:nvSpPr>
+            <p:spPr>
+              <a:xfrm>
+                <a:off x="567542" y="1216429"/>
+                <a:ext cx="9417963" cy="4639603"/>
+              </a:xfrm>
+              <a:prstGeom prst="rect">
+                <a:avLst/>
+              </a:prstGeom>
+              <a:noFill/>
+            </p:spPr>
+            <p:txBody>
+              <a:bodyPr wrap="none" rtlCol="0">
+                <a:spAutoFit/>
+              </a:bodyPr>
+              <a:lstStyle/>
+              <a:p>
+                <a:r>
+                  <a:rPr lang="ja-JP" altLang="en-US" sz="2400" dirty="0"/>
+                  <a:t>以下の２つの鉛玉が衝突した後の、それぞれの速度を求めなさい。</a:t>
+                </a:r>
+                <a:endParaRPr lang="en-US" altLang="ja-JP" sz="2400" dirty="0"/>
+              </a:p>
+              <a:p>
+                <a:r>
+                  <a:rPr lang="ja-JP" altLang="en-US" sz="2400" dirty="0"/>
+                  <a:t>ただし、鉛同士のはねかえり係数は</a:t>
+                </a:r>
+                <a:r>
+                  <a:rPr lang="en-US" altLang="ja-JP" sz="2400" dirty="0"/>
+                  <a:t>0.2</a:t>
+                </a:r>
+                <a:r>
+                  <a:rPr lang="ja-JP" altLang="en-US" sz="2400" dirty="0"/>
+                  <a:t>とする</a:t>
+                </a:r>
+                <a:endParaRPr lang="en-US" altLang="ja-JP" sz="2400" dirty="0"/>
+              </a:p>
+              <a:p>
+                <a:r>
+                  <a:rPr lang="ja-JP" altLang="en-US" sz="2400" dirty="0"/>
+                  <a:t>■鉛玉</a:t>
+                </a:r>
+                <a:r>
+                  <a:rPr lang="en-US" altLang="ja-JP" sz="2400" dirty="0"/>
+                  <a:t>A</a:t>
+                </a:r>
+              </a:p>
+              <a:p>
+                <a:r>
+                  <a:rPr lang="ja-JP" altLang="en-US" sz="2400" dirty="0"/>
+                  <a:t>・質量：</a:t>
+                </a:r>
+                <a14:m>
+                  <m:oMath xmlns:m="http://schemas.openxmlformats.org/officeDocument/2006/math">
+                    <m:r>
+                      <a:rPr lang="en-US" altLang="ja-JP" sz="2400" i="1" dirty="0" smtClean="0">
+                        <a:latin typeface="Cambria Math" panose="02040503050406030204" pitchFamily="18" charset="0"/>
+                      </a:rPr>
+                      <m:t>500</m:t>
+                    </m:r>
+                    <m:r>
+                      <a:rPr lang="en-US" altLang="ja-JP" sz="2400" i="1" dirty="0" smtClean="0">
+                        <a:latin typeface="Cambria Math" panose="02040503050406030204" pitchFamily="18" charset="0"/>
+                      </a:rPr>
+                      <m:t>𝑔</m:t>
+                    </m:r>
+                  </m:oMath>
+                </a14:m>
+                <a:r>
+                  <a:rPr lang="en-US" altLang="ja-JP" sz="2400" dirty="0"/>
+                  <a:t>	</a:t>
+                </a:r>
+                <a:r>
+                  <a:rPr lang="ja-JP" altLang="en-US" sz="2400" dirty="0"/>
+                  <a:t>・速度</a:t>
+                </a:r>
+                <a14:m>
+                  <m:oMath xmlns:m="http://schemas.openxmlformats.org/officeDocument/2006/math">
+                    <m:r>
+                      <a:rPr lang="en-US" altLang="ja-JP" sz="2400" i="1" dirty="0" smtClean="0">
+                        <a:latin typeface="Cambria Math" panose="02040503050406030204" pitchFamily="18" charset="0"/>
+                      </a:rPr>
+                      <m:t>30</m:t>
+                    </m:r>
+                    <m:r>
+                      <a:rPr lang="en-US" altLang="ja-JP" sz="2400" i="1" dirty="0" smtClean="0">
+                        <a:latin typeface="Cambria Math" panose="02040503050406030204" pitchFamily="18" charset="0"/>
+                      </a:rPr>
+                      <m:t>𝑚</m:t>
+                    </m:r>
+                    <m:r>
+                      <a:rPr lang="en-US" altLang="ja-JP" sz="2400" i="1" dirty="0" smtClean="0">
+                        <a:latin typeface="Cambria Math" panose="02040503050406030204" pitchFamily="18" charset="0"/>
+                      </a:rPr>
+                      <m:t>/</m:t>
+                    </m:r>
+                    <m:r>
+                      <a:rPr lang="ja-JP" altLang="en-US" sz="2400" i="1" dirty="0" smtClean="0">
+                        <a:latin typeface="Cambria Math" panose="02040503050406030204" pitchFamily="18" charset="0"/>
+                      </a:rPr>
+                      <m:t>秒</m:t>
+                    </m:r>
+                  </m:oMath>
+                </a14:m>
+                <a:endParaRPr lang="en-US" altLang="ja-JP" sz="2400" dirty="0"/>
+              </a:p>
+              <a:p>
+                <a:r>
+                  <a:rPr lang="ja-JP" altLang="en-US" sz="2400" dirty="0"/>
+                  <a:t>■鉛玉</a:t>
+                </a:r>
+                <a:r>
+                  <a:rPr lang="en-US" altLang="ja-JP" sz="2400" dirty="0"/>
+                  <a:t>B</a:t>
+                </a:r>
+              </a:p>
+              <a:p>
+                <a:r>
+                  <a:rPr lang="ja-JP" altLang="en-US" sz="2400" dirty="0"/>
+                  <a:t>・質量：</a:t>
+                </a:r>
+                <a14:m>
+                  <m:oMath xmlns:m="http://schemas.openxmlformats.org/officeDocument/2006/math">
+                    <m:r>
+                      <a:rPr lang="en-US" altLang="ja-JP" sz="2400" i="1" dirty="0" smtClean="0">
+                        <a:latin typeface="Cambria Math" panose="02040503050406030204" pitchFamily="18" charset="0"/>
+                      </a:rPr>
+                      <m:t>800</m:t>
+                    </m:r>
+                    <m:r>
+                      <a:rPr lang="en-US" altLang="ja-JP" sz="2400" i="1" dirty="0" smtClean="0">
+                        <a:latin typeface="Cambria Math" panose="02040503050406030204" pitchFamily="18" charset="0"/>
+                      </a:rPr>
+                      <m:t>𝑔</m:t>
+                    </m:r>
+                  </m:oMath>
+                </a14:m>
+                <a:r>
+                  <a:rPr lang="en-US" altLang="ja-JP" sz="2400" dirty="0"/>
+                  <a:t>	</a:t>
+                </a:r>
+                <a:r>
+                  <a:rPr lang="ja-JP" altLang="en-US" sz="2400" dirty="0"/>
+                  <a:t>・速度</a:t>
+                </a:r>
+                <a14:m>
+                  <m:oMath xmlns:m="http://schemas.openxmlformats.org/officeDocument/2006/math">
+                    <m:r>
+                      <a:rPr lang="en-US" altLang="ja-JP" sz="2400" i="1" dirty="0" smtClean="0">
+                        <a:latin typeface="Cambria Math" panose="02040503050406030204" pitchFamily="18" charset="0"/>
+                      </a:rPr>
+                      <m:t>−40</m:t>
+                    </m:r>
+                    <m:r>
+                      <a:rPr lang="en-US" altLang="ja-JP" sz="2400" i="1" dirty="0" smtClean="0">
+                        <a:latin typeface="Cambria Math" panose="02040503050406030204" pitchFamily="18" charset="0"/>
+                      </a:rPr>
+                      <m:t>𝑚</m:t>
+                    </m:r>
+                    <m:r>
+                      <a:rPr lang="en-US" altLang="ja-JP" sz="2400" i="1" dirty="0" smtClean="0">
+                        <a:latin typeface="Cambria Math" panose="02040503050406030204" pitchFamily="18" charset="0"/>
+                      </a:rPr>
+                      <m:t>/</m:t>
+                    </m:r>
+                    <m:r>
+                      <a:rPr lang="ja-JP" altLang="en-US" sz="2400" i="1" dirty="0" smtClean="0">
+                        <a:latin typeface="Cambria Math" panose="02040503050406030204" pitchFamily="18" charset="0"/>
+                      </a:rPr>
+                      <m:t>秒</m:t>
+                    </m:r>
+                  </m:oMath>
+                </a14:m>
+                <a:endParaRPr lang="en-US" altLang="ja-JP" sz="2400" dirty="0"/>
+              </a:p>
+              <a:p>
+                <a:endParaRPr lang="en-US" altLang="ja-JP" sz="2400" dirty="0"/>
+              </a:p>
+              <a:p>
+                <a:r>
+                  <a:rPr lang="ja-JP" altLang="en-US" sz="2400" b="1" dirty="0">
+                    <a:solidFill>
+                      <a:srgbClr val="FF0000"/>
+                    </a:solidFill>
+                  </a:rPr>
+                  <a:t>■解答</a:t>
+                </a:r>
+                <a:endParaRPr lang="en-US" altLang="ja-JP" sz="2400" b="1" dirty="0">
+                  <a:solidFill>
+                    <a:srgbClr val="FF0000"/>
+                  </a:solidFill>
+                </a:endParaRPr>
+              </a:p>
+              <a:p>
+                <a14:m>
+                  <m:oMath xmlns:m="http://schemas.openxmlformats.org/officeDocument/2006/math">
+                    <m:d>
+                      <m:dPr>
+                        <m:ctrlPr>
+                          <a:rPr lang="en-US" altLang="ja-JP" sz="2400" b="0" i="1" smtClean="0">
+                            <a:latin typeface="Cambria Math" panose="02040503050406030204" pitchFamily="18" charset="0"/>
+                          </a:rPr>
+                        </m:ctrlPr>
+                      </m:dPr>
+                      <m:e>
+                        <m:sSub>
+                          <m:sSubPr>
+                            <m:ctrlPr>
+                              <a:rPr lang="en-US" altLang="ja-JP" sz="2400" b="0" i="1" smtClean="0">
+                                <a:latin typeface="Cambria Math" panose="02040503050406030204" pitchFamily="18" charset="0"/>
+                              </a:rPr>
+                            </m:ctrlPr>
+                          </m:sSubPr>
+                          <m:e>
+                            <m:r>
+                              <a:rPr lang="en-US" altLang="ja-JP" sz="2400" b="0" i="1" smtClean="0">
+                                <a:latin typeface="Cambria Math" panose="02040503050406030204" pitchFamily="18" charset="0"/>
+                              </a:rPr>
+                              <m:t>𝑣</m:t>
+                            </m:r>
+                          </m:e>
+                          <m:sub>
+                            <m:r>
+                              <a:rPr lang="en-US" altLang="ja-JP" sz="2400" b="0" i="1" smtClean="0">
+                                <a:latin typeface="Cambria Math" panose="02040503050406030204" pitchFamily="18" charset="0"/>
+                              </a:rPr>
+                              <m:t>1</m:t>
+                            </m:r>
+                            <m:r>
+                              <a:rPr lang="en-US" altLang="ja-JP" sz="2400" b="0" i="1" smtClean="0">
+                                <a:latin typeface="Cambria Math" panose="02040503050406030204" pitchFamily="18" charset="0"/>
+                              </a:rPr>
+                              <m:t>𝑓</m:t>
+                            </m:r>
+                          </m:sub>
+                        </m:sSub>
+                        <m:r>
+                          <a:rPr lang="en-US" altLang="ja-JP" sz="2400" b="0" i="1" smtClean="0">
+                            <a:latin typeface="Cambria Math" panose="02040503050406030204" pitchFamily="18" charset="0"/>
+                          </a:rPr>
+                          <m:t>−</m:t>
+                        </m:r>
+                        <m:sSub>
+                          <m:sSubPr>
+                            <m:ctrlPr>
+                              <a:rPr lang="en-US" altLang="ja-JP" sz="2400" i="1">
+                                <a:latin typeface="Cambria Math" panose="02040503050406030204" pitchFamily="18" charset="0"/>
+                              </a:rPr>
+                            </m:ctrlPr>
+                          </m:sSubPr>
+                          <m:e>
+                            <m:r>
+                              <a:rPr lang="en-US" altLang="ja-JP" sz="2400" i="1">
+                                <a:latin typeface="Cambria Math" panose="02040503050406030204" pitchFamily="18" charset="0"/>
+                              </a:rPr>
+                              <m:t>𝑣</m:t>
+                            </m:r>
+                          </m:e>
+                          <m:sub>
+                            <m:r>
+                              <a:rPr lang="en-US" altLang="ja-JP" sz="2400" b="0" i="1" smtClean="0">
+                                <a:latin typeface="Cambria Math" panose="02040503050406030204" pitchFamily="18" charset="0"/>
+                              </a:rPr>
+                              <m:t>2</m:t>
+                            </m:r>
+                            <m:r>
+                              <a:rPr lang="en-US" altLang="ja-JP" sz="2400" i="1">
+                                <a:latin typeface="Cambria Math" panose="02040503050406030204" pitchFamily="18" charset="0"/>
+                              </a:rPr>
+                              <m:t>𝑓</m:t>
+                            </m:r>
+                          </m:sub>
+                        </m:sSub>
+                      </m:e>
+                    </m:d>
+                    <m:r>
+                      <a:rPr lang="en-US" altLang="ja-JP" sz="2400" b="0" i="1" smtClean="0">
+                        <a:latin typeface="Cambria Math" panose="02040503050406030204" pitchFamily="18" charset="0"/>
+                      </a:rPr>
+                      <m:t>=−</m:t>
+                    </m:r>
+                    <m:r>
+                      <a:rPr lang="en-US" altLang="ja-JP" sz="2400" b="0" i="1" smtClean="0">
+                        <a:latin typeface="Cambria Math" panose="02040503050406030204" pitchFamily="18" charset="0"/>
+                      </a:rPr>
+                      <m:t>𝑒</m:t>
+                    </m:r>
+                    <m:r>
+                      <a:rPr lang="en-US" altLang="ja-JP" sz="2400" b="0" i="1" smtClean="0">
+                        <a:latin typeface="Cambria Math" panose="02040503050406030204" pitchFamily="18" charset="0"/>
+                      </a:rPr>
+                      <m:t>(</m:t>
+                    </m:r>
+                    <m:sSub>
+                      <m:sSubPr>
+                        <m:ctrlPr>
+                          <a:rPr lang="en-US" altLang="ja-JP" sz="2400" i="1">
+                            <a:latin typeface="Cambria Math" panose="02040503050406030204" pitchFamily="18" charset="0"/>
+                          </a:rPr>
+                        </m:ctrlPr>
+                      </m:sSubPr>
+                      <m:e>
+                        <m:r>
+                          <a:rPr lang="en-US" altLang="ja-JP" sz="2400" i="1">
+                            <a:latin typeface="Cambria Math" panose="02040503050406030204" pitchFamily="18" charset="0"/>
+                          </a:rPr>
+                          <m:t>𝑣</m:t>
+                        </m:r>
+                      </m:e>
+                      <m:sub>
+                        <m:r>
+                          <a:rPr lang="en-US" altLang="ja-JP" sz="2400" i="1">
+                            <a:latin typeface="Cambria Math" panose="02040503050406030204" pitchFamily="18" charset="0"/>
+                          </a:rPr>
+                          <m:t>1</m:t>
+                        </m:r>
+                        <m:r>
+                          <a:rPr lang="en-US" altLang="ja-JP" sz="2400" b="0" i="1" smtClean="0">
+                            <a:latin typeface="Cambria Math" panose="02040503050406030204" pitchFamily="18" charset="0"/>
+                          </a:rPr>
+                          <m:t>𝑖</m:t>
+                        </m:r>
+                      </m:sub>
+                    </m:sSub>
+                    <m:r>
+                      <a:rPr lang="en-US" altLang="ja-JP" sz="2400" i="1">
+                        <a:latin typeface="Cambria Math" panose="02040503050406030204" pitchFamily="18" charset="0"/>
+                      </a:rPr>
+                      <m:t>−</m:t>
+                    </m:r>
+                    <m:sSub>
+                      <m:sSubPr>
+                        <m:ctrlPr>
+                          <a:rPr lang="en-US" altLang="ja-JP" sz="2400" i="1">
+                            <a:latin typeface="Cambria Math" panose="02040503050406030204" pitchFamily="18" charset="0"/>
+                          </a:rPr>
+                        </m:ctrlPr>
+                      </m:sSubPr>
+                      <m:e>
+                        <m:r>
+                          <a:rPr lang="en-US" altLang="ja-JP" sz="2400" i="1">
+                            <a:latin typeface="Cambria Math" panose="02040503050406030204" pitchFamily="18" charset="0"/>
+                          </a:rPr>
+                          <m:t>𝑣</m:t>
+                        </m:r>
+                      </m:e>
+                      <m:sub>
+                        <m:r>
+                          <a:rPr lang="en-US" altLang="ja-JP" sz="2400" i="1">
+                            <a:latin typeface="Cambria Math" panose="02040503050406030204" pitchFamily="18" charset="0"/>
+                          </a:rPr>
+                          <m:t>2</m:t>
+                        </m:r>
+                        <m:r>
+                          <a:rPr lang="en-US" altLang="ja-JP" sz="2400" b="0" i="1" smtClean="0">
+                            <a:latin typeface="Cambria Math" panose="02040503050406030204" pitchFamily="18" charset="0"/>
+                          </a:rPr>
+                          <m:t>𝑖</m:t>
+                        </m:r>
+                      </m:sub>
+                    </m:sSub>
+                    <m:r>
+                      <a:rPr lang="en-US" altLang="ja-JP" sz="2400" b="0" i="1" smtClean="0">
+                        <a:latin typeface="Cambria Math" panose="02040503050406030204" pitchFamily="18" charset="0"/>
+                      </a:rPr>
+                      <m:t>)</m:t>
+                    </m:r>
+                  </m:oMath>
+                </a14:m>
+                <a:r>
+                  <a:rPr lang="en-US" altLang="ja-JP" sz="2400" dirty="0"/>
+                  <a:t> </a:t>
+                </a:r>
+                <a:r>
+                  <a:rPr lang="ja-JP" altLang="en-US" sz="2400" dirty="0"/>
+                  <a:t>より、</a:t>
+                </a:r>
+                <a:endParaRPr lang="en-US" altLang="ja-JP" sz="2400" dirty="0"/>
+              </a:p>
+              <a:p>
+                <a14:m>
+                  <m:oMath xmlns:m="http://schemas.openxmlformats.org/officeDocument/2006/math">
+                    <m:sSub>
+                      <m:sSubPr>
+                        <m:ctrlPr>
+                          <a:rPr lang="en-US" altLang="ja-JP" sz="2400" i="1">
+                            <a:latin typeface="Cambria Math" panose="02040503050406030204" pitchFamily="18" charset="0"/>
+                          </a:rPr>
+                        </m:ctrlPr>
+                      </m:sSubPr>
+                      <m:e>
+                        <m:r>
+                          <a:rPr lang="en-US" altLang="ja-JP" sz="2400" i="1">
+                            <a:latin typeface="Cambria Math" panose="02040503050406030204" pitchFamily="18" charset="0"/>
+                          </a:rPr>
+                          <m:t>𝑣</m:t>
+                        </m:r>
+                      </m:e>
+                      <m:sub>
+                        <m:r>
+                          <a:rPr lang="en-US" altLang="ja-JP" sz="2400" i="1">
+                            <a:latin typeface="Cambria Math" panose="02040503050406030204" pitchFamily="18" charset="0"/>
+                          </a:rPr>
+                          <m:t>1</m:t>
+                        </m:r>
+                        <m:r>
+                          <a:rPr lang="en-US" altLang="ja-JP" sz="2400" i="1">
+                            <a:latin typeface="Cambria Math" panose="02040503050406030204" pitchFamily="18" charset="0"/>
+                          </a:rPr>
+                          <m:t>𝑓</m:t>
+                        </m:r>
+                      </m:sub>
+                    </m:sSub>
+                    <m:r>
+                      <a:rPr lang="en-US" altLang="ja-JP" sz="2400" i="1">
+                        <a:latin typeface="Cambria Math" panose="02040503050406030204" pitchFamily="18" charset="0"/>
+                      </a:rPr>
+                      <m:t>−</m:t>
+                    </m:r>
+                    <m:sSub>
+                      <m:sSubPr>
+                        <m:ctrlPr>
+                          <a:rPr lang="en-US" altLang="ja-JP" sz="2400" i="1">
+                            <a:latin typeface="Cambria Math" panose="02040503050406030204" pitchFamily="18" charset="0"/>
+                          </a:rPr>
+                        </m:ctrlPr>
+                      </m:sSubPr>
+                      <m:e>
+                        <m:r>
+                          <a:rPr lang="en-US" altLang="ja-JP" sz="2400" i="1">
+                            <a:latin typeface="Cambria Math" panose="02040503050406030204" pitchFamily="18" charset="0"/>
+                          </a:rPr>
+                          <m:t>𝑣</m:t>
+                        </m:r>
+                      </m:e>
+                      <m:sub>
+                        <m:r>
+                          <a:rPr lang="en-US" altLang="ja-JP" sz="2400" i="1">
+                            <a:latin typeface="Cambria Math" panose="02040503050406030204" pitchFamily="18" charset="0"/>
+                          </a:rPr>
+                          <m:t>2</m:t>
+                        </m:r>
+                        <m:r>
+                          <a:rPr lang="en-US" altLang="ja-JP" sz="2400" i="1">
+                            <a:latin typeface="Cambria Math" panose="02040503050406030204" pitchFamily="18" charset="0"/>
+                          </a:rPr>
+                          <m:t>𝑓</m:t>
+                        </m:r>
+                      </m:sub>
+                    </m:sSub>
+                    <m:r>
+                      <a:rPr lang="en-US" altLang="ja-JP" sz="2400" i="1">
+                        <a:latin typeface="Cambria Math" panose="02040503050406030204" pitchFamily="18" charset="0"/>
+                      </a:rPr>
+                      <m:t> </m:t>
+                    </m:r>
+                    <m:r>
+                      <a:rPr lang="en-US" altLang="ja-JP" sz="2400" b="0" i="1" smtClean="0">
+                        <a:latin typeface="Cambria Math" panose="02040503050406030204" pitchFamily="18" charset="0"/>
+                      </a:rPr>
+                      <m:t>=−</m:t>
+                    </m:r>
+                    <m:r>
+                      <a:rPr lang="en-US" altLang="ja-JP" sz="2400" b="0" i="1" smtClean="0">
+                        <a:latin typeface="Cambria Math" panose="02040503050406030204" pitchFamily="18" charset="0"/>
+                      </a:rPr>
+                      <m:t>0.2</m:t>
+                    </m:r>
+                    <m:r>
+                      <a:rPr lang="en-US" altLang="ja-JP" sz="2400" b="0" i="1" smtClean="0">
+                        <a:latin typeface="Cambria Math" panose="02040503050406030204" pitchFamily="18" charset="0"/>
+                      </a:rPr>
+                      <m:t>(</m:t>
+                    </m:r>
+                    <m:r>
+                      <a:rPr lang="en-US" altLang="ja-JP" sz="2400" i="1" smtClean="0">
+                        <a:latin typeface="Cambria Math" panose="02040503050406030204" pitchFamily="18" charset="0"/>
+                      </a:rPr>
+                      <m:t>3</m:t>
+                    </m:r>
+                    <m:r>
+                      <a:rPr lang="en-US" altLang="ja-JP" sz="2400" b="0" i="1" smtClean="0">
+                        <a:latin typeface="Cambria Math" panose="02040503050406030204" pitchFamily="18" charset="0"/>
+                      </a:rPr>
+                      <m:t>0</m:t>
+                    </m:r>
+                    <m:r>
+                      <a:rPr lang="en-US" altLang="ja-JP" sz="2400" i="1">
+                        <a:latin typeface="Cambria Math" panose="02040503050406030204" pitchFamily="18" charset="0"/>
+                      </a:rPr>
+                      <m:t>−</m:t>
+                    </m:r>
+                    <m:r>
+                      <a:rPr lang="en-US" altLang="ja-JP" sz="2400" i="1" smtClean="0">
+                        <a:latin typeface="Cambria Math" panose="02040503050406030204" pitchFamily="18" charset="0"/>
+                      </a:rPr>
+                      <m:t>(</m:t>
+                    </m:r>
+                    <m:r>
+                      <a:rPr lang="en-US" altLang="ja-JP" sz="2400" b="0" i="1" smtClean="0">
+                        <a:latin typeface="Cambria Math" panose="02040503050406030204" pitchFamily="18" charset="0"/>
+                      </a:rPr>
+                      <m:t>−40)</m:t>
+                    </m:r>
+                    <m:r>
+                      <a:rPr lang="en-US" altLang="ja-JP" sz="2400" b="0" i="1" smtClean="0">
+                        <a:latin typeface="Cambria Math" panose="02040503050406030204" pitchFamily="18" charset="0"/>
+                      </a:rPr>
+                      <m:t>)</m:t>
+                    </m:r>
+                  </m:oMath>
+                </a14:m>
+                <a:r>
+                  <a:rPr lang="en-US" altLang="ja-JP" sz="2400" dirty="0"/>
+                  <a:t> </a:t>
+                </a:r>
+              </a:p>
+              <a:p>
+                <a14:m>
+                  <m:oMath xmlns:m="http://schemas.openxmlformats.org/officeDocument/2006/math">
+                    <m:sSub>
+                      <m:sSubPr>
+                        <m:ctrlPr>
+                          <a:rPr lang="en-US" altLang="ja-JP" sz="2400" i="1" smtClean="0">
+                            <a:latin typeface="Cambria Math" panose="02040503050406030204" pitchFamily="18" charset="0"/>
+                          </a:rPr>
+                        </m:ctrlPr>
+                      </m:sSubPr>
+                      <m:e>
+                        <m:r>
+                          <a:rPr lang="en-US" altLang="ja-JP" sz="2400" i="1">
+                            <a:latin typeface="Cambria Math" panose="02040503050406030204" pitchFamily="18" charset="0"/>
+                          </a:rPr>
+                          <m:t>𝑣</m:t>
+                        </m:r>
+                      </m:e>
+                      <m:sub>
+                        <m:r>
+                          <a:rPr lang="en-US" altLang="ja-JP" sz="2400" i="1">
+                            <a:latin typeface="Cambria Math" panose="02040503050406030204" pitchFamily="18" charset="0"/>
+                          </a:rPr>
+                          <m:t>1</m:t>
+                        </m:r>
+                        <m:r>
+                          <a:rPr lang="en-US" altLang="ja-JP" sz="2400" i="1">
+                            <a:latin typeface="Cambria Math" panose="02040503050406030204" pitchFamily="18" charset="0"/>
+                          </a:rPr>
+                          <m:t>𝑓</m:t>
+                        </m:r>
+                      </m:sub>
+                    </m:sSub>
+                    <m:r>
+                      <a:rPr lang="en-US" altLang="ja-JP" sz="2400" i="1">
+                        <a:latin typeface="Cambria Math" panose="02040503050406030204" pitchFamily="18" charset="0"/>
+                      </a:rPr>
+                      <m:t>−</m:t>
+                    </m:r>
+                    <m:sSub>
+                      <m:sSubPr>
+                        <m:ctrlPr>
+                          <a:rPr lang="en-US" altLang="ja-JP" sz="2400" i="1">
+                            <a:latin typeface="Cambria Math" panose="02040503050406030204" pitchFamily="18" charset="0"/>
+                          </a:rPr>
+                        </m:ctrlPr>
+                      </m:sSubPr>
+                      <m:e>
+                        <m:r>
+                          <a:rPr lang="en-US" altLang="ja-JP" sz="2400" i="1">
+                            <a:latin typeface="Cambria Math" panose="02040503050406030204" pitchFamily="18" charset="0"/>
+                          </a:rPr>
+                          <m:t>𝑣</m:t>
+                        </m:r>
+                      </m:e>
+                      <m:sub>
+                        <m:r>
+                          <a:rPr lang="en-US" altLang="ja-JP" sz="2400" i="1">
+                            <a:latin typeface="Cambria Math" panose="02040503050406030204" pitchFamily="18" charset="0"/>
+                          </a:rPr>
+                          <m:t>2</m:t>
+                        </m:r>
+                        <m:r>
+                          <a:rPr lang="en-US" altLang="ja-JP" sz="2400" i="1">
+                            <a:latin typeface="Cambria Math" panose="02040503050406030204" pitchFamily="18" charset="0"/>
+                          </a:rPr>
+                          <m:t>𝑓</m:t>
+                        </m:r>
+                      </m:sub>
+                    </m:sSub>
+                    <m:r>
+                      <a:rPr lang="en-US" altLang="ja-JP" sz="2400" i="1">
+                        <a:latin typeface="Cambria Math" panose="02040503050406030204" pitchFamily="18" charset="0"/>
+                      </a:rPr>
+                      <m:t> </m:t>
+                    </m:r>
+                    <m:r>
+                      <a:rPr lang="en-US" altLang="ja-JP" sz="2400" b="0" i="1" smtClean="0">
+                        <a:latin typeface="Cambria Math" panose="02040503050406030204" pitchFamily="18" charset="0"/>
+                      </a:rPr>
+                      <m:t>=−</m:t>
+                    </m:r>
+                    <m:r>
+                      <a:rPr lang="en-US" altLang="ja-JP" sz="2400" b="0" i="1" smtClean="0">
+                        <a:latin typeface="Cambria Math" panose="02040503050406030204" pitchFamily="18" charset="0"/>
+                      </a:rPr>
+                      <m:t>14</m:t>
+                    </m:r>
+                  </m:oMath>
+                </a14:m>
+                <a:r>
+                  <a:rPr lang="en-US" altLang="ja-JP" sz="2400" dirty="0"/>
+                  <a:t> 	</a:t>
+                </a:r>
+                <a:r>
+                  <a:rPr lang="ja-JP" altLang="en-US" sz="2400" dirty="0"/>
+                  <a:t>・・・②</a:t>
+                </a:r>
+                <a:endParaRPr lang="en-US" altLang="ja-JP" sz="2400" dirty="0"/>
+              </a:p>
+              <a:p>
+                <a:endParaRPr lang="en-US" altLang="ja-JP" sz="2400" b="1" dirty="0">
+                  <a:solidFill>
+                    <a:srgbClr val="FF0000"/>
+                  </a:solidFill>
+                </a:endParaRPr>
+              </a:p>
+            </p:txBody>
+          </p:sp>
+        </mc:Choice>
+        <mc:Fallback>
+          <p:sp>
+            <p:nvSpPr>
+              <p:cNvPr id="6" name="テキスト ボックス 5">
+                <a:extLst>
+                  <a:ext uri="{FF2B5EF4-FFF2-40B4-BE49-F238E27FC236}">
+                    <a16:creationId xmlns:a16="http://schemas.microsoft.com/office/drawing/2014/main" id="{55830AD6-028B-4C4E-80BF-B70DFC1C3A46}"/>
+                  </a:ext>
+                </a:extLst>
+              </p:cNvPr>
+              <p:cNvSpPr txBox="1">
+                <a:spLocks noRot="1" noChangeAspect="1" noMove="1" noResize="1" noEditPoints="1" noAdjustHandles="1" noChangeArrowheads="1" noChangeShapeType="1" noTextEdit="1"/>
+              </p:cNvSpPr>
+              <p:nvPr/>
+            </p:nvSpPr>
+            <p:spPr>
+              <a:xfrm>
+                <a:off x="567542" y="1216429"/>
+                <a:ext cx="9417963" cy="4639603"/>
+              </a:xfrm>
+              <a:prstGeom prst="rect">
+                <a:avLst/>
+              </a:prstGeom>
+              <a:blipFill>
+                <a:blip r:embed="rId2"/>
+                <a:stretch>
+                  <a:fillRect l="-971" t="-1051" r="-65"/>
+                </a:stretch>
+              </a:blipFill>
+            </p:spPr>
+            <p:txBody>
+              <a:bodyPr/>
+              <a:lstStyle/>
+              <a:p>
+                <a:r>
+                  <a:rPr lang="ja-JP" altLang="en-US">
+                    <a:noFill/>
+                  </a:rPr>
+                  <a:t> </a:t>
+                </a:r>
+              </a:p>
+            </p:txBody>
+          </p:sp>
+        </mc:Fallback>
+      </mc:AlternateContent>
+    </p:spTree>
+    <p:extLst>
+      <p:ext uri="{BB962C8B-B14F-4D97-AF65-F5344CB8AC3E}">
+        <p14:creationId xmlns:p14="http://schemas.microsoft.com/office/powerpoint/2010/main" val="4124592253"/>
+      </p:ext>
+    </p:extLst>
+  </p:cSld>
+  <p:clrMapOvr>
+    <a:masterClrMapping/>
+  </p:clrMapOvr>
+</p:sld>
+</file>
+
+<file path=ppt/slides/slide12.xml><?xml version="1.0" encoding="utf-8"?>
+<p:sld xmlns:a="http://schemas.openxmlformats.org/drawingml/2006/main" xmlns:r="http://schemas.openxmlformats.org/officeDocument/2006/relationships" xmlns:p="http://schemas.openxmlformats.org/presentationml/2006/main">
+  <p:cSld>
+    <p:spTree>
+      <p:nvGrpSpPr>
+        <p:cNvPr id="1" name=""/>
+        <p:cNvGrpSpPr/>
+        <p:nvPr/>
+      </p:nvGrpSpPr>
+      <p:grpSpPr>
+        <a:xfrm>
+          <a:off x="0" y="0"/>
+          <a:ext cx="0" cy="0"/>
+          <a:chOff x="0" y="0"/>
+          <a:chExt cx="0" cy="0"/>
+        </a:xfrm>
+      </p:grpSpPr>
+      <p:sp>
+        <p:nvSpPr>
+          <p:cNvPr id="4" name="テキスト ボックス 3">
+            <a:extLst>
+              <a:ext uri="{FF2B5EF4-FFF2-40B4-BE49-F238E27FC236}">
+                <a16:creationId xmlns:a16="http://schemas.microsoft.com/office/drawing/2014/main" id="{5A13BF46-B8C5-48AA-8308-C9ECFF431A18}"/>
+              </a:ext>
+            </a:extLst>
+          </p:cNvPr>
+          <p:cNvSpPr txBox="1"/>
+          <p:nvPr/>
+        </p:nvSpPr>
+        <p:spPr>
+          <a:xfrm>
+            <a:off x="567542" y="491954"/>
+            <a:ext cx="1943161" cy="584775"/>
+          </a:xfrm>
+          <a:prstGeom prst="rect">
+            <a:avLst/>
+          </a:prstGeom>
+          <a:noFill/>
+        </p:spPr>
+        <p:txBody>
+          <a:bodyPr wrap="none" rtlCol="0">
+            <a:spAutoFit/>
+          </a:bodyPr>
+          <a:lstStyle/>
+          <a:p>
+            <a:r>
+              <a:rPr lang="ja-JP" altLang="en-US" sz="3200" b="1" u="sng" dirty="0"/>
+              <a:t>衝突 例題</a:t>
+            </a:r>
+            <a:endParaRPr kumimoji="1" lang="en-US" altLang="ja-JP" sz="3200" b="1" u="sng" dirty="0"/>
+          </a:p>
+        </p:txBody>
+      </p:sp>
+      <mc:AlternateContent xmlns:mc="http://schemas.openxmlformats.org/markup-compatibility/2006">
+        <mc:Choice xmlns:a14="http://schemas.microsoft.com/office/drawing/2010/main" Requires="a14">
+          <p:sp>
+            <p:nvSpPr>
+              <p:cNvPr id="6" name="テキスト ボックス 5">
+                <a:extLst>
+                  <a:ext uri="{FF2B5EF4-FFF2-40B4-BE49-F238E27FC236}">
+                    <a16:creationId xmlns:a16="http://schemas.microsoft.com/office/drawing/2014/main" id="{55830AD6-028B-4C4E-80BF-B70DFC1C3A46}"/>
+                  </a:ext>
+                </a:extLst>
+              </p:cNvPr>
+              <p:cNvSpPr txBox="1"/>
+              <p:nvPr/>
+            </p:nvSpPr>
+            <p:spPr>
+              <a:xfrm>
+                <a:off x="567542" y="1216429"/>
+                <a:ext cx="9417963" cy="5017720"/>
+              </a:xfrm>
+              <a:prstGeom prst="rect">
+                <a:avLst/>
+              </a:prstGeom>
+              <a:noFill/>
+            </p:spPr>
+            <p:txBody>
+              <a:bodyPr wrap="none" rtlCol="0">
+                <a:spAutoFit/>
+              </a:bodyPr>
+              <a:lstStyle/>
+              <a:p>
+                <a:r>
+                  <a:rPr lang="ja-JP" altLang="en-US" sz="2400" dirty="0"/>
+                  <a:t>以下の２つの鉛玉が衝突した後の、それぞれの速度を求めなさい。</a:t>
+                </a:r>
+                <a:endParaRPr lang="en-US" altLang="ja-JP" sz="2400" dirty="0"/>
+              </a:p>
+              <a:p>
+                <a:r>
+                  <a:rPr lang="ja-JP" altLang="en-US" sz="2400" dirty="0"/>
+                  <a:t>ただし、鉛同士のはねかえり係数は</a:t>
+                </a:r>
+                <a:r>
+                  <a:rPr lang="en-US" altLang="ja-JP" sz="2400" dirty="0"/>
+                  <a:t>0.2</a:t>
+                </a:r>
+                <a:r>
+                  <a:rPr lang="ja-JP" altLang="en-US" sz="2400" dirty="0"/>
+                  <a:t>とする</a:t>
+                </a:r>
+                <a:endParaRPr lang="en-US" altLang="ja-JP" sz="2400" dirty="0"/>
+              </a:p>
+              <a:p>
+                <a:r>
+                  <a:rPr lang="ja-JP" altLang="en-US" sz="2400" dirty="0"/>
+                  <a:t>■鉛玉</a:t>
+                </a:r>
+                <a:r>
+                  <a:rPr lang="en-US" altLang="ja-JP" sz="2400" dirty="0"/>
+                  <a:t>A</a:t>
+                </a:r>
+              </a:p>
+              <a:p>
+                <a:r>
+                  <a:rPr lang="ja-JP" altLang="en-US" sz="2400" dirty="0"/>
+                  <a:t>・質量：</a:t>
+                </a:r>
+                <a14:m>
+                  <m:oMath xmlns:m="http://schemas.openxmlformats.org/officeDocument/2006/math">
+                    <m:r>
+                      <a:rPr lang="en-US" altLang="ja-JP" sz="2400" i="1" dirty="0" smtClean="0">
+                        <a:latin typeface="Cambria Math" panose="02040503050406030204" pitchFamily="18" charset="0"/>
+                      </a:rPr>
+                      <m:t>500</m:t>
+                    </m:r>
+                    <m:r>
+                      <a:rPr lang="en-US" altLang="ja-JP" sz="2400" i="1" dirty="0" smtClean="0">
+                        <a:latin typeface="Cambria Math" panose="02040503050406030204" pitchFamily="18" charset="0"/>
+                      </a:rPr>
+                      <m:t>𝑔</m:t>
+                    </m:r>
+                  </m:oMath>
+                </a14:m>
+                <a:r>
+                  <a:rPr lang="en-US" altLang="ja-JP" sz="2400" dirty="0"/>
+                  <a:t>	</a:t>
+                </a:r>
+                <a:r>
+                  <a:rPr lang="ja-JP" altLang="en-US" sz="2400" dirty="0"/>
+                  <a:t>・速度</a:t>
+                </a:r>
+                <a14:m>
+                  <m:oMath xmlns:m="http://schemas.openxmlformats.org/officeDocument/2006/math">
+                    <m:r>
+                      <a:rPr lang="en-US" altLang="ja-JP" sz="2400" i="1" dirty="0" smtClean="0">
+                        <a:latin typeface="Cambria Math" panose="02040503050406030204" pitchFamily="18" charset="0"/>
+                      </a:rPr>
+                      <m:t>30</m:t>
+                    </m:r>
+                    <m:r>
+                      <a:rPr lang="en-US" altLang="ja-JP" sz="2400" i="1" dirty="0" smtClean="0">
+                        <a:latin typeface="Cambria Math" panose="02040503050406030204" pitchFamily="18" charset="0"/>
+                      </a:rPr>
+                      <m:t>𝑚</m:t>
+                    </m:r>
+                    <m:r>
+                      <a:rPr lang="en-US" altLang="ja-JP" sz="2400" i="1" dirty="0" smtClean="0">
+                        <a:latin typeface="Cambria Math" panose="02040503050406030204" pitchFamily="18" charset="0"/>
+                      </a:rPr>
+                      <m:t>/</m:t>
+                    </m:r>
+                    <m:r>
+                      <a:rPr lang="ja-JP" altLang="en-US" sz="2400" i="1" dirty="0" smtClean="0">
+                        <a:latin typeface="Cambria Math" panose="02040503050406030204" pitchFamily="18" charset="0"/>
+                      </a:rPr>
+                      <m:t>秒</m:t>
+                    </m:r>
+                  </m:oMath>
+                </a14:m>
+                <a:endParaRPr lang="en-US" altLang="ja-JP" sz="2400" dirty="0"/>
+              </a:p>
+              <a:p>
+                <a:r>
+                  <a:rPr lang="ja-JP" altLang="en-US" sz="2400" dirty="0"/>
+                  <a:t>■鉛玉</a:t>
+                </a:r>
+                <a:r>
+                  <a:rPr lang="en-US" altLang="ja-JP" sz="2400" dirty="0"/>
+                  <a:t>B</a:t>
+                </a:r>
+              </a:p>
+              <a:p>
+                <a:r>
+                  <a:rPr lang="ja-JP" altLang="en-US" sz="2400" dirty="0"/>
+                  <a:t>・質量：</a:t>
+                </a:r>
+                <a14:m>
+                  <m:oMath xmlns:m="http://schemas.openxmlformats.org/officeDocument/2006/math">
+                    <m:r>
+                      <a:rPr lang="en-US" altLang="ja-JP" sz="2400" i="1" dirty="0" smtClean="0">
+                        <a:latin typeface="Cambria Math" panose="02040503050406030204" pitchFamily="18" charset="0"/>
+                      </a:rPr>
+                      <m:t>800</m:t>
+                    </m:r>
+                    <m:r>
+                      <a:rPr lang="en-US" altLang="ja-JP" sz="2400" i="1" dirty="0" smtClean="0">
+                        <a:latin typeface="Cambria Math" panose="02040503050406030204" pitchFamily="18" charset="0"/>
+                      </a:rPr>
+                      <m:t>𝑔</m:t>
+                    </m:r>
+                  </m:oMath>
+                </a14:m>
+                <a:r>
+                  <a:rPr lang="en-US" altLang="ja-JP" sz="2400" dirty="0"/>
+                  <a:t>	</a:t>
+                </a:r>
+                <a:r>
+                  <a:rPr lang="ja-JP" altLang="en-US" sz="2400" dirty="0"/>
+                  <a:t>・速度</a:t>
+                </a:r>
+                <a14:m>
+                  <m:oMath xmlns:m="http://schemas.openxmlformats.org/officeDocument/2006/math">
+                    <m:r>
+                      <a:rPr lang="en-US" altLang="ja-JP" sz="2400" i="1" dirty="0" smtClean="0">
+                        <a:latin typeface="Cambria Math" panose="02040503050406030204" pitchFamily="18" charset="0"/>
+                      </a:rPr>
+                      <m:t>−40</m:t>
+                    </m:r>
+                    <m:r>
+                      <a:rPr lang="en-US" altLang="ja-JP" sz="2400" i="1" dirty="0" smtClean="0">
+                        <a:latin typeface="Cambria Math" panose="02040503050406030204" pitchFamily="18" charset="0"/>
+                      </a:rPr>
+                      <m:t>𝑚</m:t>
+                    </m:r>
+                    <m:r>
+                      <a:rPr lang="en-US" altLang="ja-JP" sz="2400" i="1" dirty="0" smtClean="0">
+                        <a:latin typeface="Cambria Math" panose="02040503050406030204" pitchFamily="18" charset="0"/>
+                      </a:rPr>
+                      <m:t>/</m:t>
+                    </m:r>
+                    <m:r>
+                      <a:rPr lang="ja-JP" altLang="en-US" sz="2400" i="1" dirty="0" smtClean="0">
+                        <a:latin typeface="Cambria Math" panose="02040503050406030204" pitchFamily="18" charset="0"/>
+                      </a:rPr>
+                      <m:t>秒</m:t>
+                    </m:r>
+                  </m:oMath>
+                </a14:m>
+                <a:endParaRPr lang="en-US" altLang="ja-JP" sz="2400" dirty="0"/>
+              </a:p>
+              <a:p>
+                <a:endParaRPr lang="en-US" altLang="ja-JP" sz="2400" dirty="0"/>
+              </a:p>
+              <a:p>
+                <a:r>
+                  <a:rPr lang="ja-JP" altLang="en-US" sz="2400" b="1" dirty="0">
+                    <a:solidFill>
+                      <a:srgbClr val="FF0000"/>
+                    </a:solidFill>
+                  </a:rPr>
+                  <a:t>■解答</a:t>
+                </a:r>
+                <a:endParaRPr lang="en-US" altLang="ja-JP" sz="2400" b="1" dirty="0">
+                  <a:solidFill>
+                    <a:srgbClr val="FF0000"/>
+                  </a:solidFill>
+                </a:endParaRPr>
+              </a:p>
+              <a:p>
+                <a:r>
+                  <a:rPr lang="ja-JP" altLang="en-US" sz="2400" dirty="0"/>
+                  <a:t>①</a:t>
+                </a:r>
+                <a:r>
+                  <a:rPr lang="en-US" altLang="ja-JP" sz="2400" dirty="0"/>
+                  <a:t>, </a:t>
+                </a:r>
+                <a:r>
+                  <a:rPr lang="ja-JP" altLang="en-US" sz="2400" dirty="0"/>
+                  <a:t>②の連立方程式を解くと、</a:t>
+                </a:r>
+                <a:endParaRPr lang="en-US" altLang="ja-JP" sz="2400" dirty="0"/>
+              </a:p>
+              <a:p>
+                <a14:m>
+                  <m:oMath xmlns:m="http://schemas.openxmlformats.org/officeDocument/2006/math">
+                    <m:r>
+                      <a:rPr lang="ja-JP" altLang="en-US" sz="2400" i="1" dirty="0">
+                        <a:latin typeface="Cambria Math" panose="02040503050406030204" pitchFamily="18" charset="0"/>
+                      </a:rPr>
+                      <m:t>　</m:t>
+                    </m:r>
+                    <m:r>
+                      <a:rPr lang="en-US" altLang="ja-JP" sz="2400" i="1" smtClean="0">
+                        <a:latin typeface="Cambria Math" panose="02040503050406030204" pitchFamily="18" charset="0"/>
+                      </a:rPr>
+                      <m:t>0.5</m:t>
+                    </m:r>
+                    <m:sSub>
+                      <m:sSubPr>
+                        <m:ctrlPr>
+                          <a:rPr lang="en-US" altLang="ja-JP" sz="2400" i="1">
+                            <a:latin typeface="Cambria Math" panose="02040503050406030204" pitchFamily="18" charset="0"/>
+                          </a:rPr>
+                        </m:ctrlPr>
+                      </m:sSubPr>
+                      <m:e>
+                        <m:r>
+                          <a:rPr lang="en-US" altLang="ja-JP" sz="2400" i="1">
+                            <a:latin typeface="Cambria Math" panose="02040503050406030204" pitchFamily="18" charset="0"/>
+                          </a:rPr>
+                          <m:t>𝑣</m:t>
+                        </m:r>
+                      </m:e>
+                      <m:sub>
+                        <m:r>
+                          <a:rPr lang="en-US" altLang="ja-JP" sz="2400" i="1">
+                            <a:latin typeface="Cambria Math" panose="02040503050406030204" pitchFamily="18" charset="0"/>
+                          </a:rPr>
+                          <m:t>1</m:t>
+                        </m:r>
+                        <m:r>
+                          <a:rPr lang="en-US" altLang="ja-JP" sz="2400" i="1">
+                            <a:latin typeface="Cambria Math" panose="02040503050406030204" pitchFamily="18" charset="0"/>
+                          </a:rPr>
+                          <m:t>𝑓</m:t>
+                        </m:r>
+                      </m:sub>
+                    </m:sSub>
+                    <m:r>
+                      <a:rPr lang="en-US" altLang="ja-JP" sz="2400" i="1">
+                        <a:latin typeface="Cambria Math" panose="02040503050406030204" pitchFamily="18" charset="0"/>
+                      </a:rPr>
+                      <m:t>+0.8</m:t>
+                    </m:r>
+                    <m:sSub>
+                      <m:sSubPr>
+                        <m:ctrlPr>
+                          <a:rPr lang="en-US" altLang="ja-JP" sz="2400" i="1">
+                            <a:latin typeface="Cambria Math" panose="02040503050406030204" pitchFamily="18" charset="0"/>
+                          </a:rPr>
+                        </m:ctrlPr>
+                      </m:sSubPr>
+                      <m:e>
+                        <m:r>
+                          <a:rPr lang="en-US" altLang="ja-JP" sz="2400" i="1">
+                            <a:latin typeface="Cambria Math" panose="02040503050406030204" pitchFamily="18" charset="0"/>
+                          </a:rPr>
+                          <m:t>𝑣</m:t>
+                        </m:r>
+                      </m:e>
+                      <m:sub>
+                        <m:r>
+                          <a:rPr lang="en-US" altLang="ja-JP" sz="2400" i="1">
+                            <a:latin typeface="Cambria Math" panose="02040503050406030204" pitchFamily="18" charset="0"/>
+                          </a:rPr>
+                          <m:t>2</m:t>
+                        </m:r>
+                        <m:r>
+                          <a:rPr lang="en-US" altLang="ja-JP" sz="2400" i="1">
+                            <a:latin typeface="Cambria Math" panose="02040503050406030204" pitchFamily="18" charset="0"/>
+                          </a:rPr>
+                          <m:t>𝑓</m:t>
+                        </m:r>
+                      </m:sub>
+                    </m:sSub>
+                    <m:r>
+                      <a:rPr lang="en-US" altLang="ja-JP" sz="2400" b="0" i="1" smtClean="0">
+                        <a:solidFill>
+                          <a:schemeClr val="tx1"/>
+                        </a:solidFill>
+                        <a:latin typeface="Cambria Math" panose="02040503050406030204" pitchFamily="18" charset="0"/>
+                      </a:rPr>
+                      <m:t>=</m:t>
+                    </m:r>
+                    <m:r>
+                      <a:rPr lang="en-US" altLang="ja-JP" sz="2400" i="1">
+                        <a:latin typeface="Cambria Math" panose="02040503050406030204" pitchFamily="18" charset="0"/>
+                      </a:rPr>
+                      <m:t>−17</m:t>
+                    </m:r>
+                  </m:oMath>
+                </a14:m>
+                <a:r>
+                  <a:rPr lang="en-US" altLang="ja-JP" sz="2400" dirty="0"/>
+                  <a:t> </a:t>
+                </a:r>
+              </a:p>
+              <a:p>
+                <a14:m>
+                  <m:oMath xmlns:m="http://schemas.openxmlformats.org/officeDocument/2006/math">
+                    <m:r>
+                      <a:rPr lang="en-US" altLang="ja-JP" sz="2400" b="0" i="1" smtClean="0">
+                        <a:latin typeface="Cambria Math" panose="02040503050406030204" pitchFamily="18" charset="0"/>
+                      </a:rPr>
+                      <m:t>−)0.5</m:t>
+                    </m:r>
+                    <m:sSub>
+                      <m:sSubPr>
+                        <m:ctrlPr>
+                          <a:rPr lang="en-US" altLang="ja-JP" sz="2400" i="1" smtClean="0">
+                            <a:latin typeface="Cambria Math" panose="02040503050406030204" pitchFamily="18" charset="0"/>
+                          </a:rPr>
+                        </m:ctrlPr>
+                      </m:sSubPr>
+                      <m:e>
+                        <m:r>
+                          <a:rPr lang="en-US" altLang="ja-JP" sz="2400" i="1">
+                            <a:latin typeface="Cambria Math" panose="02040503050406030204" pitchFamily="18" charset="0"/>
+                          </a:rPr>
+                          <m:t>𝑣</m:t>
+                        </m:r>
+                      </m:e>
+                      <m:sub>
+                        <m:r>
+                          <a:rPr lang="en-US" altLang="ja-JP" sz="2400" i="1">
+                            <a:latin typeface="Cambria Math" panose="02040503050406030204" pitchFamily="18" charset="0"/>
+                          </a:rPr>
+                          <m:t>1</m:t>
+                        </m:r>
+                        <m:r>
+                          <a:rPr lang="en-US" altLang="ja-JP" sz="2400" i="1">
+                            <a:latin typeface="Cambria Math" panose="02040503050406030204" pitchFamily="18" charset="0"/>
+                          </a:rPr>
+                          <m:t>𝑓</m:t>
+                        </m:r>
+                      </m:sub>
+                    </m:sSub>
+                    <m:r>
+                      <a:rPr lang="en-US" altLang="ja-JP" sz="2400" i="1">
+                        <a:latin typeface="Cambria Math" panose="02040503050406030204" pitchFamily="18" charset="0"/>
+                      </a:rPr>
+                      <m:t>−</m:t>
+                    </m:r>
+                    <m:r>
+                      <a:rPr lang="en-US" altLang="ja-JP" sz="2400" b="0" i="1" smtClean="0">
+                        <a:latin typeface="Cambria Math" panose="02040503050406030204" pitchFamily="18" charset="0"/>
+                      </a:rPr>
+                      <m:t>0.5</m:t>
+                    </m:r>
+                    <m:sSub>
+                      <m:sSubPr>
+                        <m:ctrlPr>
+                          <a:rPr lang="en-US" altLang="ja-JP" sz="2400" i="1">
+                            <a:latin typeface="Cambria Math" panose="02040503050406030204" pitchFamily="18" charset="0"/>
+                          </a:rPr>
+                        </m:ctrlPr>
+                      </m:sSubPr>
+                      <m:e>
+                        <m:r>
+                          <a:rPr lang="en-US" altLang="ja-JP" sz="2400" i="1">
+                            <a:latin typeface="Cambria Math" panose="02040503050406030204" pitchFamily="18" charset="0"/>
+                          </a:rPr>
+                          <m:t>𝑣</m:t>
+                        </m:r>
+                      </m:e>
+                      <m:sub>
+                        <m:r>
+                          <a:rPr lang="en-US" altLang="ja-JP" sz="2400" i="1">
+                            <a:latin typeface="Cambria Math" panose="02040503050406030204" pitchFamily="18" charset="0"/>
+                          </a:rPr>
+                          <m:t>2</m:t>
+                        </m:r>
+                        <m:r>
+                          <a:rPr lang="en-US" altLang="ja-JP" sz="2400" i="1">
+                            <a:latin typeface="Cambria Math" panose="02040503050406030204" pitchFamily="18" charset="0"/>
+                          </a:rPr>
+                          <m:t>𝑓</m:t>
+                        </m:r>
+                      </m:sub>
+                    </m:sSub>
+                    <m:r>
+                      <a:rPr lang="en-US" altLang="ja-JP" sz="2400" i="1">
+                        <a:latin typeface="Cambria Math" panose="02040503050406030204" pitchFamily="18" charset="0"/>
+                      </a:rPr>
+                      <m:t> </m:t>
+                    </m:r>
+                    <m:r>
+                      <a:rPr lang="en-US" altLang="ja-JP" sz="2400" b="0" i="1" smtClean="0">
+                        <a:latin typeface="Cambria Math" panose="02040503050406030204" pitchFamily="18" charset="0"/>
+                      </a:rPr>
+                      <m:t>=−</m:t>
+                    </m:r>
+                    <m:r>
+                      <a:rPr lang="en-US" altLang="ja-JP" sz="2400" b="0" i="1" smtClean="0">
+                        <a:latin typeface="Cambria Math" panose="02040503050406030204" pitchFamily="18" charset="0"/>
+                      </a:rPr>
+                      <m:t>7</m:t>
+                    </m:r>
+                  </m:oMath>
+                </a14:m>
+                <a:r>
+                  <a:rPr lang="en-US" altLang="ja-JP" sz="2400" dirty="0"/>
+                  <a:t> </a:t>
+                </a:r>
+              </a:p>
+              <a:p>
+                <a:r>
+                  <a:rPr lang="en-US" altLang="ja-JP" sz="2400" b="0" dirty="0"/>
+                  <a:t>                  </a:t>
+                </a:r>
+                <a14:m>
+                  <m:oMath xmlns:m="http://schemas.openxmlformats.org/officeDocument/2006/math">
+                    <m:r>
+                      <a:rPr lang="en-US" altLang="ja-JP" sz="2400" b="0" i="1" smtClean="0">
+                        <a:latin typeface="Cambria Math" panose="02040503050406030204" pitchFamily="18" charset="0"/>
+                      </a:rPr>
+                      <m:t>1.3</m:t>
+                    </m:r>
+                    <m:sSub>
+                      <m:sSubPr>
+                        <m:ctrlPr>
+                          <a:rPr lang="en-US" altLang="ja-JP" sz="2400" i="1">
+                            <a:latin typeface="Cambria Math" panose="02040503050406030204" pitchFamily="18" charset="0"/>
+                          </a:rPr>
+                        </m:ctrlPr>
+                      </m:sSubPr>
+                      <m:e>
+                        <m:r>
+                          <a:rPr lang="en-US" altLang="ja-JP" sz="2400" i="1">
+                            <a:latin typeface="Cambria Math" panose="02040503050406030204" pitchFamily="18" charset="0"/>
+                          </a:rPr>
+                          <m:t>𝑣</m:t>
+                        </m:r>
+                      </m:e>
+                      <m:sub>
+                        <m:r>
+                          <a:rPr lang="en-US" altLang="ja-JP" sz="2400" i="1">
+                            <a:latin typeface="Cambria Math" panose="02040503050406030204" pitchFamily="18" charset="0"/>
+                          </a:rPr>
+                          <m:t>2</m:t>
+                        </m:r>
+                        <m:r>
+                          <a:rPr lang="en-US" altLang="ja-JP" sz="2400" i="1">
+                            <a:latin typeface="Cambria Math" panose="02040503050406030204" pitchFamily="18" charset="0"/>
+                          </a:rPr>
+                          <m:t>𝑓</m:t>
+                        </m:r>
+                      </m:sub>
+                    </m:sSub>
+                    <m:r>
+                      <a:rPr lang="en-US" altLang="ja-JP" sz="2400" b="0" i="1" smtClean="0">
+                        <a:solidFill>
+                          <a:schemeClr val="tx1"/>
+                        </a:solidFill>
+                        <a:latin typeface="Cambria Math" panose="02040503050406030204" pitchFamily="18" charset="0"/>
+                      </a:rPr>
+                      <m:t>=</m:t>
+                    </m:r>
+                    <m:r>
+                      <a:rPr lang="en-US" altLang="ja-JP" sz="2400" i="1">
+                        <a:latin typeface="Cambria Math" panose="02040503050406030204" pitchFamily="18" charset="0"/>
+                      </a:rPr>
+                      <m:t>−</m:t>
+                    </m:r>
+                    <m:r>
+                      <a:rPr lang="en-US" altLang="ja-JP" sz="2400" b="0" i="1" smtClean="0">
+                        <a:latin typeface="Cambria Math" panose="02040503050406030204" pitchFamily="18" charset="0"/>
+                      </a:rPr>
+                      <m:t>10</m:t>
+                    </m:r>
+                  </m:oMath>
+                </a14:m>
+                <a:endParaRPr lang="en-US" altLang="ja-JP" sz="2400" b="0" dirty="0"/>
+              </a:p>
+              <a:p>
+                <a:r>
+                  <a:rPr lang="en-US" altLang="ja-JP" sz="2400" dirty="0"/>
+                  <a:t>		 </a:t>
+                </a:r>
+                <a14:m>
+                  <m:oMath xmlns:m="http://schemas.openxmlformats.org/officeDocument/2006/math">
+                    <m:sSub>
+                      <m:sSubPr>
+                        <m:ctrlPr>
+                          <a:rPr lang="en-US" altLang="ja-JP" sz="2400" i="1">
+                            <a:latin typeface="Cambria Math" panose="02040503050406030204" pitchFamily="18" charset="0"/>
+                          </a:rPr>
+                        </m:ctrlPr>
+                      </m:sSubPr>
+                      <m:e>
+                        <m:r>
+                          <a:rPr lang="en-US" altLang="ja-JP" sz="2400" i="1">
+                            <a:latin typeface="Cambria Math" panose="02040503050406030204" pitchFamily="18" charset="0"/>
+                          </a:rPr>
+                          <m:t>𝑣</m:t>
+                        </m:r>
+                      </m:e>
+                      <m:sub>
+                        <m:r>
+                          <a:rPr lang="en-US" altLang="ja-JP" sz="2400" i="1">
+                            <a:latin typeface="Cambria Math" panose="02040503050406030204" pitchFamily="18" charset="0"/>
+                          </a:rPr>
+                          <m:t>2</m:t>
+                        </m:r>
+                        <m:r>
+                          <a:rPr lang="en-US" altLang="ja-JP" sz="2400" i="1">
+                            <a:latin typeface="Cambria Math" panose="02040503050406030204" pitchFamily="18" charset="0"/>
+                          </a:rPr>
+                          <m:t>𝑓</m:t>
+                        </m:r>
+                      </m:sub>
+                    </m:sSub>
+                    <m:r>
+                      <a:rPr lang="en-US" altLang="ja-JP" sz="2400" b="0" i="1" smtClean="0">
+                        <a:latin typeface="Cambria Math" panose="02040503050406030204" pitchFamily="18" charset="0"/>
+                      </a:rPr>
+                      <m:t>=−7.7</m:t>
+                    </m:r>
+                  </m:oMath>
+                </a14:m>
+                <a:r>
+                  <a:rPr lang="en-US" altLang="ja-JP" sz="2400" dirty="0"/>
+                  <a:t> </a:t>
+                </a:r>
+                <a:r>
+                  <a:rPr lang="ja-JP" altLang="en-US" sz="2400" dirty="0"/>
+                  <a:t>・・・鉛玉</a:t>
+                </a:r>
+                <a:r>
+                  <a:rPr lang="en-US" altLang="ja-JP" sz="2400" dirty="0"/>
+                  <a:t>B</a:t>
+                </a:r>
+                <a:r>
+                  <a:rPr lang="ja-JP" altLang="en-US" sz="2400" dirty="0"/>
+                  <a:t>の衝突後の速度</a:t>
+                </a:r>
+                <a:endParaRPr lang="en-US" altLang="ja-JP" sz="2400" dirty="0"/>
+              </a:p>
+            </p:txBody>
+          </p:sp>
+        </mc:Choice>
+        <mc:Fallback>
+          <p:sp>
+            <p:nvSpPr>
+              <p:cNvPr id="6" name="テキスト ボックス 5">
+                <a:extLst>
+                  <a:ext uri="{FF2B5EF4-FFF2-40B4-BE49-F238E27FC236}">
+                    <a16:creationId xmlns:a16="http://schemas.microsoft.com/office/drawing/2014/main" id="{55830AD6-028B-4C4E-80BF-B70DFC1C3A46}"/>
+                  </a:ext>
+                </a:extLst>
+              </p:cNvPr>
+              <p:cNvSpPr txBox="1">
+                <a:spLocks noRot="1" noChangeAspect="1" noMove="1" noResize="1" noEditPoints="1" noAdjustHandles="1" noChangeArrowheads="1" noChangeShapeType="1" noTextEdit="1"/>
+              </p:cNvSpPr>
+              <p:nvPr/>
+            </p:nvSpPr>
+            <p:spPr>
+              <a:xfrm>
+                <a:off x="567542" y="1216429"/>
+                <a:ext cx="9417963" cy="5017720"/>
+              </a:xfrm>
+              <a:prstGeom prst="rect">
+                <a:avLst/>
+              </a:prstGeom>
+              <a:blipFill>
+                <a:blip r:embed="rId2"/>
+                <a:stretch>
+                  <a:fillRect l="-971" t="-972" r="-65" b="-2066"/>
+                </a:stretch>
+              </a:blipFill>
+            </p:spPr>
+            <p:txBody>
+              <a:bodyPr/>
+              <a:lstStyle/>
+              <a:p>
+                <a:r>
+                  <a:rPr lang="ja-JP" altLang="en-US">
+                    <a:noFill/>
+                  </a:rPr>
+                  <a:t> </a:t>
+                </a:r>
+              </a:p>
+            </p:txBody>
+          </p:sp>
+        </mc:Fallback>
+      </mc:AlternateContent>
+    </p:spTree>
+    <p:extLst>
+      <p:ext uri="{BB962C8B-B14F-4D97-AF65-F5344CB8AC3E}">
+        <p14:creationId xmlns:p14="http://schemas.microsoft.com/office/powerpoint/2010/main" val="1267575242"/>
+      </p:ext>
+    </p:extLst>
+  </p:cSld>
+  <p:clrMapOvr>
+    <a:masterClrMapping/>
+  </p:clrMapOvr>
+</p:sld>
+</file>
+
+<file path=ppt/slides/slide13.xml><?xml version="1.0" encoding="utf-8"?>
+<p:sld xmlns:a="http://schemas.openxmlformats.org/drawingml/2006/main" xmlns:r="http://schemas.openxmlformats.org/officeDocument/2006/relationships" xmlns:p="http://schemas.openxmlformats.org/presentationml/2006/main">
+  <p:cSld>
+    <p:spTree>
+      <p:nvGrpSpPr>
+        <p:cNvPr id="1" name=""/>
+        <p:cNvGrpSpPr/>
+        <p:nvPr/>
+      </p:nvGrpSpPr>
+      <p:grpSpPr>
+        <a:xfrm>
+          <a:off x="0" y="0"/>
+          <a:ext cx="0" cy="0"/>
+          <a:chOff x="0" y="0"/>
+          <a:chExt cx="0" cy="0"/>
+        </a:xfrm>
+      </p:grpSpPr>
+      <p:sp>
+        <p:nvSpPr>
+          <p:cNvPr id="4" name="テキスト ボックス 3">
+            <a:extLst>
+              <a:ext uri="{FF2B5EF4-FFF2-40B4-BE49-F238E27FC236}">
+                <a16:creationId xmlns:a16="http://schemas.microsoft.com/office/drawing/2014/main" id="{5A13BF46-B8C5-48AA-8308-C9ECFF431A18}"/>
+              </a:ext>
+            </a:extLst>
+          </p:cNvPr>
+          <p:cNvSpPr txBox="1"/>
+          <p:nvPr/>
+        </p:nvSpPr>
+        <p:spPr>
+          <a:xfrm>
+            <a:off x="567542" y="491954"/>
+            <a:ext cx="1943161" cy="584775"/>
+          </a:xfrm>
+          <a:prstGeom prst="rect">
+            <a:avLst/>
+          </a:prstGeom>
+          <a:noFill/>
+        </p:spPr>
+        <p:txBody>
+          <a:bodyPr wrap="none" rtlCol="0">
+            <a:spAutoFit/>
+          </a:bodyPr>
+          <a:lstStyle/>
+          <a:p>
+            <a:r>
+              <a:rPr lang="ja-JP" altLang="en-US" sz="3200" b="1" u="sng" dirty="0"/>
+              <a:t>衝突 例題</a:t>
+            </a:r>
+            <a:endParaRPr kumimoji="1" lang="en-US" altLang="ja-JP" sz="3200" b="1" u="sng" dirty="0"/>
+          </a:p>
+        </p:txBody>
+      </p:sp>
+      <mc:AlternateContent xmlns:mc="http://schemas.openxmlformats.org/markup-compatibility/2006">
+        <mc:Choice xmlns:a14="http://schemas.microsoft.com/office/drawing/2010/main" Requires="a14">
+          <p:sp>
+            <p:nvSpPr>
+              <p:cNvPr id="6" name="テキスト ボックス 5">
+                <a:extLst>
+                  <a:ext uri="{FF2B5EF4-FFF2-40B4-BE49-F238E27FC236}">
+                    <a16:creationId xmlns:a16="http://schemas.microsoft.com/office/drawing/2014/main" id="{55830AD6-028B-4C4E-80BF-B70DFC1C3A46}"/>
+                  </a:ext>
+                </a:extLst>
+              </p:cNvPr>
+              <p:cNvSpPr txBox="1"/>
+              <p:nvPr/>
+            </p:nvSpPr>
+            <p:spPr>
+              <a:xfrm>
+                <a:off x="567542" y="1216429"/>
+                <a:ext cx="9417963" cy="4583562"/>
+              </a:xfrm>
+              <a:prstGeom prst="rect">
+                <a:avLst/>
+              </a:prstGeom>
+              <a:noFill/>
+            </p:spPr>
+            <p:txBody>
+              <a:bodyPr wrap="none" rtlCol="0">
+                <a:spAutoFit/>
+              </a:bodyPr>
+              <a:lstStyle/>
+              <a:p>
+                <a:r>
+                  <a:rPr lang="ja-JP" altLang="en-US" sz="2400" dirty="0"/>
+                  <a:t>以下の２つの鉛玉が衝突した後の、それぞれの速度を求めなさい。</a:t>
+                </a:r>
+                <a:endParaRPr lang="en-US" altLang="ja-JP" sz="2400" dirty="0"/>
+              </a:p>
+              <a:p>
+                <a:r>
+                  <a:rPr lang="ja-JP" altLang="en-US" sz="2400" dirty="0"/>
+                  <a:t>ただし、鉛同士のはねかえり係数は</a:t>
+                </a:r>
+                <a:r>
+                  <a:rPr lang="en-US" altLang="ja-JP" sz="2400" dirty="0"/>
+                  <a:t>0.2</a:t>
+                </a:r>
+                <a:r>
+                  <a:rPr lang="ja-JP" altLang="en-US" sz="2400" dirty="0"/>
+                  <a:t>とする</a:t>
+                </a:r>
+                <a:endParaRPr lang="en-US" altLang="ja-JP" sz="2400" dirty="0"/>
+              </a:p>
+              <a:p>
+                <a:r>
+                  <a:rPr lang="ja-JP" altLang="en-US" sz="2400" dirty="0"/>
+                  <a:t>■鉛玉</a:t>
+                </a:r>
+                <a:r>
+                  <a:rPr lang="en-US" altLang="ja-JP" sz="2400" dirty="0"/>
+                  <a:t>A</a:t>
+                </a:r>
+              </a:p>
+              <a:p>
+                <a:r>
+                  <a:rPr lang="ja-JP" altLang="en-US" sz="2400" dirty="0"/>
+                  <a:t>・質量：</a:t>
+                </a:r>
+                <a14:m>
+                  <m:oMath xmlns:m="http://schemas.openxmlformats.org/officeDocument/2006/math">
+                    <m:r>
+                      <a:rPr lang="en-US" altLang="ja-JP" sz="2400" i="1" dirty="0" smtClean="0">
+                        <a:latin typeface="Cambria Math" panose="02040503050406030204" pitchFamily="18" charset="0"/>
+                      </a:rPr>
+                      <m:t>500</m:t>
+                    </m:r>
+                    <m:r>
+                      <a:rPr lang="en-US" altLang="ja-JP" sz="2400" i="1" dirty="0" smtClean="0">
+                        <a:latin typeface="Cambria Math" panose="02040503050406030204" pitchFamily="18" charset="0"/>
+                      </a:rPr>
+                      <m:t>𝑔</m:t>
+                    </m:r>
+                  </m:oMath>
+                </a14:m>
+                <a:r>
+                  <a:rPr lang="en-US" altLang="ja-JP" sz="2400" dirty="0"/>
+                  <a:t>	</a:t>
+                </a:r>
+                <a:r>
+                  <a:rPr lang="ja-JP" altLang="en-US" sz="2400" dirty="0"/>
+                  <a:t>・速度</a:t>
+                </a:r>
+                <a14:m>
+                  <m:oMath xmlns:m="http://schemas.openxmlformats.org/officeDocument/2006/math">
+                    <m:r>
+                      <a:rPr lang="en-US" altLang="ja-JP" sz="2400" i="1" dirty="0" smtClean="0">
+                        <a:latin typeface="Cambria Math" panose="02040503050406030204" pitchFamily="18" charset="0"/>
+                      </a:rPr>
+                      <m:t>30</m:t>
+                    </m:r>
+                    <m:r>
+                      <a:rPr lang="en-US" altLang="ja-JP" sz="2400" i="1" dirty="0" smtClean="0">
+                        <a:latin typeface="Cambria Math" panose="02040503050406030204" pitchFamily="18" charset="0"/>
+                      </a:rPr>
+                      <m:t>𝑚</m:t>
+                    </m:r>
+                    <m:r>
+                      <a:rPr lang="en-US" altLang="ja-JP" sz="2400" i="1" dirty="0" smtClean="0">
+                        <a:latin typeface="Cambria Math" panose="02040503050406030204" pitchFamily="18" charset="0"/>
+                      </a:rPr>
+                      <m:t>/</m:t>
+                    </m:r>
+                    <m:r>
+                      <a:rPr lang="ja-JP" altLang="en-US" sz="2400" i="1" dirty="0" smtClean="0">
+                        <a:latin typeface="Cambria Math" panose="02040503050406030204" pitchFamily="18" charset="0"/>
+                      </a:rPr>
+                      <m:t>秒</m:t>
+                    </m:r>
+                  </m:oMath>
+                </a14:m>
+                <a:endParaRPr lang="en-US" altLang="ja-JP" sz="2400" dirty="0"/>
+              </a:p>
+              <a:p>
+                <a:r>
+                  <a:rPr lang="ja-JP" altLang="en-US" sz="2400" dirty="0"/>
+                  <a:t>■鉛玉</a:t>
+                </a:r>
+                <a:r>
+                  <a:rPr lang="en-US" altLang="ja-JP" sz="2400" dirty="0"/>
+                  <a:t>B</a:t>
+                </a:r>
+              </a:p>
+              <a:p>
+                <a:r>
+                  <a:rPr lang="ja-JP" altLang="en-US" sz="2400" dirty="0"/>
+                  <a:t>・質量：</a:t>
+                </a:r>
+                <a14:m>
+                  <m:oMath xmlns:m="http://schemas.openxmlformats.org/officeDocument/2006/math">
+                    <m:r>
+                      <a:rPr lang="en-US" altLang="ja-JP" sz="2400" i="1" dirty="0" smtClean="0">
+                        <a:latin typeface="Cambria Math" panose="02040503050406030204" pitchFamily="18" charset="0"/>
+                      </a:rPr>
+                      <m:t>800</m:t>
+                    </m:r>
+                    <m:r>
+                      <a:rPr lang="en-US" altLang="ja-JP" sz="2400" i="1" dirty="0" smtClean="0">
+                        <a:latin typeface="Cambria Math" panose="02040503050406030204" pitchFamily="18" charset="0"/>
+                      </a:rPr>
+                      <m:t>𝑔</m:t>
+                    </m:r>
+                  </m:oMath>
+                </a14:m>
+                <a:r>
+                  <a:rPr lang="en-US" altLang="ja-JP" sz="2400" dirty="0"/>
+                  <a:t>	</a:t>
+                </a:r>
+                <a:r>
+                  <a:rPr lang="ja-JP" altLang="en-US" sz="2400" dirty="0"/>
+                  <a:t>・速度</a:t>
+                </a:r>
+                <a14:m>
+                  <m:oMath xmlns:m="http://schemas.openxmlformats.org/officeDocument/2006/math">
+                    <m:r>
+                      <a:rPr lang="en-US" altLang="ja-JP" sz="2400" i="1" dirty="0" smtClean="0">
+                        <a:latin typeface="Cambria Math" panose="02040503050406030204" pitchFamily="18" charset="0"/>
+                      </a:rPr>
+                      <m:t>−40</m:t>
+                    </m:r>
+                    <m:r>
+                      <a:rPr lang="en-US" altLang="ja-JP" sz="2400" i="1" dirty="0" smtClean="0">
+                        <a:latin typeface="Cambria Math" panose="02040503050406030204" pitchFamily="18" charset="0"/>
+                      </a:rPr>
+                      <m:t>𝑚</m:t>
+                    </m:r>
+                    <m:r>
+                      <a:rPr lang="en-US" altLang="ja-JP" sz="2400" i="1" dirty="0" smtClean="0">
+                        <a:latin typeface="Cambria Math" panose="02040503050406030204" pitchFamily="18" charset="0"/>
+                      </a:rPr>
+                      <m:t>/</m:t>
+                    </m:r>
+                    <m:r>
+                      <a:rPr lang="ja-JP" altLang="en-US" sz="2400" i="1" dirty="0" smtClean="0">
+                        <a:latin typeface="Cambria Math" panose="02040503050406030204" pitchFamily="18" charset="0"/>
+                      </a:rPr>
+                      <m:t>秒</m:t>
+                    </m:r>
+                  </m:oMath>
+                </a14:m>
+                <a:endParaRPr lang="en-US" altLang="ja-JP" sz="2400" dirty="0"/>
+              </a:p>
+              <a:p>
+                <a:endParaRPr lang="en-US" altLang="ja-JP" sz="2400" dirty="0"/>
+              </a:p>
+              <a:p>
+                <a:r>
+                  <a:rPr lang="ja-JP" altLang="en-US" sz="2400" b="1" dirty="0">
+                    <a:solidFill>
+                      <a:srgbClr val="FF0000"/>
+                    </a:solidFill>
+                  </a:rPr>
+                  <a:t>■解答</a:t>
+                </a:r>
+                <a:endParaRPr lang="en-US" altLang="ja-JP" sz="2400" b="1" dirty="0">
+                  <a:solidFill>
+                    <a:srgbClr val="FF0000"/>
+                  </a:solidFill>
+                </a:endParaRPr>
+              </a:p>
+              <a:p>
+                <a14:m>
+                  <m:oMath xmlns:m="http://schemas.openxmlformats.org/officeDocument/2006/math">
+                    <m:sSub>
+                      <m:sSubPr>
+                        <m:ctrlPr>
+                          <a:rPr lang="en-US" altLang="ja-JP" sz="2400" i="1" smtClean="0">
+                            <a:latin typeface="Cambria Math" panose="02040503050406030204" pitchFamily="18" charset="0"/>
+                          </a:rPr>
+                        </m:ctrlPr>
+                      </m:sSubPr>
+                      <m:e>
+                        <m:r>
+                          <a:rPr lang="en-US" altLang="ja-JP" sz="2400" i="1">
+                            <a:latin typeface="Cambria Math" panose="02040503050406030204" pitchFamily="18" charset="0"/>
+                          </a:rPr>
+                          <m:t>𝑣</m:t>
+                        </m:r>
+                      </m:e>
+                      <m:sub>
+                        <m:r>
+                          <a:rPr lang="en-US" altLang="ja-JP" sz="2400" i="1">
+                            <a:latin typeface="Cambria Math" panose="02040503050406030204" pitchFamily="18" charset="0"/>
+                          </a:rPr>
+                          <m:t>1</m:t>
+                        </m:r>
+                        <m:r>
+                          <a:rPr lang="en-US" altLang="ja-JP" sz="2400" i="1">
+                            <a:latin typeface="Cambria Math" panose="02040503050406030204" pitchFamily="18" charset="0"/>
+                          </a:rPr>
+                          <m:t>𝑓</m:t>
+                        </m:r>
+                      </m:sub>
+                    </m:sSub>
+                    <m:r>
+                      <a:rPr lang="en-US" altLang="ja-JP" sz="2400" i="1">
+                        <a:latin typeface="Cambria Math" panose="02040503050406030204" pitchFamily="18" charset="0"/>
+                      </a:rPr>
+                      <m:t>−</m:t>
+                    </m:r>
+                    <m:r>
+                      <a:rPr lang="en-US" altLang="ja-JP" sz="2400" b="0" i="1" smtClean="0">
+                        <a:latin typeface="Cambria Math" panose="02040503050406030204" pitchFamily="18" charset="0"/>
+                      </a:rPr>
+                      <m:t>(−7.7)</m:t>
+                    </m:r>
+                    <m:r>
+                      <a:rPr lang="en-US" altLang="ja-JP" sz="2400" i="1">
+                        <a:latin typeface="Cambria Math" panose="02040503050406030204" pitchFamily="18" charset="0"/>
+                      </a:rPr>
+                      <m:t> </m:t>
+                    </m:r>
+                    <m:r>
+                      <a:rPr lang="en-US" altLang="ja-JP" sz="2400" b="0" i="1" smtClean="0">
+                        <a:latin typeface="Cambria Math" panose="02040503050406030204" pitchFamily="18" charset="0"/>
+                      </a:rPr>
+                      <m:t>=−14</m:t>
+                    </m:r>
+                  </m:oMath>
+                </a14:m>
+                <a:r>
+                  <a:rPr lang="en-US" altLang="ja-JP" sz="2400" b="1" dirty="0">
+                    <a:solidFill>
+                      <a:srgbClr val="FF0000"/>
+                    </a:solidFill>
+                  </a:rPr>
+                  <a:t> </a:t>
+                </a:r>
+              </a:p>
+              <a:p>
+                <a14:m>
+                  <m:oMath xmlns:m="http://schemas.openxmlformats.org/officeDocument/2006/math">
+                    <m:sSub>
+                      <m:sSubPr>
+                        <m:ctrlPr>
+                          <a:rPr lang="en-US" altLang="ja-JP" sz="2400" i="1" smtClean="0">
+                            <a:latin typeface="Cambria Math" panose="02040503050406030204" pitchFamily="18" charset="0"/>
+                          </a:rPr>
+                        </m:ctrlPr>
+                      </m:sSubPr>
+                      <m:e>
+                        <m:r>
+                          <a:rPr lang="en-US" altLang="ja-JP" sz="2400" i="1">
+                            <a:latin typeface="Cambria Math" panose="02040503050406030204" pitchFamily="18" charset="0"/>
+                          </a:rPr>
+                          <m:t>𝑣</m:t>
+                        </m:r>
+                      </m:e>
+                      <m:sub>
+                        <m:r>
+                          <a:rPr lang="en-US" altLang="ja-JP" sz="2400" i="1">
+                            <a:latin typeface="Cambria Math" panose="02040503050406030204" pitchFamily="18" charset="0"/>
+                          </a:rPr>
+                          <m:t>1</m:t>
+                        </m:r>
+                        <m:r>
+                          <a:rPr lang="en-US" altLang="ja-JP" sz="2400" i="1">
+                            <a:latin typeface="Cambria Math" panose="02040503050406030204" pitchFamily="18" charset="0"/>
+                          </a:rPr>
+                          <m:t>𝑓</m:t>
+                        </m:r>
+                      </m:sub>
+                    </m:sSub>
+                    <m:r>
+                      <a:rPr lang="en-US" altLang="ja-JP" sz="2400" b="0" i="1" smtClean="0">
+                        <a:latin typeface="Cambria Math" panose="02040503050406030204" pitchFamily="18" charset="0"/>
+                      </a:rPr>
+                      <m:t>=−</m:t>
+                    </m:r>
+                    <m:r>
+                      <a:rPr lang="en-US" altLang="ja-JP" sz="2400" b="0" i="1" smtClean="0">
+                        <a:latin typeface="Cambria Math" panose="02040503050406030204" pitchFamily="18" charset="0"/>
+                      </a:rPr>
+                      <m:t>21.7</m:t>
+                    </m:r>
+                  </m:oMath>
+                </a14:m>
+                <a:r>
+                  <a:rPr lang="en-US" altLang="ja-JP" sz="2400" b="1" dirty="0">
+                    <a:solidFill>
+                      <a:srgbClr val="FF0000"/>
+                    </a:solidFill>
+                  </a:rPr>
+                  <a:t> 	</a:t>
+                </a:r>
+                <a:r>
+                  <a:rPr lang="ja-JP" altLang="en-US" sz="2400" dirty="0"/>
+                  <a:t>・・・鉛玉</a:t>
+                </a:r>
+                <a:r>
+                  <a:rPr lang="en-US" altLang="ja-JP" sz="2400" dirty="0"/>
+                  <a:t>A</a:t>
+                </a:r>
+                <a:r>
+                  <a:rPr lang="ja-JP" altLang="en-US" sz="2400" dirty="0"/>
+                  <a:t>の衝突後の速度</a:t>
+                </a:r>
+                <a:endParaRPr lang="en-US" altLang="ja-JP" sz="2400" dirty="0"/>
+              </a:p>
+              <a:p>
+                <a:endParaRPr lang="en-US" altLang="ja-JP" sz="2400" b="1" dirty="0">
+                  <a:solidFill>
+                    <a:srgbClr val="FF0000"/>
+                  </a:solidFill>
+                </a:endParaRPr>
+              </a:p>
+              <a:p>
+                <a:r>
+                  <a:rPr lang="ja-JP" altLang="en-US" sz="2400" b="1" dirty="0">
+                    <a:solidFill>
+                      <a:srgbClr val="FF0000"/>
+                    </a:solidFill>
+                  </a:rPr>
+                  <a:t>鉛玉</a:t>
+                </a:r>
+                <a:r>
+                  <a:rPr lang="en-US" altLang="ja-JP" sz="2400" b="1" dirty="0">
+                    <a:solidFill>
+                      <a:srgbClr val="FF0000"/>
+                    </a:solidFill>
+                  </a:rPr>
+                  <a:t>A</a:t>
+                </a:r>
+                <a:r>
+                  <a:rPr lang="ja-JP" altLang="en-US" sz="2400" b="1" dirty="0">
+                    <a:solidFill>
+                      <a:srgbClr val="FF0000"/>
+                    </a:solidFill>
+                  </a:rPr>
+                  <a:t>の速度は</a:t>
+                </a:r>
+                <a14:m>
+                  <m:oMath xmlns:m="http://schemas.openxmlformats.org/officeDocument/2006/math">
+                    <m:r>
+                      <a:rPr lang="en-US" altLang="ja-JP" sz="2400" b="1" i="1" smtClean="0">
+                        <a:solidFill>
+                          <a:srgbClr val="FF0000"/>
+                        </a:solidFill>
+                        <a:latin typeface="Cambria Math" panose="02040503050406030204" pitchFamily="18" charset="0"/>
+                      </a:rPr>
+                      <m:t>−</m:t>
+                    </m:r>
+                    <m:r>
+                      <a:rPr lang="en-US" altLang="ja-JP" sz="2400" b="1" i="1" smtClean="0">
+                        <a:solidFill>
+                          <a:srgbClr val="FF0000"/>
+                        </a:solidFill>
+                        <a:latin typeface="Cambria Math" panose="02040503050406030204" pitchFamily="18" charset="0"/>
+                      </a:rPr>
+                      <m:t>𝟐𝟏</m:t>
+                    </m:r>
+                    <m:r>
+                      <a:rPr lang="en-US" altLang="ja-JP" sz="2400" b="1" i="1" smtClean="0">
+                        <a:solidFill>
+                          <a:srgbClr val="FF0000"/>
+                        </a:solidFill>
+                        <a:latin typeface="Cambria Math" panose="02040503050406030204" pitchFamily="18" charset="0"/>
+                      </a:rPr>
+                      <m:t>.</m:t>
+                    </m:r>
+                    <m:r>
+                      <a:rPr lang="en-US" altLang="ja-JP" sz="2400" b="1" i="1" smtClean="0">
+                        <a:solidFill>
+                          <a:srgbClr val="FF0000"/>
+                        </a:solidFill>
+                        <a:latin typeface="Cambria Math" panose="02040503050406030204" pitchFamily="18" charset="0"/>
+                      </a:rPr>
+                      <m:t>𝟕</m:t>
+                    </m:r>
+                    <m:r>
+                      <a:rPr lang="en-US" altLang="ja-JP" sz="2400" b="1" i="1" smtClean="0">
+                        <a:solidFill>
+                          <a:srgbClr val="FF0000"/>
+                        </a:solidFill>
+                        <a:latin typeface="Cambria Math" panose="02040503050406030204" pitchFamily="18" charset="0"/>
+                      </a:rPr>
+                      <m:t>𝒎</m:t>
+                    </m:r>
+                    <m:r>
+                      <a:rPr lang="en-US" altLang="ja-JP" sz="2400" b="1" i="1" smtClean="0">
+                        <a:solidFill>
+                          <a:srgbClr val="FF0000"/>
+                        </a:solidFill>
+                        <a:latin typeface="Cambria Math" panose="02040503050406030204" pitchFamily="18" charset="0"/>
+                      </a:rPr>
+                      <m:t>/</m:t>
+                    </m:r>
+                    <m:r>
+                      <a:rPr lang="ja-JP" altLang="en-US" sz="2400" b="1" i="1">
+                        <a:solidFill>
+                          <a:srgbClr val="FF0000"/>
+                        </a:solidFill>
+                        <a:latin typeface="Cambria Math" panose="02040503050406030204" pitchFamily="18" charset="0"/>
+                      </a:rPr>
+                      <m:t>秒</m:t>
+                    </m:r>
+                  </m:oMath>
+                </a14:m>
+                <a:r>
+                  <a:rPr lang="en-US" altLang="ja-JP" sz="2400" b="1" dirty="0">
+                    <a:solidFill>
+                      <a:srgbClr val="FF0000"/>
+                    </a:solidFill>
+                  </a:rPr>
+                  <a:t>,</a:t>
+                </a:r>
+                <a:r>
+                  <a:rPr lang="ja-JP" altLang="en-US" sz="2400" b="1" dirty="0">
+                    <a:solidFill>
+                      <a:srgbClr val="FF0000"/>
+                    </a:solidFill>
+                  </a:rPr>
+                  <a:t>鉛玉</a:t>
+                </a:r>
+                <a:r>
+                  <a:rPr lang="en-US" altLang="ja-JP" sz="2400" b="1" dirty="0">
+                    <a:solidFill>
+                      <a:srgbClr val="FF0000"/>
+                    </a:solidFill>
+                  </a:rPr>
+                  <a:t>B</a:t>
+                </a:r>
+                <a:r>
+                  <a:rPr lang="ja-JP" altLang="en-US" sz="2400" b="1" dirty="0">
+                    <a:solidFill>
+                      <a:srgbClr val="FF0000"/>
+                    </a:solidFill>
+                  </a:rPr>
+                  <a:t>の速度は</a:t>
+                </a:r>
+                <a14:m>
+                  <m:oMath xmlns:m="http://schemas.openxmlformats.org/officeDocument/2006/math">
+                    <m:r>
+                      <a:rPr lang="en-US" altLang="ja-JP" sz="2400" b="1" i="1">
+                        <a:solidFill>
+                          <a:srgbClr val="FF0000"/>
+                        </a:solidFill>
+                        <a:latin typeface="Cambria Math" panose="02040503050406030204" pitchFamily="18" charset="0"/>
+                      </a:rPr>
+                      <m:t>−</m:t>
+                    </m:r>
+                    <m:r>
+                      <a:rPr lang="en-US" altLang="ja-JP" sz="2400" b="1" i="1" smtClean="0">
+                        <a:solidFill>
+                          <a:srgbClr val="FF0000"/>
+                        </a:solidFill>
+                        <a:latin typeface="Cambria Math" panose="02040503050406030204" pitchFamily="18" charset="0"/>
+                      </a:rPr>
+                      <m:t>𝟕</m:t>
+                    </m:r>
+                    <m:r>
+                      <a:rPr lang="en-US" altLang="ja-JP" sz="2400" b="1" i="1">
+                        <a:solidFill>
+                          <a:srgbClr val="FF0000"/>
+                        </a:solidFill>
+                        <a:latin typeface="Cambria Math" panose="02040503050406030204" pitchFamily="18" charset="0"/>
+                      </a:rPr>
+                      <m:t>.</m:t>
+                    </m:r>
+                    <m:r>
+                      <a:rPr lang="en-US" altLang="ja-JP" sz="2400" b="1" i="1">
+                        <a:solidFill>
+                          <a:srgbClr val="FF0000"/>
+                        </a:solidFill>
+                        <a:latin typeface="Cambria Math" panose="02040503050406030204" pitchFamily="18" charset="0"/>
+                      </a:rPr>
+                      <m:t>𝟕</m:t>
+                    </m:r>
+                    <m:r>
+                      <a:rPr lang="en-US" altLang="ja-JP" sz="2400" b="1" i="1">
+                        <a:solidFill>
+                          <a:srgbClr val="FF0000"/>
+                        </a:solidFill>
+                        <a:latin typeface="Cambria Math" panose="02040503050406030204" pitchFamily="18" charset="0"/>
+                      </a:rPr>
+                      <m:t>𝒎</m:t>
+                    </m:r>
+                    <m:r>
+                      <a:rPr lang="en-US" altLang="ja-JP" sz="2400" b="1" i="1">
+                        <a:solidFill>
+                          <a:srgbClr val="FF0000"/>
+                        </a:solidFill>
+                        <a:latin typeface="Cambria Math" panose="02040503050406030204" pitchFamily="18" charset="0"/>
+                      </a:rPr>
+                      <m:t>/</m:t>
+                    </m:r>
+                    <m:r>
+                      <a:rPr lang="ja-JP" altLang="en-US" sz="2400" b="1" i="1">
+                        <a:solidFill>
+                          <a:srgbClr val="FF0000"/>
+                        </a:solidFill>
+                        <a:latin typeface="Cambria Math" panose="02040503050406030204" pitchFamily="18" charset="0"/>
+                      </a:rPr>
+                      <m:t>秒</m:t>
+                    </m:r>
+                  </m:oMath>
+                </a14:m>
+                <a:endParaRPr lang="en-US" altLang="ja-JP" sz="2400" b="1" dirty="0">
+                  <a:solidFill>
+                    <a:srgbClr val="FF0000"/>
+                  </a:solidFill>
+                </a:endParaRPr>
+              </a:p>
+            </p:txBody>
+          </p:sp>
+        </mc:Choice>
+        <mc:Fallback>
+          <p:sp>
+            <p:nvSpPr>
+              <p:cNvPr id="6" name="テキスト ボックス 5">
+                <a:extLst>
+                  <a:ext uri="{FF2B5EF4-FFF2-40B4-BE49-F238E27FC236}">
+                    <a16:creationId xmlns:a16="http://schemas.microsoft.com/office/drawing/2014/main" id="{55830AD6-028B-4C4E-80BF-B70DFC1C3A46}"/>
+                  </a:ext>
+                </a:extLst>
+              </p:cNvPr>
+              <p:cNvSpPr txBox="1">
+                <a:spLocks noRot="1" noChangeAspect="1" noMove="1" noResize="1" noEditPoints="1" noAdjustHandles="1" noChangeArrowheads="1" noChangeShapeType="1" noTextEdit="1"/>
+              </p:cNvSpPr>
+              <p:nvPr/>
+            </p:nvSpPr>
+            <p:spPr>
+              <a:xfrm>
+                <a:off x="567542" y="1216429"/>
+                <a:ext cx="9417963" cy="4583562"/>
+              </a:xfrm>
+              <a:prstGeom prst="rect">
+                <a:avLst/>
+              </a:prstGeom>
+              <a:blipFill>
+                <a:blip r:embed="rId2"/>
+                <a:stretch>
+                  <a:fillRect l="-971" t="-1065" r="-65" b="-2264"/>
+                </a:stretch>
+              </a:blipFill>
+            </p:spPr>
+            <p:txBody>
+              <a:bodyPr/>
+              <a:lstStyle/>
+              <a:p>
+                <a:r>
+                  <a:rPr lang="ja-JP" altLang="en-US">
+                    <a:noFill/>
+                  </a:rPr>
+                  <a:t> </a:t>
+                </a:r>
+              </a:p>
+            </p:txBody>
+          </p:sp>
+        </mc:Fallback>
+      </mc:AlternateContent>
+    </p:spTree>
+    <p:extLst>
+      <p:ext uri="{BB962C8B-B14F-4D97-AF65-F5344CB8AC3E}">
+        <p14:creationId xmlns:p14="http://schemas.microsoft.com/office/powerpoint/2010/main" val="1018551645"/>
+      </p:ext>
+    </p:extLst>
+  </p:cSld>
+  <p:clrMapOvr>
+    <a:masterClrMapping/>
+  </p:clrMapOvr>
+</p:sld>
+</file>
+
 <file path=ppt/slides/slide2.xml><?xml version="1.0" encoding="utf-8"?>
 <p:sld xmlns:a="http://schemas.openxmlformats.org/drawingml/2006/main" xmlns:r="http://schemas.openxmlformats.org/officeDocument/2006/relationships" xmlns:p="http://schemas.openxmlformats.org/presentationml/2006/main">
   <p:cSld>
@@ -4198,7 +7477,7 @@
                       <a:rPr lang="en-US" altLang="ja-JP" sz="2400" b="0" i="1" smtClean="0">
                         <a:latin typeface="Cambria Math" panose="02040503050406030204" pitchFamily="18" charset="0"/>
                       </a:rPr>
-                      <m:t>=−</m:t>
+                      <m:t>=−(</m:t>
                     </m:r>
                     <m:sSub>
                       <m:sSubPr>
@@ -4242,6 +7521,12 @@
                         <a:latin typeface="Cambria Math" panose="02040503050406030204" pitchFamily="18" charset="0"/>
                       </a:rPr>
                       <m:t>𝑡</m:t>
+                    </m:r>
+                    <m:r>
+                      <a:rPr lang="en-US" altLang="ja-JP" sz="2400" b="0" i="1" smtClean="0">
+                        <a:latin typeface="Cambria Math" panose="02040503050406030204" pitchFamily="18" charset="0"/>
+                      </a:rPr>
+                      <m:t>)</m:t>
                     </m:r>
                   </m:oMath>
                 </a14:m>
@@ -4476,7 +7761,7 @@
             <p:spPr>
               <a:xfrm>
                 <a:off x="567542" y="1216429"/>
-                <a:ext cx="10341293" cy="3850285"/>
+                <a:ext cx="10033516" cy="3850285"/>
               </a:xfrm>
               <a:prstGeom prst="rect">
                 <a:avLst/>
@@ -5238,7 +8523,7 @@
                       <a:srgbClr val="FF0000"/>
                     </a:solidFill>
                   </a:rPr>
-                  <a:t>２つの物体の運動量の合計は時間が経っても変わらない</a:t>
+                  <a:t>２つの物体の運動量の合計は衝突した後も変わらない</a:t>
                 </a:r>
                 <a:r>
                   <a:rPr lang="ja-JP" altLang="en-US" sz="2400" dirty="0"/>
@@ -5267,7 +8552,7 @@
             <p:spPr>
               <a:xfrm>
                 <a:off x="567542" y="1216429"/>
-                <a:ext cx="10341293" cy="3850285"/>
+                <a:ext cx="10033516" cy="3850285"/>
               </a:xfrm>
               <a:prstGeom prst="rect">
                 <a:avLst/>
@@ -5275,7 +8560,7 @@
               <a:blipFill>
                 <a:blip r:embed="rId2"/>
                 <a:stretch>
-                  <a:fillRect l="-884" t="-1268" b="-2694"/>
+                  <a:fillRect l="-911" t="-1268" b="-2694"/>
                 </a:stretch>
               </a:blipFill>
             </p:spPr>
@@ -5414,8 +8699,8 @@
           </a:p>
         </p:txBody>
       </p:sp>
-      <mc:AlternateContent xmlns:mc="http://schemas.openxmlformats.org/markup-compatibility/2006">
-        <mc:Choice xmlns:a14="http://schemas.microsoft.com/office/drawing/2010/main" Requires="a14">
+      <mc:AlternateContent xmlns:mc="http://schemas.openxmlformats.org/markup-compatibility/2006" xmlns:a14="http://schemas.microsoft.com/office/drawing/2010/main">
+        <mc:Choice Requires="a14">
           <p:sp>
             <p:nvSpPr>
               <p:cNvPr id="6" name="テキスト ボックス 5">
@@ -6184,7 +9469,7 @@
             </p:txBody>
           </p:sp>
         </mc:Choice>
-        <mc:Fallback>
+        <mc:Fallback xmlns="">
           <p:sp>
             <p:nvSpPr>
               <p:cNvPr id="6" name="テキスト ボックス 5">
@@ -6295,8 +9580,8 @@
           </a:p>
         </p:txBody>
       </p:sp>
-      <mc:AlternateContent xmlns:mc="http://schemas.openxmlformats.org/markup-compatibility/2006">
-        <mc:Choice xmlns:a14="http://schemas.microsoft.com/office/drawing/2010/main" Requires="a14">
+      <mc:AlternateContent xmlns:mc="http://schemas.openxmlformats.org/markup-compatibility/2006" xmlns:a14="http://schemas.microsoft.com/office/drawing/2010/main">
+        <mc:Choice Requires="a14">
           <p:sp>
             <p:nvSpPr>
               <p:cNvPr id="6" name="テキスト ボックス 5">
@@ -7067,34 +10352,7 @@
                         </a:solidFill>
                         <a:latin typeface="Cambria Math" panose="02040503050406030204" pitchFamily="18" charset="0"/>
                       </a:rPr>
-                      <m:t> </m:t>
-                    </m:r>
-                    <m:r>
-                      <a:rPr lang="en-US" altLang="ja-JP" sz="2400" b="0" i="1" smtClean="0">
-                        <a:solidFill>
-                          <a:schemeClr val="tx1"/>
-                        </a:solidFill>
-                        <a:latin typeface="Cambria Math" panose="02040503050406030204" pitchFamily="18" charset="0"/>
-                      </a:rPr>
-                      <m:t>=</m:t>
-                    </m:r>
-                    <m:r>
-                      <a:rPr lang="en-US" altLang="ja-JP" sz="2400" b="0" i="1" smtClean="0">
-                        <a:solidFill>
-                          <a:schemeClr val="tx1"/>
-                        </a:solidFill>
-                        <a:latin typeface="Cambria Math" panose="02040503050406030204" pitchFamily="18" charset="0"/>
-                      </a:rPr>
-                      <m:t>(</m:t>
-                    </m:r>
-                    <m:r>
-                      <a:rPr lang="en-US" altLang="ja-JP" sz="2400" b="0" i="1" smtClean="0">
-                        <a:solidFill>
-                          <a:schemeClr val="tx1"/>
-                        </a:solidFill>
-                        <a:latin typeface="Cambria Math" panose="02040503050406030204" pitchFamily="18" charset="0"/>
-                      </a:rPr>
-                      <m:t>0.5</m:t>
+                      <m:t> =(0.5</m:t>
                     </m:r>
                     <m:r>
                       <a:rPr lang="en-US" altLang="ja-JP" sz="2400" b="0" i="1" smtClean="0">
@@ -7265,7 +10523,7 @@
             </p:txBody>
           </p:sp>
         </mc:Choice>
-        <mc:Fallback>
+        <mc:Fallback xmlns="">
           <p:sp>
             <p:nvSpPr>
               <p:cNvPr id="6" name="テキスト ボックス 5">
@@ -7376,8 +10634,8 @@
           </a:p>
         </p:txBody>
       </p:sp>
-      <mc:AlternateContent xmlns:mc="http://schemas.openxmlformats.org/markup-compatibility/2006">
-        <mc:Choice xmlns:a14="http://schemas.microsoft.com/office/drawing/2010/main" Requires="a14">
+      <mc:AlternateContent xmlns:mc="http://schemas.openxmlformats.org/markup-compatibility/2006" xmlns:a14="http://schemas.microsoft.com/office/drawing/2010/main">
+        <mc:Choice Requires="a14">
           <p:sp>
             <p:nvSpPr>
               <p:cNvPr id="6" name="テキスト ボックス 5">
@@ -7481,13 +10739,7 @@
                       <a:rPr lang="en-US" altLang="ja-JP" sz="2400" b="0" i="0" dirty="0" smtClean="0">
                         <a:latin typeface="Cambria Math" panose="02040503050406030204" pitchFamily="18" charset="0"/>
                       </a:rPr>
-                      <m:t>, 10, −30</m:t>
-                    </m:r>
-                    <m:r>
-                      <a:rPr lang="en-US" altLang="ja-JP" sz="2400" b="0" i="0" dirty="0" smtClean="0">
-                        <a:latin typeface="Cambria Math" panose="02040503050406030204" pitchFamily="18" charset="0"/>
-                      </a:rPr>
-                      <m:t>]</m:t>
+                      <m:t>, 10, −30]</m:t>
                     </m:r>
                     <m:r>
                       <a:rPr lang="en-US" altLang="ja-JP" sz="2400" i="1" dirty="0" smtClean="0">
@@ -8222,34 +11474,7 @@
                         </a:solidFill>
                         <a:latin typeface="Cambria Math" panose="02040503050406030204" pitchFamily="18" charset="0"/>
                       </a:rPr>
-                      <m:t> </m:t>
-                    </m:r>
-                    <m:r>
-                      <a:rPr lang="en-US" altLang="ja-JP" sz="2400" b="0" i="1" smtClean="0">
-                        <a:solidFill>
-                          <a:schemeClr val="tx1"/>
-                        </a:solidFill>
-                        <a:latin typeface="Cambria Math" panose="02040503050406030204" pitchFamily="18" charset="0"/>
-                      </a:rPr>
-                      <m:t>=</m:t>
-                    </m:r>
-                    <m:r>
-                      <a:rPr lang="en-US" altLang="ja-JP" sz="2400" b="0" i="1" smtClean="0">
-                        <a:solidFill>
-                          <a:schemeClr val="tx1"/>
-                        </a:solidFill>
-                        <a:latin typeface="Cambria Math" panose="02040503050406030204" pitchFamily="18" charset="0"/>
-                      </a:rPr>
-                      <m:t>(</m:t>
-                    </m:r>
-                    <m:r>
-                      <a:rPr lang="en-US" altLang="ja-JP" sz="2400" b="0" i="1" smtClean="0">
-                        <a:solidFill>
-                          <a:schemeClr val="tx1"/>
-                        </a:solidFill>
-                        <a:latin typeface="Cambria Math" panose="02040503050406030204" pitchFamily="18" charset="0"/>
-                      </a:rPr>
-                      <m:t>0.5</m:t>
+                      <m:t> =(0.5</m:t>
                     </m:r>
                     <m:r>
                       <a:rPr lang="en-US" altLang="ja-JP" sz="2400" b="0" i="1" smtClean="0">
@@ -8496,7 +11721,7 @@
             </p:txBody>
           </p:sp>
         </mc:Choice>
-        <mc:Fallback>
+        <mc:Fallback xmlns="">
           <p:sp>
             <p:nvSpPr>
               <p:cNvPr id="6" name="テキスト ボックス 5">
@@ -8607,12 +11832,237 @@
           </a:p>
         </p:txBody>
       </p:sp>
+      <mc:AlternateContent xmlns:mc="http://schemas.openxmlformats.org/markup-compatibility/2006">
+        <mc:Choice xmlns:a14="http://schemas.microsoft.com/office/drawing/2010/main" Requires="a14">
+          <p:sp>
+            <p:nvSpPr>
+              <p:cNvPr id="6" name="テキスト ボックス 5">
+                <a:extLst>
+                  <a:ext uri="{FF2B5EF4-FFF2-40B4-BE49-F238E27FC236}">
+                    <a16:creationId xmlns:a16="http://schemas.microsoft.com/office/drawing/2014/main" id="{55830AD6-028B-4C4E-80BF-B70DFC1C3A46}"/>
+                  </a:ext>
+                </a:extLst>
+              </p:cNvPr>
+              <p:cNvSpPr txBox="1"/>
+              <p:nvPr/>
+            </p:nvSpPr>
+            <p:spPr>
+              <a:xfrm>
+                <a:off x="567542" y="1216429"/>
+                <a:ext cx="10341293" cy="2677656"/>
+              </a:xfrm>
+              <a:prstGeom prst="rect">
+                <a:avLst/>
+              </a:prstGeom>
+              <a:noFill/>
+            </p:spPr>
+            <p:txBody>
+              <a:bodyPr wrap="none" rtlCol="0">
+                <a:spAutoFit/>
+              </a:bodyPr>
+              <a:lstStyle/>
+              <a:p>
+                <a:r>
+                  <a:rPr lang="ja-JP" altLang="en-US" sz="2400" dirty="0"/>
+                  <a:t>ビリヤードは運動量保存やエネルギー保存がそのまま反映されますが、</a:t>
+                </a:r>
+                <a:endParaRPr lang="en-US" altLang="ja-JP" sz="2400" dirty="0"/>
+              </a:p>
+              <a:p>
+                <a:r>
+                  <a:rPr lang="ja-JP" altLang="en-US" sz="2400" dirty="0"/>
+                  <a:t>例えば、玉の素材が</a:t>
+                </a:r>
+                <a:r>
+                  <a:rPr lang="ja-JP" altLang="en-US" sz="2400" b="1" dirty="0">
+                    <a:solidFill>
+                      <a:schemeClr val="accent4">
+                        <a:lumMod val="50000"/>
+                      </a:schemeClr>
+                    </a:solidFill>
+                  </a:rPr>
+                  <a:t>粘土</a:t>
+                </a:r>
+                <a:r>
+                  <a:rPr lang="ja-JP" altLang="en-US" sz="2400" dirty="0"/>
+                  <a:t>だったらどうなるでしょう。</a:t>
+                </a:r>
+                <a:endParaRPr lang="en-US" altLang="ja-JP" sz="2400" dirty="0"/>
+              </a:p>
+              <a:p>
+                <a:r>
+                  <a:rPr lang="ja-JP" altLang="en-US" sz="2400" dirty="0"/>
+                  <a:t>衝突しても、あまり跳ね返らず、速度もゆっくりになりそうです。</a:t>
+                </a:r>
+                <a:endParaRPr lang="en-US" altLang="ja-JP" sz="2400" dirty="0"/>
+              </a:p>
+              <a:p>
+                <a:endParaRPr lang="en-US" altLang="ja-JP" sz="2400" dirty="0"/>
+              </a:p>
+              <a:p>
+                <a:r>
+                  <a:rPr lang="ja-JP" altLang="en-US" sz="2400" dirty="0"/>
+                  <a:t>摩擦の時のように、衝突でのはねかえりには係数があります。</a:t>
+                </a:r>
+                <a:endParaRPr lang="en-US" altLang="ja-JP" sz="2400" dirty="0"/>
+              </a:p>
+              <a:p>
+                <a:endParaRPr lang="en-US" altLang="ja-JP" sz="2400" dirty="0"/>
+              </a:p>
+              <a:p>
+                <a:r>
+                  <a:rPr lang="ja-JP" altLang="en-US" sz="2400" dirty="0"/>
+                  <a:t>この</a:t>
+                </a:r>
+                <a:r>
+                  <a:rPr lang="ja-JP" altLang="en-US" sz="2400" b="1" dirty="0">
+                    <a:solidFill>
+                      <a:srgbClr val="FF0000"/>
+                    </a:solidFill>
+                  </a:rPr>
+                  <a:t>はねかえり係数</a:t>
+                </a:r>
+                <a14:m>
+                  <m:oMath xmlns:m="http://schemas.openxmlformats.org/officeDocument/2006/math">
+                    <m:r>
+                      <a:rPr lang="ja-JP" altLang="en-US" sz="2400" b="1" i="1" dirty="0" smtClean="0">
+                        <a:solidFill>
+                          <a:srgbClr val="FF0000"/>
+                        </a:solidFill>
+                        <a:latin typeface="Cambria Math" panose="02040503050406030204" pitchFamily="18" charset="0"/>
+                      </a:rPr>
+                      <m:t>（</m:t>
+                    </m:r>
+                    <m:r>
+                      <a:rPr lang="en-US" altLang="ja-JP" sz="2400" b="1" i="1" dirty="0" smtClean="0">
+                        <a:solidFill>
+                          <a:srgbClr val="FF0000"/>
+                        </a:solidFill>
+                        <a:latin typeface="Cambria Math" panose="02040503050406030204" pitchFamily="18" charset="0"/>
+                      </a:rPr>
+                      <m:t>𝒆</m:t>
+                    </m:r>
+                    <m:r>
+                      <a:rPr lang="ja-JP" altLang="en-US" sz="2400" b="1" i="1" dirty="0" smtClean="0">
+                        <a:solidFill>
+                          <a:srgbClr val="FF0000"/>
+                        </a:solidFill>
+                        <a:latin typeface="Cambria Math" panose="02040503050406030204" pitchFamily="18" charset="0"/>
+                      </a:rPr>
+                      <m:t>）</m:t>
+                    </m:r>
+                  </m:oMath>
+                </a14:m>
+                <a:r>
+                  <a:rPr lang="ja-JP" altLang="en-US" sz="2400" b="1" dirty="0">
+                    <a:solidFill>
+                      <a:srgbClr val="FF0000"/>
+                    </a:solidFill>
+                  </a:rPr>
+                  <a:t>の大きさ</a:t>
+                </a:r>
+                <a:r>
+                  <a:rPr lang="ja-JP" altLang="en-US" sz="2400" dirty="0"/>
+                  <a:t>で、</a:t>
+                </a:r>
+                <a:r>
+                  <a:rPr lang="ja-JP" altLang="en-US" sz="2400" b="1" dirty="0">
+                    <a:solidFill>
+                      <a:srgbClr val="FF0000"/>
+                    </a:solidFill>
+                  </a:rPr>
+                  <a:t>衝突の種類が変わります。</a:t>
+                </a:r>
+                <a:endParaRPr lang="en-US" altLang="ja-JP" sz="2400" b="1" dirty="0">
+                  <a:solidFill>
+                    <a:srgbClr val="FF0000"/>
+                  </a:solidFill>
+                </a:endParaRPr>
+              </a:p>
+            </p:txBody>
+          </p:sp>
+        </mc:Choice>
+        <mc:Fallback>
+          <p:sp>
+            <p:nvSpPr>
+              <p:cNvPr id="6" name="テキスト ボックス 5">
+                <a:extLst>
+                  <a:ext uri="{FF2B5EF4-FFF2-40B4-BE49-F238E27FC236}">
+                    <a16:creationId xmlns:a16="http://schemas.microsoft.com/office/drawing/2014/main" id="{55830AD6-028B-4C4E-80BF-B70DFC1C3A46}"/>
+                  </a:ext>
+                </a:extLst>
+              </p:cNvPr>
+              <p:cNvSpPr txBox="1">
+                <a:spLocks noRot="1" noChangeAspect="1" noMove="1" noResize="1" noEditPoints="1" noAdjustHandles="1" noChangeArrowheads="1" noChangeShapeType="1" noTextEdit="1"/>
+              </p:cNvSpPr>
+              <p:nvPr/>
+            </p:nvSpPr>
+            <p:spPr>
+              <a:xfrm>
+                <a:off x="567542" y="1216429"/>
+                <a:ext cx="10341293" cy="2677656"/>
+              </a:xfrm>
+              <a:prstGeom prst="rect">
+                <a:avLst/>
+              </a:prstGeom>
+              <a:blipFill>
+                <a:blip r:embed="rId2"/>
+                <a:stretch>
+                  <a:fillRect l="-884" t="-1822" b="-4784"/>
+                </a:stretch>
+              </a:blipFill>
+            </p:spPr>
+            <p:txBody>
+              <a:bodyPr/>
+              <a:lstStyle/>
+              <a:p>
+                <a:r>
+                  <a:rPr lang="ja-JP" altLang="en-US">
+                    <a:noFill/>
+                  </a:rPr>
+                  <a:t> </a:t>
+                </a:r>
+              </a:p>
+            </p:txBody>
+          </p:sp>
+        </mc:Fallback>
+      </mc:AlternateContent>
+    </p:spTree>
+    <p:extLst>
+      <p:ext uri="{BB962C8B-B14F-4D97-AF65-F5344CB8AC3E}">
+        <p14:creationId xmlns:p14="http://schemas.microsoft.com/office/powerpoint/2010/main" val="375110272"/>
+      </p:ext>
+    </p:extLst>
+  </p:cSld>
+  <p:clrMapOvr>
+    <a:masterClrMapping/>
+  </p:clrMapOvr>
+</p:sld>
+</file>
+
+<file path=ppt/slides/slide8.xml><?xml version="1.0" encoding="utf-8"?>
+<p:sld xmlns:a="http://schemas.openxmlformats.org/drawingml/2006/main" xmlns:r="http://schemas.openxmlformats.org/officeDocument/2006/relationships" xmlns:p="http://schemas.openxmlformats.org/presentationml/2006/main">
+  <p:cSld>
+    <p:spTree>
+      <p:nvGrpSpPr>
+        <p:cNvPr id="1" name=""/>
+        <p:cNvGrpSpPr/>
+        <p:nvPr/>
+      </p:nvGrpSpPr>
+      <p:grpSpPr>
+        <a:xfrm>
+          <a:off x="0" y="0"/>
+          <a:ext cx="0" cy="0"/>
+          <a:chOff x="0" y="0"/>
+          <a:chExt cx="0" cy="0"/>
+        </a:xfrm>
+      </p:grpSpPr>
       <p:sp>
         <p:nvSpPr>
-          <p:cNvPr id="6" name="テキスト ボックス 5">
+          <p:cNvPr id="4" name="テキスト ボックス 3">
             <a:extLst>
               <a:ext uri="{FF2B5EF4-FFF2-40B4-BE49-F238E27FC236}">
-                <a16:creationId xmlns:a16="http://schemas.microsoft.com/office/drawing/2014/main" id="{55830AD6-028B-4C4E-80BF-B70DFC1C3A46}"/>
+                <a16:creationId xmlns:a16="http://schemas.microsoft.com/office/drawing/2014/main" id="{5A13BF46-B8C5-48AA-8308-C9ECFF431A18}"/>
               </a:ext>
             </a:extLst>
           </p:cNvPr>
@@ -8621,8 +12071,8 @@
         </p:nvSpPr>
         <p:spPr>
           <a:xfrm>
-            <a:off x="567542" y="1216429"/>
-            <a:ext cx="10033516" cy="1569660"/>
+            <a:off x="567542" y="491954"/>
+            <a:ext cx="1005403" cy="584775"/>
           </a:xfrm>
           <a:prstGeom prst="rect">
             <a:avLst/>
@@ -8636,48 +12086,1037 @@
           <a:lstStyle/>
           <a:p>
             <a:r>
-              <a:rPr lang="ja-JP" altLang="en-US" sz="2400" dirty="0"/>
-              <a:t>ビリヤードは運動量保存やエネルギー保存がそのまま反映されますが、</a:t>
-            </a:r>
-            <a:endParaRPr lang="en-US" altLang="ja-JP" sz="2400" dirty="0"/>
-          </a:p>
-          <a:p>
-            <a:r>
-              <a:rPr lang="ja-JP" altLang="en-US" sz="2400" dirty="0"/>
-              <a:t>例えば、玉の素材が</a:t>
-            </a:r>
-            <a:r>
-              <a:rPr lang="ja-JP" altLang="en-US" sz="2400" b="1" dirty="0">
-                <a:solidFill>
-                  <a:schemeClr val="accent4">
-                    <a:lumMod val="50000"/>
-                  </a:schemeClr>
-                </a:solidFill>
-              </a:rPr>
-              <a:t>粘土</a:t>
-            </a:r>
-            <a:r>
-              <a:rPr lang="ja-JP" altLang="en-US" sz="2400" dirty="0"/>
-              <a:t>だったらどうなるでしょう。</a:t>
-            </a:r>
-            <a:endParaRPr lang="en-US" altLang="ja-JP" sz="2400" dirty="0"/>
-          </a:p>
-          <a:p>
-            <a:endParaRPr lang="en-US" altLang="ja-JP" sz="2400" dirty="0"/>
-          </a:p>
-          <a:p>
-            <a:r>
-              <a:rPr lang="ja-JP" altLang="en-US" sz="2400"/>
-              <a:t>衝突しても、あまり跳ね返らず、速度もゆっくりになりそうです。</a:t>
-            </a:r>
-            <a:endParaRPr lang="en-US" altLang="ja-JP" sz="2400" dirty="0"/>
+              <a:rPr lang="ja-JP" altLang="en-US" sz="3200" b="1" u="sng" dirty="0"/>
+              <a:t>衝突</a:t>
+            </a:r>
+            <a:endParaRPr kumimoji="1" lang="en-US" altLang="ja-JP" sz="3200" b="1" u="sng" dirty="0"/>
           </a:p>
         </p:txBody>
       </p:sp>
+      <mc:AlternateContent xmlns:mc="http://schemas.openxmlformats.org/markup-compatibility/2006">
+        <mc:Choice xmlns:a14="http://schemas.microsoft.com/office/drawing/2010/main" Requires="a14">
+          <p:sp>
+            <p:nvSpPr>
+              <p:cNvPr id="6" name="テキスト ボックス 5">
+                <a:extLst>
+                  <a:ext uri="{FF2B5EF4-FFF2-40B4-BE49-F238E27FC236}">
+                    <a16:creationId xmlns:a16="http://schemas.microsoft.com/office/drawing/2014/main" id="{55830AD6-028B-4C4E-80BF-B70DFC1C3A46}"/>
+                  </a:ext>
+                </a:extLst>
+              </p:cNvPr>
+              <p:cNvSpPr txBox="1"/>
+              <p:nvPr/>
+            </p:nvSpPr>
+            <p:spPr>
+              <a:xfrm>
+                <a:off x="567542" y="1216429"/>
+                <a:ext cx="9110186" cy="5632311"/>
+              </a:xfrm>
+              <a:prstGeom prst="rect">
+                <a:avLst/>
+              </a:prstGeom>
+              <a:noFill/>
+            </p:spPr>
+            <p:txBody>
+              <a:bodyPr wrap="none" rtlCol="0">
+                <a:spAutoFit/>
+              </a:bodyPr>
+              <a:lstStyle/>
+              <a:p>
+                <a:r>
+                  <a:rPr lang="ja-JP" altLang="en-US" sz="2400" dirty="0"/>
+                  <a:t>以下に衝突の種類をまとめます。</a:t>
+                </a:r>
+                <a:endParaRPr lang="en-US" altLang="ja-JP" sz="2400" dirty="0"/>
+              </a:p>
+              <a:p>
+                <a:endParaRPr lang="en-US" altLang="ja-JP" sz="2400" dirty="0"/>
+              </a:p>
+              <a:p>
+                <a:r>
+                  <a:rPr lang="ja-JP" altLang="en-US" sz="2400" b="1" dirty="0">
+                    <a:solidFill>
+                      <a:srgbClr val="FF0000"/>
+                    </a:solidFill>
+                  </a:rPr>
+                  <a:t>■弾性衝突</a:t>
+                </a:r>
+                <a14:m>
+                  <m:oMath xmlns:m="http://schemas.openxmlformats.org/officeDocument/2006/math">
+                    <m:r>
+                      <a:rPr lang="en-US" altLang="ja-JP" sz="2400" b="1" i="0" dirty="0" smtClean="0">
+                        <a:solidFill>
+                          <a:srgbClr val="FF0000"/>
+                        </a:solidFill>
+                        <a:latin typeface="Cambria Math" panose="02040503050406030204" pitchFamily="18" charset="0"/>
+                      </a:rPr>
+                      <m:t>(</m:t>
+                    </m:r>
+                    <m:r>
+                      <a:rPr lang="en-US" altLang="ja-JP" sz="2400" b="1" i="1" dirty="0" smtClean="0">
+                        <a:solidFill>
+                          <a:srgbClr val="FF0000"/>
+                        </a:solidFill>
+                        <a:latin typeface="Cambria Math" panose="02040503050406030204" pitchFamily="18" charset="0"/>
+                      </a:rPr>
+                      <m:t>𝒆</m:t>
+                    </m:r>
+                    <m:r>
+                      <a:rPr lang="en-US" altLang="ja-JP" sz="2400" b="1" i="1" dirty="0" smtClean="0">
+                        <a:solidFill>
+                          <a:srgbClr val="FF0000"/>
+                        </a:solidFill>
+                        <a:latin typeface="Cambria Math" panose="02040503050406030204" pitchFamily="18" charset="0"/>
+                      </a:rPr>
+                      <m:t>=</m:t>
+                    </m:r>
+                    <m:r>
+                      <a:rPr lang="en-US" altLang="ja-JP" sz="2400" b="1" i="1" dirty="0" smtClean="0">
+                        <a:solidFill>
+                          <a:srgbClr val="FF0000"/>
+                        </a:solidFill>
+                        <a:latin typeface="Cambria Math" panose="02040503050406030204" pitchFamily="18" charset="0"/>
+                      </a:rPr>
+                      <m:t>𝟏</m:t>
+                    </m:r>
+                    <m:r>
+                      <a:rPr lang="en-US" altLang="ja-JP" sz="2400" b="1" i="1" dirty="0" smtClean="0">
+                        <a:solidFill>
+                          <a:srgbClr val="FF0000"/>
+                        </a:solidFill>
+                        <a:latin typeface="Cambria Math" panose="02040503050406030204" pitchFamily="18" charset="0"/>
+                      </a:rPr>
+                      <m:t>)</m:t>
+                    </m:r>
+                  </m:oMath>
+                </a14:m>
+                <a:endParaRPr lang="en-US" altLang="ja-JP" sz="2400" b="1" dirty="0">
+                  <a:solidFill>
+                    <a:srgbClr val="FF0000"/>
+                  </a:solidFill>
+                </a:endParaRPr>
+              </a:p>
+              <a:p>
+                <a:r>
+                  <a:rPr lang="ja-JP" altLang="en-US" sz="2400" dirty="0"/>
+                  <a:t>運動量保存、エネルギー保存がそのまま反映される衝突。</a:t>
+                </a:r>
+                <a:endParaRPr lang="en-US" altLang="ja-JP" sz="2400" dirty="0"/>
+              </a:p>
+              <a:p>
+                <a:r>
+                  <a:rPr lang="ja-JP" altLang="en-US" sz="2400" dirty="0"/>
+                  <a:t>ビリヤードやニュートンの揺りかごが、ほぼ当てはまる。</a:t>
+                </a:r>
+                <a:endParaRPr lang="en-US" altLang="ja-JP" sz="2400" dirty="0"/>
+              </a:p>
+              <a:p>
+                <a:endParaRPr lang="en-US" altLang="ja-JP" sz="2400" dirty="0"/>
+              </a:p>
+              <a:p>
+                <a:r>
+                  <a:rPr lang="ja-JP" altLang="en-US" sz="2400" b="1" dirty="0">
+                    <a:solidFill>
+                      <a:srgbClr val="FF0000"/>
+                    </a:solidFill>
+                  </a:rPr>
+                  <a:t>■非弾性衝突</a:t>
+                </a:r>
+                <a14:m>
+                  <m:oMath xmlns:m="http://schemas.openxmlformats.org/officeDocument/2006/math">
+                    <m:r>
+                      <a:rPr lang="en-US" altLang="ja-JP" sz="2400" b="1" i="0" dirty="0" smtClean="0">
+                        <a:solidFill>
+                          <a:srgbClr val="FF0000"/>
+                        </a:solidFill>
+                        <a:latin typeface="Cambria Math" panose="02040503050406030204" pitchFamily="18" charset="0"/>
+                      </a:rPr>
+                      <m:t>(</m:t>
+                    </m:r>
+                    <m:r>
+                      <a:rPr lang="en-US" altLang="ja-JP" sz="2400" b="1" i="1" dirty="0" smtClean="0">
+                        <a:solidFill>
+                          <a:srgbClr val="FF0000"/>
+                        </a:solidFill>
+                        <a:latin typeface="Cambria Math" panose="02040503050406030204" pitchFamily="18" charset="0"/>
+                      </a:rPr>
+                      <m:t>𝒆</m:t>
+                    </m:r>
+                    <m:r>
+                      <a:rPr lang="en-US" altLang="ja-JP" sz="2400" b="1" i="1" dirty="0">
+                        <a:solidFill>
+                          <a:srgbClr val="FF0000"/>
+                        </a:solidFill>
+                        <a:latin typeface="Cambria Math" panose="02040503050406030204" pitchFamily="18" charset="0"/>
+                      </a:rPr>
+                      <m:t>&gt;</m:t>
+                    </m:r>
+                    <m:r>
+                      <a:rPr lang="en-US" altLang="ja-JP" sz="2400" b="1" i="1" dirty="0">
+                        <a:solidFill>
+                          <a:srgbClr val="FF0000"/>
+                        </a:solidFill>
+                        <a:latin typeface="Cambria Math" panose="02040503050406030204" pitchFamily="18" charset="0"/>
+                      </a:rPr>
+                      <m:t>𝟎</m:t>
+                    </m:r>
+                    <m:r>
+                      <a:rPr lang="en-US" altLang="ja-JP" sz="2400" b="1" i="1" dirty="0">
+                        <a:solidFill>
+                          <a:srgbClr val="FF0000"/>
+                        </a:solidFill>
+                        <a:latin typeface="Cambria Math" panose="02040503050406030204" pitchFamily="18" charset="0"/>
+                      </a:rPr>
+                      <m:t> </m:t>
+                    </m:r>
+                    <m:r>
+                      <a:rPr lang="en-US" altLang="ja-JP" sz="2400" b="1" i="1" dirty="0" smtClean="0">
+                        <a:solidFill>
+                          <a:srgbClr val="FF0000"/>
+                        </a:solidFill>
+                        <a:latin typeface="Cambria Math" panose="02040503050406030204" pitchFamily="18" charset="0"/>
+                      </a:rPr>
+                      <m:t>𝑨𝒏𝒅</m:t>
+                    </m:r>
+                    <m:r>
+                      <a:rPr lang="en-US" altLang="ja-JP" sz="2400" b="1" i="1" dirty="0" smtClean="0">
+                        <a:solidFill>
+                          <a:srgbClr val="FF0000"/>
+                        </a:solidFill>
+                        <a:latin typeface="Cambria Math" panose="02040503050406030204" pitchFamily="18" charset="0"/>
+                      </a:rPr>
+                      <m:t> </m:t>
+                    </m:r>
+                    <m:r>
+                      <a:rPr lang="en-US" altLang="ja-JP" sz="2400" b="1" i="1" dirty="0">
+                        <a:solidFill>
+                          <a:srgbClr val="FF0000"/>
+                        </a:solidFill>
+                        <a:latin typeface="Cambria Math" panose="02040503050406030204" pitchFamily="18" charset="0"/>
+                      </a:rPr>
+                      <m:t>𝒆</m:t>
+                    </m:r>
+                    <m:r>
+                      <a:rPr lang="en-US" altLang="ja-JP" sz="2400" b="1" i="1" dirty="0" smtClean="0">
+                        <a:solidFill>
+                          <a:srgbClr val="FF0000"/>
+                        </a:solidFill>
+                        <a:latin typeface="Cambria Math" panose="02040503050406030204" pitchFamily="18" charset="0"/>
+                      </a:rPr>
+                      <m:t>&lt;</m:t>
+                    </m:r>
+                    <m:r>
+                      <a:rPr lang="en-US" altLang="ja-JP" sz="2400" b="1" i="1" dirty="0" smtClean="0">
+                        <a:solidFill>
+                          <a:srgbClr val="FF0000"/>
+                        </a:solidFill>
+                        <a:latin typeface="Cambria Math" panose="02040503050406030204" pitchFamily="18" charset="0"/>
+                      </a:rPr>
+                      <m:t>𝟏</m:t>
+                    </m:r>
+                    <m:r>
+                      <a:rPr lang="en-US" altLang="ja-JP" sz="2400" b="1" i="1" dirty="0" smtClean="0">
+                        <a:solidFill>
+                          <a:srgbClr val="FF0000"/>
+                        </a:solidFill>
+                        <a:latin typeface="Cambria Math" panose="02040503050406030204" pitchFamily="18" charset="0"/>
+                      </a:rPr>
+                      <m:t>)</m:t>
+                    </m:r>
+                  </m:oMath>
+                </a14:m>
+                <a:endParaRPr lang="en-US" altLang="ja-JP" sz="2400" b="1" dirty="0">
+                  <a:solidFill>
+                    <a:srgbClr val="FF0000"/>
+                  </a:solidFill>
+                </a:endParaRPr>
+              </a:p>
+              <a:p>
+                <a:r>
+                  <a:rPr lang="ja-JP" altLang="en-US" sz="2400" dirty="0"/>
+                  <a:t>衝突後に何らかの影響で速度が変化する衝突。</a:t>
+                </a:r>
+                <a:endParaRPr lang="en-US" altLang="ja-JP" sz="2400" dirty="0"/>
+              </a:p>
+              <a:p>
+                <a:r>
+                  <a:rPr lang="ja-JP" altLang="en-US" sz="2400" dirty="0"/>
+                  <a:t>スポンジや粘土など衝撃を吸収するものとの衝突。</a:t>
+                </a:r>
+                <a:endParaRPr lang="en-US" altLang="ja-JP" sz="2400" dirty="0"/>
+              </a:p>
+              <a:p>
+                <a:endParaRPr lang="en-US" altLang="ja-JP" sz="2400" dirty="0"/>
+              </a:p>
+              <a:p>
+                <a:r>
+                  <a:rPr lang="ja-JP" altLang="en-US" sz="2400" b="1" dirty="0">
+                    <a:solidFill>
+                      <a:srgbClr val="FF0000"/>
+                    </a:solidFill>
+                  </a:rPr>
+                  <a:t>■完全非弾性衝突</a:t>
+                </a:r>
+                <a14:m>
+                  <m:oMath xmlns:m="http://schemas.openxmlformats.org/officeDocument/2006/math">
+                    <m:r>
+                      <a:rPr lang="en-US" altLang="ja-JP" sz="2400" b="1" i="0" dirty="0" smtClean="0">
+                        <a:solidFill>
+                          <a:srgbClr val="FF0000"/>
+                        </a:solidFill>
+                        <a:latin typeface="Cambria Math" panose="02040503050406030204" pitchFamily="18" charset="0"/>
+                      </a:rPr>
+                      <m:t>(</m:t>
+                    </m:r>
+                    <m:r>
+                      <a:rPr lang="en-US" altLang="ja-JP" sz="2400" b="1" i="1" dirty="0" smtClean="0">
+                        <a:solidFill>
+                          <a:srgbClr val="FF0000"/>
+                        </a:solidFill>
+                        <a:latin typeface="Cambria Math" panose="02040503050406030204" pitchFamily="18" charset="0"/>
+                      </a:rPr>
+                      <m:t>𝒆</m:t>
+                    </m:r>
+                    <m:r>
+                      <a:rPr lang="en-US" altLang="ja-JP" sz="2400" b="1" i="1" dirty="0" smtClean="0">
+                        <a:solidFill>
+                          <a:srgbClr val="FF0000"/>
+                        </a:solidFill>
+                        <a:latin typeface="Cambria Math" panose="02040503050406030204" pitchFamily="18" charset="0"/>
+                      </a:rPr>
+                      <m:t>=</m:t>
+                    </m:r>
+                    <m:r>
+                      <a:rPr lang="en-US" altLang="ja-JP" sz="2400" b="1" i="1" dirty="0">
+                        <a:solidFill>
+                          <a:srgbClr val="FF0000"/>
+                        </a:solidFill>
+                        <a:latin typeface="Cambria Math" panose="02040503050406030204" pitchFamily="18" charset="0"/>
+                      </a:rPr>
+                      <m:t>𝟎</m:t>
+                    </m:r>
+                    <m:r>
+                      <a:rPr lang="en-US" altLang="ja-JP" sz="2400" b="1" i="1" dirty="0" smtClean="0">
+                        <a:solidFill>
+                          <a:srgbClr val="FF0000"/>
+                        </a:solidFill>
+                        <a:latin typeface="Cambria Math" panose="02040503050406030204" pitchFamily="18" charset="0"/>
+                      </a:rPr>
+                      <m:t>)</m:t>
+                    </m:r>
+                  </m:oMath>
+                </a14:m>
+                <a:endParaRPr lang="en-US" altLang="ja-JP" sz="2400" b="1" dirty="0">
+                  <a:solidFill>
+                    <a:srgbClr val="FF0000"/>
+                  </a:solidFill>
+                </a:endParaRPr>
+              </a:p>
+              <a:p>
+                <a:r>
+                  <a:rPr lang="ja-JP" altLang="en-US" sz="2400" dirty="0"/>
+                  <a:t>衝突した物体同士、両方共が衝突後に同じ速度になる衝突。</a:t>
+                </a:r>
+                <a:endParaRPr lang="en-US" altLang="ja-JP" sz="2400" dirty="0"/>
+              </a:p>
+              <a:p>
+                <a:r>
+                  <a:rPr lang="ja-JP" altLang="en-US" sz="2400" dirty="0"/>
+                  <a:t>ラグビーのタックルなど、衝突後にくっついて一緒に動くこと。</a:t>
+                </a:r>
+                <a:endParaRPr lang="en-US" altLang="ja-JP" sz="2400" dirty="0"/>
+              </a:p>
+              <a:p>
+                <a:endParaRPr lang="en-US" altLang="ja-JP" sz="2400" dirty="0"/>
+              </a:p>
+              <a:p>
+                <a:r>
+                  <a:rPr lang="en-US" altLang="ja-JP" sz="2400" dirty="0"/>
+                  <a:t>※</a:t>
+                </a:r>
+                <a:r>
+                  <a:rPr lang="ja-JP" altLang="en-US" sz="2400" dirty="0"/>
+                  <a:t>先ほどの例題は弾性衝突の例題になります</a:t>
+                </a:r>
+                <a:endParaRPr lang="en-US" altLang="ja-JP" sz="2400" dirty="0"/>
+              </a:p>
+            </p:txBody>
+          </p:sp>
+        </mc:Choice>
+        <mc:Fallback>
+          <p:sp>
+            <p:nvSpPr>
+              <p:cNvPr id="6" name="テキスト ボックス 5">
+                <a:extLst>
+                  <a:ext uri="{FF2B5EF4-FFF2-40B4-BE49-F238E27FC236}">
+                    <a16:creationId xmlns:a16="http://schemas.microsoft.com/office/drawing/2014/main" id="{55830AD6-028B-4C4E-80BF-B70DFC1C3A46}"/>
+                  </a:ext>
+                </a:extLst>
+              </p:cNvPr>
+              <p:cNvSpPr txBox="1">
+                <a:spLocks noRot="1" noChangeAspect="1" noMove="1" noResize="1" noEditPoints="1" noAdjustHandles="1" noChangeArrowheads="1" noChangeShapeType="1" noTextEdit="1"/>
+              </p:cNvSpPr>
+              <p:nvPr/>
+            </p:nvSpPr>
+            <p:spPr>
+              <a:xfrm>
+                <a:off x="567542" y="1216429"/>
+                <a:ext cx="9110186" cy="5632311"/>
+              </a:xfrm>
+              <a:prstGeom prst="rect">
+                <a:avLst/>
+              </a:prstGeom>
+              <a:blipFill>
+                <a:blip r:embed="rId2"/>
+                <a:stretch>
+                  <a:fillRect l="-1003" t="-867" r="-67" b="-1625"/>
+                </a:stretch>
+              </a:blipFill>
+            </p:spPr>
+            <p:txBody>
+              <a:bodyPr/>
+              <a:lstStyle/>
+              <a:p>
+                <a:r>
+                  <a:rPr lang="ja-JP" altLang="en-US">
+                    <a:noFill/>
+                  </a:rPr>
+                  <a:t> </a:t>
+                </a:r>
+              </a:p>
+            </p:txBody>
+          </p:sp>
+        </mc:Fallback>
+      </mc:AlternateContent>
     </p:spTree>
     <p:extLst>
       <p:ext uri="{BB962C8B-B14F-4D97-AF65-F5344CB8AC3E}">
-        <p14:creationId xmlns:p14="http://schemas.microsoft.com/office/powerpoint/2010/main" val="375110272"/>
+        <p14:creationId xmlns:p14="http://schemas.microsoft.com/office/powerpoint/2010/main" val="2977469069"/>
+      </p:ext>
+    </p:extLst>
+  </p:cSld>
+  <p:clrMapOvr>
+    <a:masterClrMapping/>
+  </p:clrMapOvr>
+</p:sld>
+</file>
+
+<file path=ppt/slides/slide9.xml><?xml version="1.0" encoding="utf-8"?>
+<p:sld xmlns:a="http://schemas.openxmlformats.org/drawingml/2006/main" xmlns:r="http://schemas.openxmlformats.org/officeDocument/2006/relationships" xmlns:p="http://schemas.openxmlformats.org/presentationml/2006/main">
+  <p:cSld>
+    <p:spTree>
+      <p:nvGrpSpPr>
+        <p:cNvPr id="1" name=""/>
+        <p:cNvGrpSpPr/>
+        <p:nvPr/>
+      </p:nvGrpSpPr>
+      <p:grpSpPr>
+        <a:xfrm>
+          <a:off x="0" y="0"/>
+          <a:ext cx="0" cy="0"/>
+          <a:chOff x="0" y="0"/>
+          <a:chExt cx="0" cy="0"/>
+        </a:xfrm>
+      </p:grpSpPr>
+      <p:sp>
+        <p:nvSpPr>
+          <p:cNvPr id="2" name="四角形: 角を丸くする 1">
+            <a:extLst>
+              <a:ext uri="{FF2B5EF4-FFF2-40B4-BE49-F238E27FC236}">
+                <a16:creationId xmlns:a16="http://schemas.microsoft.com/office/drawing/2014/main" id="{9AABABB0-FA8F-4960-8607-367CB72F823F}"/>
+              </a:ext>
+            </a:extLst>
+          </p:cNvPr>
+          <p:cNvSpPr/>
+          <p:nvPr/>
+        </p:nvSpPr>
+        <p:spPr>
+          <a:xfrm>
+            <a:off x="355600" y="1837267"/>
+            <a:ext cx="5020733" cy="3419802"/>
+          </a:xfrm>
+          <a:prstGeom prst="roundRect">
+            <a:avLst/>
+          </a:prstGeom>
+          <a:solidFill>
+            <a:schemeClr val="bg1">
+              <a:lumMod val="85000"/>
+            </a:schemeClr>
+          </a:solidFill>
+          <a:ln>
+            <a:noFill/>
+          </a:ln>
+        </p:spPr>
+        <p:style>
+          <a:lnRef idx="2">
+            <a:schemeClr val="accent1">
+              <a:shade val="50000"/>
+            </a:schemeClr>
+          </a:lnRef>
+          <a:fillRef idx="1">
+            <a:schemeClr val="accent1"/>
+          </a:fillRef>
+          <a:effectRef idx="0">
+            <a:schemeClr val="accent1"/>
+          </a:effectRef>
+          <a:fontRef idx="minor">
+            <a:schemeClr val="lt1"/>
+          </a:fontRef>
+        </p:style>
+        <p:txBody>
+          <a:bodyPr rtlCol="0" anchor="ctr"/>
+          <a:lstStyle/>
+          <a:p>
+            <a:pPr algn="ctr"/>
+            <a:endParaRPr kumimoji="1" lang="ja-JP" altLang="en-US"/>
+          </a:p>
+        </p:txBody>
+      </p:sp>
+      <p:sp>
+        <p:nvSpPr>
+          <p:cNvPr id="4" name="テキスト ボックス 3">
+            <a:extLst>
+              <a:ext uri="{FF2B5EF4-FFF2-40B4-BE49-F238E27FC236}">
+                <a16:creationId xmlns:a16="http://schemas.microsoft.com/office/drawing/2014/main" id="{5A13BF46-B8C5-48AA-8308-C9ECFF431A18}"/>
+              </a:ext>
+            </a:extLst>
+          </p:cNvPr>
+          <p:cNvSpPr txBox="1"/>
+          <p:nvPr/>
+        </p:nvSpPr>
+        <p:spPr>
+          <a:xfrm>
+            <a:off x="567542" y="491954"/>
+            <a:ext cx="1005403" cy="584775"/>
+          </a:xfrm>
+          <a:prstGeom prst="rect">
+            <a:avLst/>
+          </a:prstGeom>
+          <a:noFill/>
+        </p:spPr>
+        <p:txBody>
+          <a:bodyPr wrap="none" rtlCol="0">
+            <a:spAutoFit/>
+          </a:bodyPr>
+          <a:lstStyle/>
+          <a:p>
+            <a:r>
+              <a:rPr lang="ja-JP" altLang="en-US" sz="3200" b="1" u="sng" dirty="0"/>
+              <a:t>衝突</a:t>
+            </a:r>
+            <a:endParaRPr kumimoji="1" lang="en-US" altLang="ja-JP" sz="3200" b="1" u="sng" dirty="0"/>
+          </a:p>
+        </p:txBody>
+      </p:sp>
+      <mc:AlternateContent xmlns:mc="http://schemas.openxmlformats.org/markup-compatibility/2006">
+        <mc:Choice xmlns:a14="http://schemas.microsoft.com/office/drawing/2010/main" Requires="a14">
+          <p:sp>
+            <p:nvSpPr>
+              <p:cNvPr id="6" name="テキスト ボックス 5">
+                <a:extLst>
+                  <a:ext uri="{FF2B5EF4-FFF2-40B4-BE49-F238E27FC236}">
+                    <a16:creationId xmlns:a16="http://schemas.microsoft.com/office/drawing/2014/main" id="{55830AD6-028B-4C4E-80BF-B70DFC1C3A46}"/>
+                  </a:ext>
+                </a:extLst>
+              </p:cNvPr>
+              <p:cNvSpPr txBox="1"/>
+              <p:nvPr/>
+            </p:nvSpPr>
+            <p:spPr>
+              <a:xfrm>
+                <a:off x="567542" y="1216429"/>
+                <a:ext cx="6032421" cy="4639603"/>
+              </a:xfrm>
+              <a:prstGeom prst="rect">
+                <a:avLst/>
+              </a:prstGeom>
+              <a:noFill/>
+            </p:spPr>
+            <p:txBody>
+              <a:bodyPr wrap="none" rtlCol="0">
+                <a:spAutoFit/>
+              </a:bodyPr>
+              <a:lstStyle/>
+              <a:p>
+                <a:r>
+                  <a:rPr lang="ja-JP" altLang="en-US" sz="2400" dirty="0"/>
+                  <a:t>これまでを踏まえた衝突の定義です。</a:t>
+                </a:r>
+                <a:endParaRPr lang="en-US" altLang="ja-JP" sz="2400" dirty="0"/>
+              </a:p>
+              <a:p>
+                <a:endParaRPr lang="en-US" altLang="ja-JP" sz="2400" dirty="0"/>
+              </a:p>
+              <a:p>
+                <a:r>
+                  <a:rPr lang="ja-JP" altLang="en-US" sz="2400" b="1" dirty="0">
+                    <a:solidFill>
+                      <a:srgbClr val="FF0000"/>
+                    </a:solidFill>
+                  </a:rPr>
+                  <a:t>■一直線上の衝突（正面衝突）</a:t>
+                </a:r>
+                <a:endParaRPr lang="en-US" altLang="ja-JP" sz="2400" b="1" dirty="0">
+                  <a:solidFill>
+                    <a:srgbClr val="FF0000"/>
+                  </a:solidFill>
+                </a:endParaRPr>
+              </a:p>
+              <a:p>
+                <a14:m>
+                  <m:oMath xmlns:m="http://schemas.openxmlformats.org/officeDocument/2006/math">
+                    <m:d>
+                      <m:dPr>
+                        <m:ctrlPr>
+                          <a:rPr lang="en-US" altLang="ja-JP" sz="2400" b="0" i="1" smtClean="0">
+                            <a:latin typeface="Cambria Math" panose="02040503050406030204" pitchFamily="18" charset="0"/>
+                          </a:rPr>
+                        </m:ctrlPr>
+                      </m:dPr>
+                      <m:e>
+                        <m:sSub>
+                          <m:sSubPr>
+                            <m:ctrlPr>
+                              <a:rPr lang="en-US" altLang="ja-JP" sz="2400" b="0" i="1" smtClean="0">
+                                <a:latin typeface="Cambria Math" panose="02040503050406030204" pitchFamily="18" charset="0"/>
+                              </a:rPr>
+                            </m:ctrlPr>
+                          </m:sSubPr>
+                          <m:e>
+                            <m:r>
+                              <a:rPr lang="en-US" altLang="ja-JP" sz="2400" b="0" i="1" smtClean="0">
+                                <a:latin typeface="Cambria Math" panose="02040503050406030204" pitchFamily="18" charset="0"/>
+                              </a:rPr>
+                              <m:t>𝑣</m:t>
+                            </m:r>
+                          </m:e>
+                          <m:sub>
+                            <m:r>
+                              <a:rPr lang="en-US" altLang="ja-JP" sz="2400" b="0" i="1" smtClean="0">
+                                <a:latin typeface="Cambria Math" panose="02040503050406030204" pitchFamily="18" charset="0"/>
+                              </a:rPr>
+                              <m:t>1</m:t>
+                            </m:r>
+                            <m:r>
+                              <a:rPr lang="en-US" altLang="ja-JP" sz="2400" b="0" i="1" smtClean="0">
+                                <a:latin typeface="Cambria Math" panose="02040503050406030204" pitchFamily="18" charset="0"/>
+                              </a:rPr>
+                              <m:t>𝑓</m:t>
+                            </m:r>
+                          </m:sub>
+                        </m:sSub>
+                        <m:r>
+                          <a:rPr lang="en-US" altLang="ja-JP" sz="2400" b="0" i="1" smtClean="0">
+                            <a:latin typeface="Cambria Math" panose="02040503050406030204" pitchFamily="18" charset="0"/>
+                          </a:rPr>
+                          <m:t>−</m:t>
+                        </m:r>
+                        <m:sSub>
+                          <m:sSubPr>
+                            <m:ctrlPr>
+                              <a:rPr lang="en-US" altLang="ja-JP" sz="2400" i="1">
+                                <a:latin typeface="Cambria Math" panose="02040503050406030204" pitchFamily="18" charset="0"/>
+                              </a:rPr>
+                            </m:ctrlPr>
+                          </m:sSubPr>
+                          <m:e>
+                            <m:r>
+                              <a:rPr lang="en-US" altLang="ja-JP" sz="2400" i="1">
+                                <a:latin typeface="Cambria Math" panose="02040503050406030204" pitchFamily="18" charset="0"/>
+                              </a:rPr>
+                              <m:t>𝑣</m:t>
+                            </m:r>
+                          </m:e>
+                          <m:sub>
+                            <m:r>
+                              <a:rPr lang="en-US" altLang="ja-JP" sz="2400" b="0" i="1" smtClean="0">
+                                <a:latin typeface="Cambria Math" panose="02040503050406030204" pitchFamily="18" charset="0"/>
+                              </a:rPr>
+                              <m:t>2</m:t>
+                            </m:r>
+                            <m:r>
+                              <a:rPr lang="en-US" altLang="ja-JP" sz="2400" i="1">
+                                <a:latin typeface="Cambria Math" panose="02040503050406030204" pitchFamily="18" charset="0"/>
+                              </a:rPr>
+                              <m:t>𝑓</m:t>
+                            </m:r>
+                          </m:sub>
+                        </m:sSub>
+                      </m:e>
+                    </m:d>
+                    <m:r>
+                      <a:rPr lang="en-US" altLang="ja-JP" sz="2400" b="0" i="1" smtClean="0">
+                        <a:latin typeface="Cambria Math" panose="02040503050406030204" pitchFamily="18" charset="0"/>
+                      </a:rPr>
+                      <m:t>=−</m:t>
+                    </m:r>
+                    <m:r>
+                      <a:rPr lang="en-US" altLang="ja-JP" sz="2400" b="0" i="1" smtClean="0">
+                        <a:latin typeface="Cambria Math" panose="02040503050406030204" pitchFamily="18" charset="0"/>
+                      </a:rPr>
+                      <m:t>𝑒</m:t>
+                    </m:r>
+                    <m:r>
+                      <a:rPr lang="en-US" altLang="ja-JP" sz="2400" b="0" i="1" smtClean="0">
+                        <a:latin typeface="Cambria Math" panose="02040503050406030204" pitchFamily="18" charset="0"/>
+                      </a:rPr>
+                      <m:t>(</m:t>
+                    </m:r>
+                    <m:sSub>
+                      <m:sSubPr>
+                        <m:ctrlPr>
+                          <a:rPr lang="en-US" altLang="ja-JP" sz="2400" i="1">
+                            <a:latin typeface="Cambria Math" panose="02040503050406030204" pitchFamily="18" charset="0"/>
+                          </a:rPr>
+                        </m:ctrlPr>
+                      </m:sSubPr>
+                      <m:e>
+                        <m:r>
+                          <a:rPr lang="en-US" altLang="ja-JP" sz="2400" i="1">
+                            <a:latin typeface="Cambria Math" panose="02040503050406030204" pitchFamily="18" charset="0"/>
+                          </a:rPr>
+                          <m:t>𝑣</m:t>
+                        </m:r>
+                      </m:e>
+                      <m:sub>
+                        <m:r>
+                          <a:rPr lang="en-US" altLang="ja-JP" sz="2400" i="1">
+                            <a:latin typeface="Cambria Math" panose="02040503050406030204" pitchFamily="18" charset="0"/>
+                          </a:rPr>
+                          <m:t>1</m:t>
+                        </m:r>
+                        <m:r>
+                          <a:rPr lang="en-US" altLang="ja-JP" sz="2400" b="0" i="1" smtClean="0">
+                            <a:latin typeface="Cambria Math" panose="02040503050406030204" pitchFamily="18" charset="0"/>
+                          </a:rPr>
+                          <m:t>𝑖</m:t>
+                        </m:r>
+                      </m:sub>
+                    </m:sSub>
+                    <m:r>
+                      <a:rPr lang="en-US" altLang="ja-JP" sz="2400" i="1">
+                        <a:latin typeface="Cambria Math" panose="02040503050406030204" pitchFamily="18" charset="0"/>
+                      </a:rPr>
+                      <m:t>−</m:t>
+                    </m:r>
+                    <m:sSub>
+                      <m:sSubPr>
+                        <m:ctrlPr>
+                          <a:rPr lang="en-US" altLang="ja-JP" sz="2400" i="1">
+                            <a:latin typeface="Cambria Math" panose="02040503050406030204" pitchFamily="18" charset="0"/>
+                          </a:rPr>
+                        </m:ctrlPr>
+                      </m:sSubPr>
+                      <m:e>
+                        <m:r>
+                          <a:rPr lang="en-US" altLang="ja-JP" sz="2400" i="1">
+                            <a:latin typeface="Cambria Math" panose="02040503050406030204" pitchFamily="18" charset="0"/>
+                          </a:rPr>
+                          <m:t>𝑣</m:t>
+                        </m:r>
+                      </m:e>
+                      <m:sub>
+                        <m:r>
+                          <a:rPr lang="en-US" altLang="ja-JP" sz="2400" i="1">
+                            <a:latin typeface="Cambria Math" panose="02040503050406030204" pitchFamily="18" charset="0"/>
+                          </a:rPr>
+                          <m:t>2</m:t>
+                        </m:r>
+                        <m:r>
+                          <a:rPr lang="en-US" altLang="ja-JP" sz="2400" b="0" i="1" smtClean="0">
+                            <a:latin typeface="Cambria Math" panose="02040503050406030204" pitchFamily="18" charset="0"/>
+                          </a:rPr>
+                          <m:t>𝑖</m:t>
+                        </m:r>
+                      </m:sub>
+                    </m:sSub>
+                    <m:r>
+                      <a:rPr lang="en-US" altLang="ja-JP" sz="2400" b="0" i="1" smtClean="0">
+                        <a:latin typeface="Cambria Math" panose="02040503050406030204" pitchFamily="18" charset="0"/>
+                      </a:rPr>
+                      <m:t>)</m:t>
+                    </m:r>
+                  </m:oMath>
+                </a14:m>
+                <a:r>
+                  <a:rPr lang="en-US" altLang="ja-JP" sz="2400" dirty="0"/>
+                  <a:t> </a:t>
+                </a:r>
+              </a:p>
+              <a:p>
+                <a:endParaRPr lang="en-US" altLang="ja-JP" sz="2400" dirty="0"/>
+              </a:p>
+              <a:p>
+                <a14:m>
+                  <m:oMath xmlns:m="http://schemas.openxmlformats.org/officeDocument/2006/math">
+                    <m:sSub>
+                      <m:sSubPr>
+                        <m:ctrlPr>
+                          <a:rPr lang="en-US" altLang="ja-JP" sz="2400" i="1" smtClean="0">
+                            <a:latin typeface="Cambria Math" panose="02040503050406030204" pitchFamily="18" charset="0"/>
+                          </a:rPr>
+                        </m:ctrlPr>
+                      </m:sSubPr>
+                      <m:e>
+                        <m:r>
+                          <a:rPr lang="en-US" altLang="ja-JP" sz="2400" i="1">
+                            <a:latin typeface="Cambria Math" panose="02040503050406030204" pitchFamily="18" charset="0"/>
+                          </a:rPr>
+                          <m:t>𝑣</m:t>
+                        </m:r>
+                      </m:e>
+                      <m:sub>
+                        <m:r>
+                          <a:rPr lang="en-US" altLang="ja-JP" sz="2400" i="1">
+                            <a:latin typeface="Cambria Math" panose="02040503050406030204" pitchFamily="18" charset="0"/>
+                          </a:rPr>
+                          <m:t>1</m:t>
+                        </m:r>
+                        <m:r>
+                          <a:rPr lang="en-US" altLang="ja-JP" sz="2400" b="0" i="1" smtClean="0">
+                            <a:latin typeface="Cambria Math" panose="02040503050406030204" pitchFamily="18" charset="0"/>
+                          </a:rPr>
+                          <m:t>𝑖</m:t>
+                        </m:r>
+                      </m:sub>
+                    </m:sSub>
+                  </m:oMath>
+                </a14:m>
+                <a:r>
+                  <a:rPr lang="en-US" altLang="ja-JP" sz="2400" dirty="0"/>
+                  <a:t>	</a:t>
+                </a:r>
+                <a:r>
+                  <a:rPr lang="ja-JP" altLang="en-US" sz="2400" dirty="0"/>
+                  <a:t>・・・物体１の初速度</a:t>
+                </a:r>
+                <a:endParaRPr lang="en-US" altLang="ja-JP" sz="2400" dirty="0"/>
+              </a:p>
+              <a:p>
+                <a14:m>
+                  <m:oMath xmlns:m="http://schemas.openxmlformats.org/officeDocument/2006/math">
+                    <m:sSub>
+                      <m:sSubPr>
+                        <m:ctrlPr>
+                          <a:rPr lang="en-US" altLang="ja-JP" sz="2400" b="0" i="1" smtClean="0">
+                            <a:latin typeface="Cambria Math" panose="02040503050406030204" pitchFamily="18" charset="0"/>
+                          </a:rPr>
+                        </m:ctrlPr>
+                      </m:sSubPr>
+                      <m:e>
+                        <m:r>
+                          <a:rPr lang="en-US" altLang="ja-JP" sz="2400" b="0" i="1" smtClean="0">
+                            <a:latin typeface="Cambria Math" panose="02040503050406030204" pitchFamily="18" charset="0"/>
+                          </a:rPr>
+                          <m:t>𝑣</m:t>
+                        </m:r>
+                      </m:e>
+                      <m:sub>
+                        <m:r>
+                          <a:rPr lang="en-US" altLang="ja-JP" sz="2400" b="0" i="1" smtClean="0">
+                            <a:latin typeface="Cambria Math" panose="02040503050406030204" pitchFamily="18" charset="0"/>
+                          </a:rPr>
+                          <m:t>1</m:t>
+                        </m:r>
+                        <m:r>
+                          <a:rPr lang="en-US" altLang="ja-JP" sz="2400" b="0" i="1" smtClean="0">
+                            <a:latin typeface="Cambria Math" panose="02040503050406030204" pitchFamily="18" charset="0"/>
+                          </a:rPr>
+                          <m:t>𝑓</m:t>
+                        </m:r>
+                      </m:sub>
+                    </m:sSub>
+                  </m:oMath>
+                </a14:m>
+                <a:r>
+                  <a:rPr lang="en-US" altLang="ja-JP" sz="2400" dirty="0"/>
+                  <a:t>	</a:t>
+                </a:r>
+                <a:r>
+                  <a:rPr lang="ja-JP" altLang="en-US" sz="2400" dirty="0"/>
+                  <a:t>・・・物体１の最終速度</a:t>
+                </a:r>
+                <a:endParaRPr lang="en-US" altLang="ja-JP" sz="2400" dirty="0"/>
+              </a:p>
+              <a:p>
+                <a14:m>
+                  <m:oMath xmlns:m="http://schemas.openxmlformats.org/officeDocument/2006/math">
+                    <m:sSub>
+                      <m:sSubPr>
+                        <m:ctrlPr>
+                          <a:rPr lang="en-US" altLang="ja-JP" sz="2400" i="1" smtClean="0">
+                            <a:latin typeface="Cambria Math" panose="02040503050406030204" pitchFamily="18" charset="0"/>
+                          </a:rPr>
+                        </m:ctrlPr>
+                      </m:sSubPr>
+                      <m:e>
+                        <m:r>
+                          <a:rPr lang="en-US" altLang="ja-JP" sz="2400" i="1">
+                            <a:latin typeface="Cambria Math" panose="02040503050406030204" pitchFamily="18" charset="0"/>
+                          </a:rPr>
+                          <m:t>𝑣</m:t>
+                        </m:r>
+                      </m:e>
+                      <m:sub>
+                        <m:r>
+                          <a:rPr lang="en-US" altLang="ja-JP" sz="2400" b="0" i="1" smtClean="0">
+                            <a:latin typeface="Cambria Math" panose="02040503050406030204" pitchFamily="18" charset="0"/>
+                          </a:rPr>
+                          <m:t>2</m:t>
+                        </m:r>
+                        <m:r>
+                          <a:rPr lang="en-US" altLang="ja-JP" sz="2400" b="0" i="1" smtClean="0">
+                            <a:latin typeface="Cambria Math" panose="02040503050406030204" pitchFamily="18" charset="0"/>
+                          </a:rPr>
+                          <m:t>𝑖</m:t>
+                        </m:r>
+                      </m:sub>
+                    </m:sSub>
+                  </m:oMath>
+                </a14:m>
+                <a:r>
+                  <a:rPr lang="en-US" altLang="ja-JP" sz="2400" dirty="0"/>
+                  <a:t>	</a:t>
+                </a:r>
+                <a:r>
+                  <a:rPr lang="ja-JP" altLang="en-US" sz="2400" dirty="0"/>
+                  <a:t>・・・物体２の初速度</a:t>
+                </a:r>
+                <a:endParaRPr lang="en-US" altLang="ja-JP" sz="2400" dirty="0"/>
+              </a:p>
+              <a:p>
+                <a14:m>
+                  <m:oMath xmlns:m="http://schemas.openxmlformats.org/officeDocument/2006/math">
+                    <m:sSub>
+                      <m:sSubPr>
+                        <m:ctrlPr>
+                          <a:rPr lang="en-US" altLang="ja-JP" sz="2400" b="0" i="1" smtClean="0">
+                            <a:latin typeface="Cambria Math" panose="02040503050406030204" pitchFamily="18" charset="0"/>
+                          </a:rPr>
+                        </m:ctrlPr>
+                      </m:sSubPr>
+                      <m:e>
+                        <m:r>
+                          <a:rPr lang="en-US" altLang="ja-JP" sz="2400" b="0" i="1" smtClean="0">
+                            <a:latin typeface="Cambria Math" panose="02040503050406030204" pitchFamily="18" charset="0"/>
+                          </a:rPr>
+                          <m:t>𝑣</m:t>
+                        </m:r>
+                      </m:e>
+                      <m:sub>
+                        <m:r>
+                          <a:rPr lang="en-US" altLang="ja-JP" sz="2400" b="0" i="1" smtClean="0">
+                            <a:latin typeface="Cambria Math" panose="02040503050406030204" pitchFamily="18" charset="0"/>
+                          </a:rPr>
+                          <m:t>2</m:t>
+                        </m:r>
+                        <m:r>
+                          <a:rPr lang="en-US" altLang="ja-JP" sz="2400" b="0" i="1" smtClean="0">
+                            <a:latin typeface="Cambria Math" panose="02040503050406030204" pitchFamily="18" charset="0"/>
+                          </a:rPr>
+                          <m:t>𝑓</m:t>
+                        </m:r>
+                      </m:sub>
+                    </m:sSub>
+                  </m:oMath>
+                </a14:m>
+                <a:r>
+                  <a:rPr lang="en-US" altLang="ja-JP" sz="2400" dirty="0"/>
+                  <a:t>	</a:t>
+                </a:r>
+                <a:r>
+                  <a:rPr lang="ja-JP" altLang="en-US" sz="2400" dirty="0"/>
+                  <a:t>・・・物体２の最終速度</a:t>
+                </a:r>
+                <a:endParaRPr lang="en-US" altLang="ja-JP" sz="2400" dirty="0"/>
+              </a:p>
+              <a:p>
+                <a14:m>
+                  <m:oMath xmlns:m="http://schemas.openxmlformats.org/officeDocument/2006/math">
+                    <m:r>
+                      <a:rPr lang="en-US" altLang="ja-JP" sz="2400" b="0" i="1" smtClean="0">
+                        <a:latin typeface="Cambria Math" panose="02040503050406030204" pitchFamily="18" charset="0"/>
+                      </a:rPr>
+                      <m:t>𝑒</m:t>
+                    </m:r>
+                  </m:oMath>
+                </a14:m>
+                <a:r>
+                  <a:rPr lang="en-US" altLang="ja-JP" sz="2400" dirty="0"/>
+                  <a:t>	</a:t>
+                </a:r>
+                <a:r>
+                  <a:rPr lang="ja-JP" altLang="en-US" sz="2400" dirty="0"/>
+                  <a:t>・・・はねかえり係数</a:t>
+                </a:r>
+                <a:endParaRPr lang="en-US" altLang="ja-JP" sz="2400" dirty="0"/>
+              </a:p>
+              <a:p>
+                <a:endParaRPr lang="en-US" altLang="ja-JP" sz="2400" dirty="0"/>
+              </a:p>
+              <a:p>
+                <a:r>
+                  <a:rPr lang="en-US" altLang="ja-JP" sz="2400" dirty="0"/>
+                  <a:t>※</a:t>
+                </a:r>
+                <a:r>
+                  <a:rPr lang="ja-JP" altLang="en-US" sz="2400" dirty="0"/>
+                  <a:t>かすめるような衝突はまた違ってきます</a:t>
+                </a:r>
+                <a:endParaRPr lang="en-US" altLang="ja-JP" sz="2400" dirty="0"/>
+              </a:p>
+            </p:txBody>
+          </p:sp>
+        </mc:Choice>
+        <mc:Fallback>
+          <p:sp>
+            <p:nvSpPr>
+              <p:cNvPr id="6" name="テキスト ボックス 5">
+                <a:extLst>
+                  <a:ext uri="{FF2B5EF4-FFF2-40B4-BE49-F238E27FC236}">
+                    <a16:creationId xmlns:a16="http://schemas.microsoft.com/office/drawing/2014/main" id="{55830AD6-028B-4C4E-80BF-B70DFC1C3A46}"/>
+                  </a:ext>
+                </a:extLst>
+              </p:cNvPr>
+              <p:cNvSpPr txBox="1">
+                <a:spLocks noRot="1" noChangeAspect="1" noMove="1" noResize="1" noEditPoints="1" noAdjustHandles="1" noChangeArrowheads="1" noChangeShapeType="1" noTextEdit="1"/>
+              </p:cNvSpPr>
+              <p:nvPr/>
+            </p:nvSpPr>
+            <p:spPr>
+              <a:xfrm>
+                <a:off x="567542" y="1216429"/>
+                <a:ext cx="6032421" cy="4639603"/>
+              </a:xfrm>
+              <a:prstGeom prst="rect">
+                <a:avLst/>
+              </a:prstGeom>
+              <a:blipFill>
+                <a:blip r:embed="rId2"/>
+                <a:stretch>
+                  <a:fillRect l="-1515" t="-1051" r="-606" b="-2102"/>
+                </a:stretch>
+              </a:blipFill>
+            </p:spPr>
+            <p:txBody>
+              <a:bodyPr/>
+              <a:lstStyle/>
+              <a:p>
+                <a:r>
+                  <a:rPr lang="ja-JP" altLang="en-US">
+                    <a:noFill/>
+                  </a:rPr>
+                  <a:t> </a:t>
+                </a:r>
+              </a:p>
+            </p:txBody>
+          </p:sp>
+        </mc:Fallback>
+      </mc:AlternateContent>
+    </p:spTree>
+    <p:extLst>
+      <p:ext uri="{BB962C8B-B14F-4D97-AF65-F5344CB8AC3E}">
+        <p14:creationId xmlns:p14="http://schemas.microsoft.com/office/powerpoint/2010/main" val="126602269"/>
       </p:ext>
     </p:extLst>
   </p:cSld>

--- a/ゲーム科2年/00_前期/ゲーム開発Ⅲ/ゲーム物理学/座学/26_衝突.pptx
+++ b/ゲーム科2年/00_前期/ゲーム開発Ⅲ/ゲーム物理学/座学/26_衝突.pptx
@@ -271,7 +271,7 @@
           <a:p>
             <a:fld id="{E9CC885B-4903-4D54-9A93-00025F12DED9}" type="datetimeFigureOut">
               <a:rPr kumimoji="1" lang="ja-JP" altLang="en-US" smtClean="0"/>
-              <a:t>2025/10/28</a:t>
+              <a:t>2025/10/31</a:t>
             </a:fld>
             <a:endParaRPr kumimoji="1" lang="ja-JP" altLang="en-US"/>
           </a:p>
@@ -501,7 +501,7 @@
           <a:p>
             <a:fld id="{E9CC885B-4903-4D54-9A93-00025F12DED9}" type="datetimeFigureOut">
               <a:rPr kumimoji="1" lang="ja-JP" altLang="en-US" smtClean="0"/>
-              <a:t>2025/10/28</a:t>
+              <a:t>2025/10/31</a:t>
             </a:fld>
             <a:endParaRPr kumimoji="1" lang="ja-JP" altLang="en-US"/>
           </a:p>
@@ -741,7 +741,7 @@
           <a:p>
             <a:fld id="{E9CC885B-4903-4D54-9A93-00025F12DED9}" type="datetimeFigureOut">
               <a:rPr kumimoji="1" lang="ja-JP" altLang="en-US" smtClean="0"/>
-              <a:t>2025/10/28</a:t>
+              <a:t>2025/10/31</a:t>
             </a:fld>
             <a:endParaRPr kumimoji="1" lang="ja-JP" altLang="en-US"/>
           </a:p>
@@ -971,7 +971,7 @@
           <a:p>
             <a:fld id="{E9CC885B-4903-4D54-9A93-00025F12DED9}" type="datetimeFigureOut">
               <a:rPr kumimoji="1" lang="ja-JP" altLang="en-US" smtClean="0"/>
-              <a:t>2025/10/28</a:t>
+              <a:t>2025/10/31</a:t>
             </a:fld>
             <a:endParaRPr kumimoji="1" lang="ja-JP" altLang="en-US"/>
           </a:p>
@@ -1246,7 +1246,7 @@
           <a:p>
             <a:fld id="{E9CC885B-4903-4D54-9A93-00025F12DED9}" type="datetimeFigureOut">
               <a:rPr kumimoji="1" lang="ja-JP" altLang="en-US" smtClean="0"/>
-              <a:t>2025/10/28</a:t>
+              <a:t>2025/10/31</a:t>
             </a:fld>
             <a:endParaRPr kumimoji="1" lang="ja-JP" altLang="en-US"/>
           </a:p>
@@ -1575,7 +1575,7 @@
           <a:p>
             <a:fld id="{E9CC885B-4903-4D54-9A93-00025F12DED9}" type="datetimeFigureOut">
               <a:rPr kumimoji="1" lang="ja-JP" altLang="en-US" smtClean="0"/>
-              <a:t>2025/10/28</a:t>
+              <a:t>2025/10/31</a:t>
             </a:fld>
             <a:endParaRPr kumimoji="1" lang="ja-JP" altLang="en-US"/>
           </a:p>
@@ -2051,7 +2051,7 @@
           <a:p>
             <a:fld id="{E9CC885B-4903-4D54-9A93-00025F12DED9}" type="datetimeFigureOut">
               <a:rPr kumimoji="1" lang="ja-JP" altLang="en-US" smtClean="0"/>
-              <a:t>2025/10/28</a:t>
+              <a:t>2025/10/31</a:t>
             </a:fld>
             <a:endParaRPr kumimoji="1" lang="ja-JP" altLang="en-US"/>
           </a:p>
@@ -2192,7 +2192,7 @@
           <a:p>
             <a:fld id="{E9CC885B-4903-4D54-9A93-00025F12DED9}" type="datetimeFigureOut">
               <a:rPr kumimoji="1" lang="ja-JP" altLang="en-US" smtClean="0"/>
-              <a:t>2025/10/28</a:t>
+              <a:t>2025/10/31</a:t>
             </a:fld>
             <a:endParaRPr kumimoji="1" lang="ja-JP" altLang="en-US"/>
           </a:p>
@@ -2305,7 +2305,7 @@
           <a:p>
             <a:fld id="{E9CC885B-4903-4D54-9A93-00025F12DED9}" type="datetimeFigureOut">
               <a:rPr kumimoji="1" lang="ja-JP" altLang="en-US" smtClean="0"/>
-              <a:t>2025/10/28</a:t>
+              <a:t>2025/10/31</a:t>
             </a:fld>
             <a:endParaRPr kumimoji="1" lang="ja-JP" altLang="en-US"/>
           </a:p>
@@ -2648,7 +2648,7 @@
           <a:p>
             <a:fld id="{E9CC885B-4903-4D54-9A93-00025F12DED9}" type="datetimeFigureOut">
               <a:rPr kumimoji="1" lang="ja-JP" altLang="en-US" smtClean="0"/>
-              <a:t>2025/10/28</a:t>
+              <a:t>2025/10/31</a:t>
             </a:fld>
             <a:endParaRPr kumimoji="1" lang="ja-JP" altLang="en-US"/>
           </a:p>
@@ -2936,7 +2936,7 @@
           <a:p>
             <a:fld id="{E9CC885B-4903-4D54-9A93-00025F12DED9}" type="datetimeFigureOut">
               <a:rPr kumimoji="1" lang="ja-JP" altLang="en-US" smtClean="0"/>
-              <a:t>2025/10/28</a:t>
+              <a:t>2025/10/31</a:t>
             </a:fld>
             <a:endParaRPr kumimoji="1" lang="ja-JP" altLang="en-US"/>
           </a:p>
@@ -3209,7 +3209,7 @@
           <a:p>
             <a:fld id="{E9CC885B-4903-4D54-9A93-00025F12DED9}" type="datetimeFigureOut">
               <a:rPr kumimoji="1" lang="ja-JP" altLang="en-US" smtClean="0"/>
-              <a:t>2025/10/28</a:t>
+              <a:t>2025/10/31</a:t>
             </a:fld>
             <a:endParaRPr kumimoji="1" lang="ja-JP" altLang="en-US"/>
           </a:p>
@@ -3834,8 +3834,8 @@
           </a:p>
         </p:txBody>
       </p:sp>
-      <mc:AlternateContent xmlns:mc="http://schemas.openxmlformats.org/markup-compatibility/2006">
-        <mc:Choice xmlns:a14="http://schemas.microsoft.com/office/drawing/2010/main" Requires="a14">
+      <mc:AlternateContent xmlns:mc="http://schemas.openxmlformats.org/markup-compatibility/2006" xmlns:a14="http://schemas.microsoft.com/office/drawing/2010/main">
+        <mc:Choice Requires="a14">
           <p:sp>
             <p:nvSpPr>
               <p:cNvPr id="6" name="テキスト ボックス 5">
@@ -4488,16 +4488,7 @@
                         </a:solidFill>
                         <a:latin typeface="Cambria Math" panose="02040503050406030204" pitchFamily="18" charset="0"/>
                       </a:rPr>
-                      <m:t>−40)</m:t>
-                    </m:r>
-                    <m:r>
-                      <a:rPr lang="en-US" altLang="ja-JP" sz="2400" b="0" i="1" smtClean="0">
-                        <a:solidFill>
-                          <a:schemeClr val="tx1"/>
-                        </a:solidFill>
-                        <a:latin typeface="Cambria Math" panose="02040503050406030204" pitchFamily="18" charset="0"/>
-                      </a:rPr>
-                      <m:t>=</m:t>
+                      <m:t>−40)=</m:t>
                     </m:r>
                     <m:r>
                       <a:rPr lang="en-US" altLang="ja-JP" sz="2400" i="1" smtClean="0">
@@ -4662,16 +4653,7 @@
                         </a:solidFill>
                         <a:latin typeface="Cambria Math" panose="02040503050406030204" pitchFamily="18" charset="0"/>
                       </a:rPr>
-                      <m:t>−32</m:t>
-                    </m:r>
-                    <m:r>
-                      <a:rPr lang="en-US" altLang="ja-JP" sz="2400" b="0" i="1" smtClean="0">
-                        <a:solidFill>
-                          <a:schemeClr val="tx1"/>
-                        </a:solidFill>
-                        <a:latin typeface="Cambria Math" panose="02040503050406030204" pitchFamily="18" charset="0"/>
-                      </a:rPr>
-                      <m:t>)=0.5</m:t>
+                      <m:t>−32)=0.5</m:t>
                     </m:r>
                     <m:sSub>
                       <m:sSubPr>
@@ -4828,13 +4810,7 @@
                       <a:rPr lang="en-US" altLang="ja-JP" sz="2400" i="1">
                         <a:latin typeface="Cambria Math" panose="02040503050406030204" pitchFamily="18" charset="0"/>
                       </a:rPr>
-                      <m:t>+</m:t>
-                    </m:r>
-                    <m:r>
-                      <a:rPr lang="en-US" altLang="ja-JP" sz="2400" i="1">
-                        <a:latin typeface="Cambria Math" panose="02040503050406030204" pitchFamily="18" charset="0"/>
-                      </a:rPr>
-                      <m:t>0.8</m:t>
+                      <m:t>+0.8</m:t>
                     </m:r>
                     <m:sSub>
                       <m:sSubPr>
@@ -4897,7 +4873,7 @@
             </p:txBody>
           </p:sp>
         </mc:Choice>
-        <mc:Fallback>
+        <mc:Fallback xmlns="">
           <p:sp>
             <p:nvSpPr>
               <p:cNvPr id="6" name="テキスト ボックス 5">
@@ -5008,8 +4984,8 @@
           </a:p>
         </p:txBody>
       </p:sp>
-      <mc:AlternateContent xmlns:mc="http://schemas.openxmlformats.org/markup-compatibility/2006">
-        <mc:Choice xmlns:a14="http://schemas.microsoft.com/office/drawing/2010/main" Requires="a14">
+      <mc:AlternateContent xmlns:mc="http://schemas.openxmlformats.org/markup-compatibility/2006" xmlns:a14="http://schemas.microsoft.com/office/drawing/2010/main">
+        <mc:Choice Requires="a14">
           <p:sp>
             <p:nvSpPr>
               <p:cNvPr id="6" name="テキスト ボックス 5">
@@ -5482,55 +5458,37 @@
                       <a:rPr lang="en-US" altLang="ja-JP" sz="2400" b="0" i="1" smtClean="0">
                         <a:latin typeface="Cambria Math" panose="02040503050406030204" pitchFamily="18" charset="0"/>
                       </a:rPr>
-                      <m:t>=−</m:t>
+                      <m:t>=−0.2(</m:t>
+                    </m:r>
+                    <m:r>
+                      <a:rPr lang="en-US" altLang="ja-JP" sz="2400" i="1" smtClean="0">
+                        <a:latin typeface="Cambria Math" panose="02040503050406030204" pitchFamily="18" charset="0"/>
+                      </a:rPr>
+                      <m:t>3</m:t>
                     </m:r>
                     <m:r>
                       <a:rPr lang="en-US" altLang="ja-JP" sz="2400" b="0" i="1" smtClean="0">
                         <a:latin typeface="Cambria Math" panose="02040503050406030204" pitchFamily="18" charset="0"/>
                       </a:rPr>
-                      <m:t>0.2</m:t>
+                      <m:t>0</m:t>
+                    </m:r>
+                    <m:r>
+                      <a:rPr lang="en-US" altLang="ja-JP" sz="2400" i="1">
+                        <a:latin typeface="Cambria Math" panose="02040503050406030204" pitchFamily="18" charset="0"/>
+                      </a:rPr>
+                      <m:t>−</m:t>
+                    </m:r>
+                    <m:r>
+                      <a:rPr lang="en-US" altLang="ja-JP" sz="2400" i="1" smtClean="0">
+                        <a:latin typeface="Cambria Math" panose="02040503050406030204" pitchFamily="18" charset="0"/>
+                      </a:rPr>
+                      <m:t>(</m:t>
                     </m:r>
                     <m:r>
                       <a:rPr lang="en-US" altLang="ja-JP" sz="2400" b="0" i="1" smtClean="0">
                         <a:latin typeface="Cambria Math" panose="02040503050406030204" pitchFamily="18" charset="0"/>
                       </a:rPr>
-                      <m:t>(</m:t>
-                    </m:r>
-                    <m:r>
-                      <a:rPr lang="en-US" altLang="ja-JP" sz="2400" i="1" smtClean="0">
-                        <a:latin typeface="Cambria Math" panose="02040503050406030204" pitchFamily="18" charset="0"/>
-                      </a:rPr>
-                      <m:t>3</m:t>
-                    </m:r>
-                    <m:r>
-                      <a:rPr lang="en-US" altLang="ja-JP" sz="2400" b="0" i="1" smtClean="0">
-                        <a:latin typeface="Cambria Math" panose="02040503050406030204" pitchFamily="18" charset="0"/>
-                      </a:rPr>
-                      <m:t>0</m:t>
-                    </m:r>
-                    <m:r>
-                      <a:rPr lang="en-US" altLang="ja-JP" sz="2400" i="1">
-                        <a:latin typeface="Cambria Math" panose="02040503050406030204" pitchFamily="18" charset="0"/>
-                      </a:rPr>
-                      <m:t>−</m:t>
-                    </m:r>
-                    <m:r>
-                      <a:rPr lang="en-US" altLang="ja-JP" sz="2400" i="1" smtClean="0">
-                        <a:latin typeface="Cambria Math" panose="02040503050406030204" pitchFamily="18" charset="0"/>
-                      </a:rPr>
-                      <m:t>(</m:t>
-                    </m:r>
-                    <m:r>
-                      <a:rPr lang="en-US" altLang="ja-JP" sz="2400" b="0" i="1" smtClean="0">
-                        <a:latin typeface="Cambria Math" panose="02040503050406030204" pitchFamily="18" charset="0"/>
-                      </a:rPr>
-                      <m:t>−40)</m:t>
-                    </m:r>
-                    <m:r>
-                      <a:rPr lang="en-US" altLang="ja-JP" sz="2400" b="0" i="1" smtClean="0">
-                        <a:latin typeface="Cambria Math" panose="02040503050406030204" pitchFamily="18" charset="0"/>
-                      </a:rPr>
-                      <m:t>)</m:t>
+                      <m:t>−40))</m:t>
                     </m:r>
                   </m:oMath>
                 </a14:m>
@@ -5620,13 +5578,7 @@
                       <a:rPr lang="en-US" altLang="ja-JP" sz="2400" b="0" i="1" smtClean="0">
                         <a:latin typeface="Cambria Math" panose="02040503050406030204" pitchFamily="18" charset="0"/>
                       </a:rPr>
-                      <m:t>=−</m:t>
-                    </m:r>
-                    <m:r>
-                      <a:rPr lang="en-US" altLang="ja-JP" sz="2400" b="0" i="1" smtClean="0">
-                        <a:latin typeface="Cambria Math" panose="02040503050406030204" pitchFamily="18" charset="0"/>
-                      </a:rPr>
-                      <m:t>14</m:t>
+                      <m:t>=−14</m:t>
                     </m:r>
                   </m:oMath>
                 </a14:m>
@@ -5650,7 +5602,7 @@
             </p:txBody>
           </p:sp>
         </mc:Choice>
-        <mc:Fallback>
+        <mc:Fallback xmlns="">
           <p:sp>
             <p:nvSpPr>
               <p:cNvPr id="6" name="テキスト ボックス 5">
@@ -5761,8 +5713,8 @@
           </a:p>
         </p:txBody>
       </p:sp>
-      <mc:AlternateContent xmlns:mc="http://schemas.openxmlformats.org/markup-compatibility/2006">
-        <mc:Choice xmlns:a14="http://schemas.microsoft.com/office/drawing/2010/main" Requires="a14">
+      <mc:AlternateContent xmlns:mc="http://schemas.openxmlformats.org/markup-compatibility/2006" xmlns:a14="http://schemas.microsoft.com/office/drawing/2010/main">
+        <mc:Choice Requires="a14">
           <p:sp>
             <p:nvSpPr>
               <p:cNvPr id="6" name="テキスト ボックス 5">
@@ -6181,13 +6133,7 @@
                       <a:rPr lang="en-US" altLang="ja-JP" sz="2400" b="0" i="1" smtClean="0">
                         <a:latin typeface="Cambria Math" panose="02040503050406030204" pitchFamily="18" charset="0"/>
                       </a:rPr>
-                      <m:t>=−</m:t>
-                    </m:r>
-                    <m:r>
-                      <a:rPr lang="en-US" altLang="ja-JP" sz="2400" b="0" i="1" smtClean="0">
-                        <a:latin typeface="Cambria Math" panose="02040503050406030204" pitchFamily="18" charset="0"/>
-                      </a:rPr>
-                      <m:t>7</m:t>
+                      <m:t>=−7</m:t>
                     </m:r>
                   </m:oMath>
                 </a14:m>
@@ -6332,7 +6278,7 @@
             </p:txBody>
           </p:sp>
         </mc:Choice>
-        <mc:Fallback>
+        <mc:Fallback xmlns="">
           <p:sp>
             <p:nvSpPr>
               <p:cNvPr id="6" name="テキスト ボックス 5">
@@ -6443,8 +6389,8 @@
           </a:p>
         </p:txBody>
       </p:sp>
-      <mc:AlternateContent xmlns:mc="http://schemas.openxmlformats.org/markup-compatibility/2006">
-        <mc:Choice xmlns:a14="http://schemas.microsoft.com/office/drawing/2010/main" Requires="a14">
+      <mc:AlternateContent xmlns:mc="http://schemas.openxmlformats.org/markup-compatibility/2006" xmlns:a14="http://schemas.microsoft.com/office/drawing/2010/main">
+        <mc:Choice Requires="a14">
           <p:sp>
             <p:nvSpPr>
               <p:cNvPr id="6" name="テキスト ボックス 5">
@@ -6757,13 +6703,7 @@
                       <a:rPr lang="en-US" altLang="ja-JP" sz="2400" b="0" i="1" smtClean="0">
                         <a:latin typeface="Cambria Math" panose="02040503050406030204" pitchFamily="18" charset="0"/>
                       </a:rPr>
-                      <m:t>=−</m:t>
-                    </m:r>
-                    <m:r>
-                      <a:rPr lang="en-US" altLang="ja-JP" sz="2400" b="0" i="1" smtClean="0">
-                        <a:latin typeface="Cambria Math" panose="02040503050406030204" pitchFamily="18" charset="0"/>
-                      </a:rPr>
-                      <m:t>21.7</m:t>
+                      <m:t>=−21.7</m:t>
                     </m:r>
                   </m:oMath>
                 </a14:m>
@@ -6996,7 +6936,7 @@
             </p:txBody>
           </p:sp>
         </mc:Choice>
-        <mc:Fallback>
+        <mc:Fallback xmlns="">
           <p:sp>
             <p:nvSpPr>
               <p:cNvPr id="6" name="テキスト ボックス 5">
@@ -7107,8 +7047,8 @@
           </a:p>
         </p:txBody>
       </p:sp>
-      <mc:AlternateContent xmlns:mc="http://schemas.openxmlformats.org/markup-compatibility/2006">
-        <mc:Choice xmlns:a14="http://schemas.microsoft.com/office/drawing/2010/main" Requires="a14">
+      <mc:AlternateContent xmlns:mc="http://schemas.openxmlformats.org/markup-compatibility/2006" xmlns:a14="http://schemas.microsoft.com/office/drawing/2010/main">
+        <mc:Choice Requires="a14">
           <p:sp>
             <p:nvSpPr>
               <p:cNvPr id="6" name="テキスト ボックス 5">
@@ -7633,7 +7573,7 @@
             </p:txBody>
           </p:sp>
         </mc:Choice>
-        <mc:Fallback>
+        <mc:Fallback xmlns="">
           <p:sp>
             <p:nvSpPr>
               <p:cNvPr id="6" name="テキスト ボックス 5">
@@ -7744,8 +7684,8 @@
           </a:p>
         </p:txBody>
       </p:sp>
-      <mc:AlternateContent xmlns:mc="http://schemas.openxmlformats.org/markup-compatibility/2006">
-        <mc:Choice xmlns:a14="http://schemas.microsoft.com/office/drawing/2010/main" Requires="a14">
+      <mc:AlternateContent xmlns:mc="http://schemas.openxmlformats.org/markup-compatibility/2006" xmlns:a14="http://schemas.microsoft.com/office/drawing/2010/main">
+        <mc:Choice Requires="a14">
           <p:sp>
             <p:nvSpPr>
               <p:cNvPr id="6" name="テキスト ボックス 5">
@@ -8534,7 +8474,7 @@
             </p:txBody>
           </p:sp>
         </mc:Choice>
-        <mc:Fallback>
+        <mc:Fallback xmlns="">
           <p:sp>
             <p:nvSpPr>
               <p:cNvPr id="6" name="テキスト ボックス 5">
@@ -9580,8 +9520,8 @@
           </a:p>
         </p:txBody>
       </p:sp>
-      <mc:AlternateContent xmlns:mc="http://schemas.openxmlformats.org/markup-compatibility/2006" xmlns:a14="http://schemas.microsoft.com/office/drawing/2010/main">
-        <mc:Choice Requires="a14">
+      <mc:AlternateContent xmlns:mc="http://schemas.openxmlformats.org/markup-compatibility/2006">
+        <mc:Choice xmlns:a14="http://schemas.microsoft.com/office/drawing/2010/main" Requires="a14">
           <p:sp>
             <p:nvSpPr>
               <p:cNvPr id="6" name="テキスト ボックス 5">
@@ -9612,7 +9552,7 @@
               <a:p>
                 <a:r>
                   <a:rPr lang="ja-JP" altLang="en-US" sz="2400" dirty="0"/>
-                  <a:t>ビリヤードゲームで手玉を突き、手玉と９番玉に衝突させました。</a:t>
+                  <a:t>ビリヤードゲームで手玉を突き、手玉を９番玉に衝突させました。</a:t>
                 </a:r>
                 <a:endParaRPr lang="en-US" altLang="ja-JP" sz="2400" dirty="0"/>
               </a:p>
@@ -9626,7 +9566,7 @@
               <a:p>
                 <a:r>
                   <a:rPr lang="ja-JP" altLang="en-US" sz="2400" dirty="0"/>
-                  <a:t>以下の条件の時の９番玉の速度を求めなさい。</a:t>
+                  <a:t>以下の条件の時の９番玉の衝突後の速度を求めなさい。</a:t>
                 </a:r>
                 <a:endParaRPr lang="en-US" altLang="ja-JP" sz="2400" dirty="0"/>
               </a:p>
@@ -10523,7 +10463,7 @@
             </p:txBody>
           </p:sp>
         </mc:Choice>
-        <mc:Fallback xmlns="">
+        <mc:Fallback>
           <p:sp>
             <p:nvSpPr>
               <p:cNvPr id="6" name="テキスト ボックス 5">
@@ -10634,8 +10574,8 @@
           </a:p>
         </p:txBody>
       </p:sp>
-      <mc:AlternateContent xmlns:mc="http://schemas.openxmlformats.org/markup-compatibility/2006" xmlns:a14="http://schemas.microsoft.com/office/drawing/2010/main">
-        <mc:Choice Requires="a14">
+      <mc:AlternateContent xmlns:mc="http://schemas.openxmlformats.org/markup-compatibility/2006">
+        <mc:Choice xmlns:a14="http://schemas.microsoft.com/office/drawing/2010/main" Requires="a14">
           <p:sp>
             <p:nvSpPr>
               <p:cNvPr id="6" name="テキスト ボックス 5">
@@ -10666,7 +10606,7 @@
               <a:p>
                 <a:r>
                   <a:rPr lang="ja-JP" altLang="en-US" sz="2400" dirty="0"/>
-                  <a:t>ビリヤードゲームで手玉を突き、手玉と９番玉に衝突させました。</a:t>
+                  <a:t>ビリヤードゲームで手玉を突き、手玉を９番玉に衝突させました。</a:t>
                 </a:r>
                 <a:endParaRPr lang="en-US" altLang="ja-JP" sz="2400" dirty="0"/>
               </a:p>
@@ -10680,7 +10620,7 @@
               <a:p>
                 <a:r>
                   <a:rPr lang="ja-JP" altLang="en-US" sz="2400" dirty="0"/>
-                  <a:t>以下の条件の時の９番玉の速度を求めなさい。（３</a:t>
+                  <a:t>以下の条件の時の９番玉の衝突後の速度を求めなさい。（３</a:t>
                 </a:r>
                 <a:r>
                   <a:rPr lang="en-US" altLang="ja-JP" sz="2400" dirty="0"/>
@@ -11721,7 +11661,7 @@
             </p:txBody>
           </p:sp>
         </mc:Choice>
-        <mc:Fallback xmlns="">
+        <mc:Fallback>
           <p:sp>
             <p:nvSpPr>
               <p:cNvPr id="6" name="テキスト ボックス 5">
@@ -11832,8 +11772,8 @@
           </a:p>
         </p:txBody>
       </p:sp>
-      <mc:AlternateContent xmlns:mc="http://schemas.openxmlformats.org/markup-compatibility/2006">
-        <mc:Choice xmlns:a14="http://schemas.microsoft.com/office/drawing/2010/main" Requires="a14">
+      <mc:AlternateContent xmlns:mc="http://schemas.openxmlformats.org/markup-compatibility/2006" xmlns:a14="http://schemas.microsoft.com/office/drawing/2010/main">
+        <mc:Choice Requires="a14">
           <p:sp>
             <p:nvSpPr>
               <p:cNvPr id="6" name="テキスト ボックス 5">
@@ -11982,7 +11922,7 @@
             </p:txBody>
           </p:sp>
         </mc:Choice>
-        <mc:Fallback>
+        <mc:Fallback xmlns="">
           <p:sp>
             <p:nvSpPr>
               <p:cNvPr id="6" name="テキスト ボックス 5">
@@ -12093,8 +12033,8 @@
           </a:p>
         </p:txBody>
       </p:sp>
-      <mc:AlternateContent xmlns:mc="http://schemas.openxmlformats.org/markup-compatibility/2006">
-        <mc:Choice xmlns:a14="http://schemas.microsoft.com/office/drawing/2010/main" Requires="a14">
+      <mc:AlternateContent xmlns:mc="http://schemas.openxmlformats.org/markup-compatibility/2006" xmlns:a14="http://schemas.microsoft.com/office/drawing/2010/main">
+        <mc:Choice Requires="a14">
           <p:sp>
             <p:nvSpPr>
               <p:cNvPr id="6" name="テキスト ボックス 5">
@@ -12443,7 +12383,7 @@
             </p:txBody>
           </p:sp>
         </mc:Choice>
-        <mc:Fallback>
+        <mc:Fallback xmlns="">
           <p:sp>
             <p:nvSpPr>
               <p:cNvPr id="6" name="テキスト ボックス 5">
@@ -12608,8 +12548,8 @@
           </a:p>
         </p:txBody>
       </p:sp>
-      <mc:AlternateContent xmlns:mc="http://schemas.openxmlformats.org/markup-compatibility/2006">
-        <mc:Choice xmlns:a14="http://schemas.microsoft.com/office/drawing/2010/main" Requires="a14">
+      <mc:AlternateContent xmlns:mc="http://schemas.openxmlformats.org/markup-compatibility/2006" xmlns:a14="http://schemas.microsoft.com/office/drawing/2010/main">
+        <mc:Choice Requires="a14">
           <p:sp>
             <p:nvSpPr>
               <p:cNvPr id="6" name="テキスト ボックス 5">
@@ -13068,7 +13008,7 @@
             </p:txBody>
           </p:sp>
         </mc:Choice>
-        <mc:Fallback>
+        <mc:Fallback xmlns="">
           <p:sp>
             <p:nvSpPr>
               <p:cNvPr id="6" name="テキスト ボックス 5">

--- a/ゲーム科2年/00_前期/ゲーム開発Ⅲ/ゲーム物理学/座学/26_衝突.pptx
+++ b/ゲーム科2年/00_前期/ゲーム開発Ⅲ/ゲーム物理学/座学/26_衝突.pptx
@@ -18,6 +18,7 @@
     <p:sldId id="271" r:id="rId12"/>
     <p:sldId id="272" r:id="rId13"/>
     <p:sldId id="273" r:id="rId14"/>
+    <p:sldId id="275" r:id="rId15"/>
   </p:sldIdLst>
   <p:sldSz cx="12192000" cy="6858000"/>
   <p:notesSz cx="6858000" cy="9144000"/>
@@ -271,7 +272,7 @@
           <a:p>
             <a:fld id="{E9CC885B-4903-4D54-9A93-00025F12DED9}" type="datetimeFigureOut">
               <a:rPr kumimoji="1" lang="ja-JP" altLang="en-US" smtClean="0"/>
-              <a:t>2025/10/31</a:t>
+              <a:t>2025/11/4</a:t>
             </a:fld>
             <a:endParaRPr kumimoji="1" lang="ja-JP" altLang="en-US"/>
           </a:p>
@@ -501,7 +502,7 @@
           <a:p>
             <a:fld id="{E9CC885B-4903-4D54-9A93-00025F12DED9}" type="datetimeFigureOut">
               <a:rPr kumimoji="1" lang="ja-JP" altLang="en-US" smtClean="0"/>
-              <a:t>2025/10/31</a:t>
+              <a:t>2025/11/4</a:t>
             </a:fld>
             <a:endParaRPr kumimoji="1" lang="ja-JP" altLang="en-US"/>
           </a:p>
@@ -741,7 +742,7 @@
           <a:p>
             <a:fld id="{E9CC885B-4903-4D54-9A93-00025F12DED9}" type="datetimeFigureOut">
               <a:rPr kumimoji="1" lang="ja-JP" altLang="en-US" smtClean="0"/>
-              <a:t>2025/10/31</a:t>
+              <a:t>2025/11/4</a:t>
             </a:fld>
             <a:endParaRPr kumimoji="1" lang="ja-JP" altLang="en-US"/>
           </a:p>
@@ -971,7 +972,7 @@
           <a:p>
             <a:fld id="{E9CC885B-4903-4D54-9A93-00025F12DED9}" type="datetimeFigureOut">
               <a:rPr kumimoji="1" lang="ja-JP" altLang="en-US" smtClean="0"/>
-              <a:t>2025/10/31</a:t>
+              <a:t>2025/11/4</a:t>
             </a:fld>
             <a:endParaRPr kumimoji="1" lang="ja-JP" altLang="en-US"/>
           </a:p>
@@ -1246,7 +1247,7 @@
           <a:p>
             <a:fld id="{E9CC885B-4903-4D54-9A93-00025F12DED9}" type="datetimeFigureOut">
               <a:rPr kumimoji="1" lang="ja-JP" altLang="en-US" smtClean="0"/>
-              <a:t>2025/10/31</a:t>
+              <a:t>2025/11/4</a:t>
             </a:fld>
             <a:endParaRPr kumimoji="1" lang="ja-JP" altLang="en-US"/>
           </a:p>
@@ -1575,7 +1576,7 @@
           <a:p>
             <a:fld id="{E9CC885B-4903-4D54-9A93-00025F12DED9}" type="datetimeFigureOut">
               <a:rPr kumimoji="1" lang="ja-JP" altLang="en-US" smtClean="0"/>
-              <a:t>2025/10/31</a:t>
+              <a:t>2025/11/4</a:t>
             </a:fld>
             <a:endParaRPr kumimoji="1" lang="ja-JP" altLang="en-US"/>
           </a:p>
@@ -2051,7 +2052,7 @@
           <a:p>
             <a:fld id="{E9CC885B-4903-4D54-9A93-00025F12DED9}" type="datetimeFigureOut">
               <a:rPr kumimoji="1" lang="ja-JP" altLang="en-US" smtClean="0"/>
-              <a:t>2025/10/31</a:t>
+              <a:t>2025/11/4</a:t>
             </a:fld>
             <a:endParaRPr kumimoji="1" lang="ja-JP" altLang="en-US"/>
           </a:p>
@@ -2192,7 +2193,7 @@
           <a:p>
             <a:fld id="{E9CC885B-4903-4D54-9A93-00025F12DED9}" type="datetimeFigureOut">
               <a:rPr kumimoji="1" lang="ja-JP" altLang="en-US" smtClean="0"/>
-              <a:t>2025/10/31</a:t>
+              <a:t>2025/11/4</a:t>
             </a:fld>
             <a:endParaRPr kumimoji="1" lang="ja-JP" altLang="en-US"/>
           </a:p>
@@ -2305,7 +2306,7 @@
           <a:p>
             <a:fld id="{E9CC885B-4903-4D54-9A93-00025F12DED9}" type="datetimeFigureOut">
               <a:rPr kumimoji="1" lang="ja-JP" altLang="en-US" smtClean="0"/>
-              <a:t>2025/10/31</a:t>
+              <a:t>2025/11/4</a:t>
             </a:fld>
             <a:endParaRPr kumimoji="1" lang="ja-JP" altLang="en-US"/>
           </a:p>
@@ -2648,7 +2649,7 @@
           <a:p>
             <a:fld id="{E9CC885B-4903-4D54-9A93-00025F12DED9}" type="datetimeFigureOut">
               <a:rPr kumimoji="1" lang="ja-JP" altLang="en-US" smtClean="0"/>
-              <a:t>2025/10/31</a:t>
+              <a:t>2025/11/4</a:t>
             </a:fld>
             <a:endParaRPr kumimoji="1" lang="ja-JP" altLang="en-US"/>
           </a:p>
@@ -2936,7 +2937,7 @@
           <a:p>
             <a:fld id="{E9CC885B-4903-4D54-9A93-00025F12DED9}" type="datetimeFigureOut">
               <a:rPr kumimoji="1" lang="ja-JP" altLang="en-US" smtClean="0"/>
-              <a:t>2025/10/31</a:t>
+              <a:t>2025/11/4</a:t>
             </a:fld>
             <a:endParaRPr kumimoji="1" lang="ja-JP" altLang="en-US"/>
           </a:p>
@@ -3209,7 +3210,7 @@
           <a:p>
             <a:fld id="{E9CC885B-4903-4D54-9A93-00025F12DED9}" type="datetimeFigureOut">
               <a:rPr kumimoji="1" lang="ja-JP" altLang="en-US" smtClean="0"/>
-              <a:t>2025/10/31</a:t>
+              <a:t>2025/11/4</a:t>
             </a:fld>
             <a:endParaRPr kumimoji="1" lang="ja-JP" altLang="en-US"/>
           </a:p>
@@ -3834,8 +3835,8 @@
           </a:p>
         </p:txBody>
       </p:sp>
-      <mc:AlternateContent xmlns:mc="http://schemas.openxmlformats.org/markup-compatibility/2006" xmlns:a14="http://schemas.microsoft.com/office/drawing/2010/main">
-        <mc:Choice Requires="a14">
+      <mc:AlternateContent xmlns:mc="http://schemas.openxmlformats.org/markup-compatibility/2006">
+        <mc:Choice xmlns:a14="http://schemas.microsoft.com/office/drawing/2010/main" Requires="a14">
           <p:sp>
             <p:nvSpPr>
               <p:cNvPr id="6" name="テキスト ボックス 5">
@@ -3873,7 +3874,7 @@
               <a:p>
                 <a:r>
                   <a:rPr lang="ja-JP" altLang="en-US" sz="2400" dirty="0"/>
-                  <a:t>ただし、鉛同士のはねかえり係数は</a:t>
+                  <a:t>ただし、衝突は正面衝突で、鉛同士のはねかえり係数は</a:t>
                 </a:r>
                 <a:r>
                   <a:rPr lang="en-US" altLang="ja-JP" sz="2400" dirty="0"/>
@@ -4873,7 +4874,7 @@
             </p:txBody>
           </p:sp>
         </mc:Choice>
-        <mc:Fallback xmlns="">
+        <mc:Fallback>
           <p:sp>
             <p:nvSpPr>
               <p:cNvPr id="6" name="テキスト ボックス 5">
@@ -4984,8 +4985,8 @@
           </a:p>
         </p:txBody>
       </p:sp>
-      <mc:AlternateContent xmlns:mc="http://schemas.openxmlformats.org/markup-compatibility/2006" xmlns:a14="http://schemas.microsoft.com/office/drawing/2010/main">
-        <mc:Choice Requires="a14">
+      <mc:AlternateContent xmlns:mc="http://schemas.openxmlformats.org/markup-compatibility/2006">
+        <mc:Choice xmlns:a14="http://schemas.microsoft.com/office/drawing/2010/main" Requires="a14">
           <p:sp>
             <p:nvSpPr>
               <p:cNvPr id="6" name="テキスト ボックス 5">
@@ -5023,7 +5024,7 @@
               <a:p>
                 <a:r>
                   <a:rPr lang="ja-JP" altLang="en-US" sz="2400" dirty="0"/>
-                  <a:t>ただし、鉛同士のはねかえり係数は</a:t>
+                  <a:t>ただし、衝突は正面衝突で、鉛同士のはねかえり係数は</a:t>
                 </a:r>
                 <a:r>
                   <a:rPr lang="en-US" altLang="ja-JP" sz="2400" dirty="0"/>
@@ -5602,7 +5603,7 @@
             </p:txBody>
           </p:sp>
         </mc:Choice>
-        <mc:Fallback xmlns="">
+        <mc:Fallback>
           <p:sp>
             <p:nvSpPr>
               <p:cNvPr id="6" name="テキスト ボックス 5">
@@ -5713,8 +5714,8 @@
           </a:p>
         </p:txBody>
       </p:sp>
-      <mc:AlternateContent xmlns:mc="http://schemas.openxmlformats.org/markup-compatibility/2006" xmlns:a14="http://schemas.microsoft.com/office/drawing/2010/main">
-        <mc:Choice Requires="a14">
+      <mc:AlternateContent xmlns:mc="http://schemas.openxmlformats.org/markup-compatibility/2006">
+        <mc:Choice xmlns:a14="http://schemas.microsoft.com/office/drawing/2010/main" Requires="a14">
           <p:sp>
             <p:nvSpPr>
               <p:cNvPr id="6" name="テキスト ボックス 5">
@@ -5752,7 +5753,7 @@
               <a:p>
                 <a:r>
                   <a:rPr lang="ja-JP" altLang="en-US" sz="2400" dirty="0"/>
-                  <a:t>ただし、鉛同士のはねかえり係数は</a:t>
+                  <a:t>ただし、衝突は正面衝突で、鉛同士のはねかえり係数は</a:t>
                 </a:r>
                 <a:r>
                   <a:rPr lang="en-US" altLang="ja-JP" sz="2400" dirty="0"/>
@@ -6278,7 +6279,7 @@
             </p:txBody>
           </p:sp>
         </mc:Choice>
-        <mc:Fallback xmlns="">
+        <mc:Fallback>
           <p:sp>
             <p:nvSpPr>
               <p:cNvPr id="6" name="テキスト ボックス 5">
@@ -6389,8 +6390,8 @@
           </a:p>
         </p:txBody>
       </p:sp>
-      <mc:AlternateContent xmlns:mc="http://schemas.openxmlformats.org/markup-compatibility/2006" xmlns:a14="http://schemas.microsoft.com/office/drawing/2010/main">
-        <mc:Choice Requires="a14">
+      <mc:AlternateContent xmlns:mc="http://schemas.openxmlformats.org/markup-compatibility/2006">
+        <mc:Choice xmlns:a14="http://schemas.microsoft.com/office/drawing/2010/main" Requires="a14">
           <p:sp>
             <p:nvSpPr>
               <p:cNvPr id="6" name="テキスト ボックス 5">
@@ -6428,7 +6429,7 @@
               <a:p>
                 <a:r>
                   <a:rPr lang="ja-JP" altLang="en-US" sz="2400" dirty="0"/>
-                  <a:t>ただし、鉛同士のはねかえり係数は</a:t>
+                  <a:t>ただし、衝突は正面衝突で、鉛同士のはねかえり係数は</a:t>
                 </a:r>
                 <a:r>
                   <a:rPr lang="en-US" altLang="ja-JP" sz="2400" dirty="0"/>
@@ -6936,7 +6937,7 @@
             </p:txBody>
           </p:sp>
         </mc:Choice>
-        <mc:Fallback xmlns="">
+        <mc:Fallback>
           <p:sp>
             <p:nvSpPr>
               <p:cNvPr id="6" name="テキスト ボックス 5">
@@ -6985,6 +6986,309 @@
     <p:extLst>
       <p:ext uri="{BB962C8B-B14F-4D97-AF65-F5344CB8AC3E}">
         <p14:creationId xmlns:p14="http://schemas.microsoft.com/office/powerpoint/2010/main" val="1018551645"/>
+      </p:ext>
+    </p:extLst>
+  </p:cSld>
+  <p:clrMapOvr>
+    <a:masterClrMapping/>
+  </p:clrMapOvr>
+</p:sld>
+</file>
+
+<file path=ppt/slides/slide14.xml><?xml version="1.0" encoding="utf-8"?>
+<p:sld xmlns:a="http://schemas.openxmlformats.org/drawingml/2006/main" xmlns:r="http://schemas.openxmlformats.org/officeDocument/2006/relationships" xmlns:p="http://schemas.openxmlformats.org/presentationml/2006/main">
+  <p:cSld>
+    <p:spTree>
+      <p:nvGrpSpPr>
+        <p:cNvPr id="1" name=""/>
+        <p:cNvGrpSpPr/>
+        <p:nvPr/>
+      </p:nvGrpSpPr>
+      <p:grpSpPr>
+        <a:xfrm>
+          <a:off x="0" y="0"/>
+          <a:ext cx="0" cy="0"/>
+          <a:chOff x="0" y="0"/>
+          <a:chExt cx="0" cy="0"/>
+        </a:xfrm>
+      </p:grpSpPr>
+      <p:sp>
+        <p:nvSpPr>
+          <p:cNvPr id="4" name="テキスト ボックス 3">
+            <a:extLst>
+              <a:ext uri="{FF2B5EF4-FFF2-40B4-BE49-F238E27FC236}">
+                <a16:creationId xmlns:a16="http://schemas.microsoft.com/office/drawing/2014/main" id="{5A13BF46-B8C5-48AA-8308-C9ECFF431A18}"/>
+              </a:ext>
+            </a:extLst>
+          </p:cNvPr>
+          <p:cNvSpPr txBox="1"/>
+          <p:nvPr/>
+        </p:nvSpPr>
+        <p:spPr>
+          <a:xfrm>
+            <a:off x="567542" y="491954"/>
+            <a:ext cx="1943161" cy="584775"/>
+          </a:xfrm>
+          <a:prstGeom prst="rect">
+            <a:avLst/>
+          </a:prstGeom>
+          <a:noFill/>
+        </p:spPr>
+        <p:txBody>
+          <a:bodyPr wrap="none" rtlCol="0">
+            <a:spAutoFit/>
+          </a:bodyPr>
+          <a:lstStyle/>
+          <a:p>
+            <a:r>
+              <a:rPr lang="ja-JP" altLang="en-US" sz="3200" b="1" u="sng" dirty="0"/>
+              <a:t>衝突 練習</a:t>
+            </a:r>
+            <a:endParaRPr kumimoji="1" lang="en-US" altLang="ja-JP" sz="3200" b="1" u="sng" dirty="0"/>
+          </a:p>
+        </p:txBody>
+      </p:sp>
+      <mc:AlternateContent xmlns:mc="http://schemas.openxmlformats.org/markup-compatibility/2006">
+        <mc:Choice xmlns:a14="http://schemas.microsoft.com/office/drawing/2010/main" Requires="a14">
+          <p:sp>
+            <p:nvSpPr>
+              <p:cNvPr id="6" name="テキスト ボックス 5">
+                <a:extLst>
+                  <a:ext uri="{FF2B5EF4-FFF2-40B4-BE49-F238E27FC236}">
+                    <a16:creationId xmlns:a16="http://schemas.microsoft.com/office/drawing/2014/main" id="{55830AD6-028B-4C4E-80BF-B70DFC1C3A46}"/>
+                  </a:ext>
+                </a:extLst>
+              </p:cNvPr>
+              <p:cNvSpPr txBox="1"/>
+              <p:nvPr/>
+            </p:nvSpPr>
+            <p:spPr>
+              <a:xfrm>
+                <a:off x="567542" y="1216429"/>
+                <a:ext cx="11264622" cy="2308324"/>
+              </a:xfrm>
+              <a:prstGeom prst="rect">
+                <a:avLst/>
+              </a:prstGeom>
+              <a:noFill/>
+            </p:spPr>
+            <p:txBody>
+              <a:bodyPr wrap="none" rtlCol="0">
+                <a:spAutoFit/>
+              </a:bodyPr>
+              <a:lstStyle/>
+              <a:p>
+                <a:r>
+                  <a:rPr lang="ja-JP" altLang="en-US" sz="2400" dirty="0"/>
+                  <a:t>ゲーム中の以下のオブジェクトが衝突した後の、それぞれの速度を求めなさい。</a:t>
+                </a:r>
+                <a:endParaRPr lang="en-US" altLang="ja-JP" sz="2400" dirty="0"/>
+              </a:p>
+              <a:p>
+                <a:r>
+                  <a:rPr lang="ja-JP" altLang="en-US" sz="2400" dirty="0"/>
+                  <a:t>ただし、衝突は正面衝突で、はねかえり係数は</a:t>
+                </a:r>
+                <a:r>
+                  <a:rPr lang="en-US" altLang="ja-JP" sz="2400" dirty="0"/>
+                  <a:t>0.5</a:t>
+                </a:r>
+                <a:r>
+                  <a:rPr lang="ja-JP" altLang="en-US" sz="2400" dirty="0"/>
+                  <a:t>とする</a:t>
+                </a:r>
+                <a:endParaRPr lang="en-US" altLang="ja-JP" sz="2400" dirty="0"/>
+              </a:p>
+              <a:p>
+                <a:r>
+                  <a:rPr lang="ja-JP" altLang="en-US" sz="2400" dirty="0"/>
+                  <a:t>■オブジェクト</a:t>
+                </a:r>
+                <a:r>
+                  <a:rPr lang="en-US" altLang="ja-JP" sz="2400" dirty="0"/>
+                  <a:t>A</a:t>
+                </a:r>
+              </a:p>
+              <a:p>
+                <a:r>
+                  <a:rPr lang="ja-JP" altLang="en-US" sz="2400" dirty="0"/>
+                  <a:t>・質量：</a:t>
+                </a:r>
+                <a14:m>
+                  <m:oMath xmlns:m="http://schemas.openxmlformats.org/officeDocument/2006/math">
+                    <m:r>
+                      <a:rPr lang="en-US" altLang="ja-JP" sz="2400" b="0" i="1" dirty="0" smtClean="0">
+                        <a:latin typeface="Cambria Math" panose="02040503050406030204" pitchFamily="18" charset="0"/>
+                      </a:rPr>
+                      <m:t>2</m:t>
+                    </m:r>
+                    <m:r>
+                      <a:rPr lang="en-US" altLang="ja-JP" sz="2400" b="0" i="1" dirty="0" smtClean="0">
+                        <a:latin typeface="Cambria Math" panose="02040503050406030204" pitchFamily="18" charset="0"/>
+                      </a:rPr>
+                      <m:t>𝑘𝑔</m:t>
+                    </m:r>
+                  </m:oMath>
+                </a14:m>
+                <a:r>
+                  <a:rPr lang="en-US" altLang="ja-JP" sz="2400" dirty="0"/>
+                  <a:t>	</a:t>
+                </a:r>
+                <a:r>
+                  <a:rPr lang="ja-JP" altLang="en-US" sz="2400" dirty="0"/>
+                  <a:t>・速度</a:t>
+                </a:r>
+                <a14:m>
+                  <m:oMath xmlns:m="http://schemas.openxmlformats.org/officeDocument/2006/math">
+                    <m:r>
+                      <a:rPr lang="en-US" altLang="ja-JP" sz="2400" b="0" i="1" dirty="0" smtClean="0">
+                        <a:latin typeface="Cambria Math" panose="02040503050406030204" pitchFamily="18" charset="0"/>
+                      </a:rPr>
+                      <m:t>6</m:t>
+                    </m:r>
+                    <m:r>
+                      <a:rPr lang="en-US" altLang="ja-JP" sz="2400" i="1" dirty="0" smtClean="0">
+                        <a:latin typeface="Cambria Math" panose="02040503050406030204" pitchFamily="18" charset="0"/>
+                      </a:rPr>
+                      <m:t>𝑚</m:t>
+                    </m:r>
+                    <m:r>
+                      <a:rPr lang="en-US" altLang="ja-JP" sz="2400" i="1" dirty="0" smtClean="0">
+                        <a:latin typeface="Cambria Math" panose="02040503050406030204" pitchFamily="18" charset="0"/>
+                      </a:rPr>
+                      <m:t>/</m:t>
+                    </m:r>
+                    <m:r>
+                      <a:rPr lang="ja-JP" altLang="en-US" sz="2400" i="1" dirty="0" smtClean="0">
+                        <a:latin typeface="Cambria Math" panose="02040503050406030204" pitchFamily="18" charset="0"/>
+                      </a:rPr>
+                      <m:t>秒</m:t>
+                    </m:r>
+                  </m:oMath>
+                </a14:m>
+                <a:endParaRPr lang="en-US" altLang="ja-JP" sz="2400" dirty="0"/>
+              </a:p>
+              <a:p>
+                <a:r>
+                  <a:rPr lang="ja-JP" altLang="en-US" sz="2400" dirty="0"/>
+                  <a:t>■オブジェクト</a:t>
+                </a:r>
+                <a:r>
+                  <a:rPr lang="en-US" altLang="ja-JP" sz="2400" dirty="0"/>
+                  <a:t>B</a:t>
+                </a:r>
+              </a:p>
+              <a:p>
+                <a:r>
+                  <a:rPr lang="ja-JP" altLang="en-US" sz="2400" dirty="0"/>
+                  <a:t>・質量：</a:t>
+                </a:r>
+                <a14:m>
+                  <m:oMath xmlns:m="http://schemas.openxmlformats.org/officeDocument/2006/math">
+                    <m:r>
+                      <a:rPr lang="en-US" altLang="ja-JP" sz="2400" b="0" i="1" dirty="0" smtClean="0">
+                        <a:latin typeface="Cambria Math" panose="02040503050406030204" pitchFamily="18" charset="0"/>
+                      </a:rPr>
+                      <m:t>3</m:t>
+                    </m:r>
+                    <m:r>
+                      <a:rPr lang="en-US" altLang="ja-JP" sz="2400" b="0" i="1" dirty="0" smtClean="0">
+                        <a:latin typeface="Cambria Math" panose="02040503050406030204" pitchFamily="18" charset="0"/>
+                      </a:rPr>
+                      <m:t>𝑘𝑔</m:t>
+                    </m:r>
+                  </m:oMath>
+                </a14:m>
+                <a:r>
+                  <a:rPr lang="en-US" altLang="ja-JP" sz="2400" dirty="0"/>
+                  <a:t>	</a:t>
+                </a:r>
+                <a:r>
+                  <a:rPr lang="ja-JP" altLang="en-US" sz="2400" dirty="0"/>
+                  <a:t>・速度</a:t>
+                </a:r>
+                <a14:m>
+                  <m:oMath xmlns:m="http://schemas.openxmlformats.org/officeDocument/2006/math">
+                    <m:r>
+                      <a:rPr lang="en-US" altLang="ja-JP" sz="2400" i="1" dirty="0" smtClean="0">
+                        <a:latin typeface="Cambria Math" panose="02040503050406030204" pitchFamily="18" charset="0"/>
+                      </a:rPr>
+                      <m:t>−4</m:t>
+                    </m:r>
+                    <m:r>
+                      <a:rPr lang="en-US" altLang="ja-JP" sz="2400" i="1" dirty="0" smtClean="0">
+                        <a:latin typeface="Cambria Math" panose="02040503050406030204" pitchFamily="18" charset="0"/>
+                      </a:rPr>
+                      <m:t>𝑚</m:t>
+                    </m:r>
+                    <m:r>
+                      <a:rPr lang="en-US" altLang="ja-JP" sz="2400" i="1" dirty="0" smtClean="0">
+                        <a:latin typeface="Cambria Math" panose="02040503050406030204" pitchFamily="18" charset="0"/>
+                      </a:rPr>
+                      <m:t>/</m:t>
+                    </m:r>
+                    <m:r>
+                      <a:rPr lang="ja-JP" altLang="en-US" sz="2400" i="1" dirty="0" smtClean="0">
+                        <a:latin typeface="Cambria Math" panose="02040503050406030204" pitchFamily="18" charset="0"/>
+                      </a:rPr>
+                      <m:t>秒</m:t>
+                    </m:r>
+                  </m:oMath>
+                </a14:m>
+                <a:endParaRPr lang="en-US" altLang="ja-JP" sz="2400" dirty="0"/>
+              </a:p>
+            </p:txBody>
+          </p:sp>
+        </mc:Choice>
+        <mc:Fallback>
+          <p:sp>
+            <p:nvSpPr>
+              <p:cNvPr id="6" name="テキスト ボックス 5">
+                <a:extLst>
+                  <a:ext uri="{FF2B5EF4-FFF2-40B4-BE49-F238E27FC236}">
+                    <a16:creationId xmlns:a16="http://schemas.microsoft.com/office/drawing/2014/main" id="{55830AD6-028B-4C4E-80BF-B70DFC1C3A46}"/>
+                  </a:ext>
+                </a:extLst>
+              </p:cNvPr>
+              <p:cNvSpPr txBox="1">
+                <a:spLocks noRot="1" noChangeAspect="1" noMove="1" noResize="1" noEditPoints="1" noAdjustHandles="1" noChangeArrowheads="1" noChangeShapeType="1" noTextEdit="1"/>
+              </p:cNvSpPr>
+              <p:nvPr/>
+            </p:nvSpPr>
+            <p:spPr>
+              <a:xfrm>
+                <a:off x="567542" y="1216429"/>
+                <a:ext cx="11264622" cy="2308324"/>
+              </a:xfrm>
+              <a:prstGeom prst="rect">
+                <a:avLst/>
+              </a:prstGeom>
+              <a:blipFill>
+                <a:blip r:embed="rId2"/>
+                <a:stretch>
+                  <a:fillRect l="-812" t="-2116" b="-5291"/>
+                </a:stretch>
+              </a:blipFill>
+            </p:spPr>
+            <p:txBody>
+              <a:bodyPr/>
+              <a:lstStyle/>
+              <a:p>
+                <a:r>
+                  <a:rPr lang="ja-JP" altLang="en-US">
+                    <a:noFill/>
+                  </a:rPr>
+                  <a:t> </a:t>
+                </a:r>
+              </a:p>
+            </p:txBody>
+          </p:sp>
+        </mc:Fallback>
+      </mc:AlternateContent>
+    </p:spTree>
+    <p:extLst>
+      <p:ext uri="{BB962C8B-B14F-4D97-AF65-F5344CB8AC3E}">
+        <p14:creationId xmlns:p14="http://schemas.microsoft.com/office/powerpoint/2010/main" val="3241628000"/>
       </p:ext>
     </p:extLst>
   </p:cSld>
@@ -9520,8 +9824,8 @@
           </a:p>
         </p:txBody>
       </p:sp>
-      <mc:AlternateContent xmlns:mc="http://schemas.openxmlformats.org/markup-compatibility/2006">
-        <mc:Choice xmlns:a14="http://schemas.microsoft.com/office/drawing/2010/main" Requires="a14">
+      <mc:AlternateContent xmlns:mc="http://schemas.openxmlformats.org/markup-compatibility/2006" xmlns:a14="http://schemas.microsoft.com/office/drawing/2010/main">
+        <mc:Choice Requires="a14">
           <p:sp>
             <p:nvSpPr>
               <p:cNvPr id="6" name="テキスト ボックス 5">
@@ -10463,7 +10767,7 @@
             </p:txBody>
           </p:sp>
         </mc:Choice>
-        <mc:Fallback>
+        <mc:Fallback xmlns="">
           <p:sp>
             <p:nvSpPr>
               <p:cNvPr id="6" name="テキスト ボックス 5">
@@ -10574,8 +10878,8 @@
           </a:p>
         </p:txBody>
       </p:sp>
-      <mc:AlternateContent xmlns:mc="http://schemas.openxmlformats.org/markup-compatibility/2006">
-        <mc:Choice xmlns:a14="http://schemas.microsoft.com/office/drawing/2010/main" Requires="a14">
+      <mc:AlternateContent xmlns:mc="http://schemas.openxmlformats.org/markup-compatibility/2006" xmlns:a14="http://schemas.microsoft.com/office/drawing/2010/main">
+        <mc:Choice Requires="a14">
           <p:sp>
             <p:nvSpPr>
               <p:cNvPr id="6" name="テキスト ボックス 5">
@@ -11661,7 +11965,7 @@
             </p:txBody>
           </p:sp>
         </mc:Choice>
-        <mc:Fallback>
+        <mc:Fallback xmlns="">
           <p:sp>
             <p:nvSpPr>
               <p:cNvPr id="6" name="テキスト ボックス 5">
